--- a/Tugas_Week_5_Revisi-Francisco_Correia_Soares_164125002.pptx
+++ b/Tugas_Week_5_Revisi-Francisco_Correia_Soares_164125002.pptx
@@ -11,8 +11,10 @@
     <p:sldId id="256" r:id="rId2"/>
     <p:sldId id="257" r:id="rId3"/>
     <p:sldId id="258" r:id="rId4"/>
+    <p:sldId id="267" r:id="rId18"/>
     <p:sldId id="259" r:id="rId5"/>
     <p:sldId id="260" r:id="rId6"/>
+    <p:sldId id="268" r:id="rId19"/>
     <p:sldId id="261" r:id="rId7"/>
     <p:sldId id="265" r:id="rId16"/>
     <p:sldId id="266" r:id="rId17"/>
@@ -1951,7 +1953,7 @@
                 <a:ea typeface="Cambria" pitchFamily="34" charset="-122"/>
                 <a:cs typeface="Cambria" pitchFamily="34" charset="-120"/>
               </a:rPr>
-              <a:t>4.2</a:t>
+              <a:t>4.3</a:t>
             </a:r>
             <a:endParaRPr lang="en-US" sz="2000" dirty="0"/>
           </a:p>
@@ -1990,7 +1992,7 @@
                 <a:ea typeface="Cambria" pitchFamily="34" charset="-122"/>
                 <a:cs typeface="Cambria" pitchFamily="34" charset="-120"/>
               </a:rPr>
-              <a:t>Usulan #1: Baterai modul tanpa penyandingan</a:t>
+              <a:t>Usulan #1: Modul baterai standar tanpa penyandingan</a:t>
             </a:r>
             <a:endParaRPr lang="en-US" sz="3000" dirty="0"/>
           </a:p>
@@ -2029,7 +2031,7 @@
                 <a:ea typeface="Calibri" pitchFamily="34" charset="-122"/>
                 <a:cs typeface="Calibri" pitchFamily="34" charset="-120"/>
               </a:rPr>
-              <a:t>Menjawab skor terendah audit: modularitas (Rendah) dan pembongkaran (Sedang)</a:t>
+              <a:t>Menjawab skor audit terendah: modularitas (Rendah) dan reparasi/pembongkaran (Sedang)</a:t>
             </a:r>
             <a:endParaRPr lang="en-US" sz="1400" dirty="0"/>
           </a:p>
@@ -2068,7 +2070,7 @@
                 <a:ea typeface="Calibri" pitchFamily="34" charset="-122"/>
                 <a:cs typeface="Calibri" pitchFamily="34" charset="-120"/>
               </a:rPr>
-              <a:t>7</a:t>
+              <a:t>9</a:t>
             </a:r>
             <a:endParaRPr lang="en-US" sz="1000" dirty="0"/>
           </a:p>
@@ -2076,14 +2078,14 @@
       </p:sp>
       <p:sp>
         <p:nvSpPr>
-          <p:cNvPr id="102" name="Kartu Gap dari audit"/>
+          <p:cNvPr id="201" name="Kartu Gap dari audit"/>
           <p:cNvSpPr/>
           <p:nvPr/>
         </p:nvSpPr>
         <p:spPr>
           <a:xfrm>
-            <a:off x="457200" y="1280160"/>
-            <a:ext cx="5547360" cy="1737360"/>
+            <a:off x="457200" y="1188720"/>
+            <a:ext cx="5547360" cy="868680"/>
           </a:xfrm>
           <a:prstGeom prst="roundRect">
             <a:avLst>
@@ -2097,7 +2099,6 @@
             <a:solidFill>
               <a:srgbClr val="D5E2DD"/>
             </a:solidFill>
-            <a:prstDash val="solid"/>
           </a:ln>
           <a:effectLst>
             <a:outerShdw blurRad="76200" dist="25400" dir="5400000" algn="bl" rotWithShape="0">
@@ -2110,14 +2111,14 @@
       </p:sp>
       <p:sp>
         <p:nvSpPr>
-          <p:cNvPr id="103" name="Isi Gap dari audit"/>
+          <p:cNvPr id="202" name="Isi Gap dari audit"/>
           <p:cNvSpPr txBox="1"/>
           <p:nvPr/>
         </p:nvSpPr>
         <p:spPr>
           <a:xfrm>
-            <a:off x="640080" y="1417320"/>
-            <a:ext cx="5181600" cy="1508760"/>
+            <a:off x="640080" y="1280160"/>
+            <a:ext cx="5181600" cy="731520"/>
           </a:xfrm>
           <a:prstGeom prst="rect">
             <a:avLst/>
@@ -2126,36 +2127,25 @@
           <a:ln/>
         </p:spPr>
         <p:txBody>
-          <a:bodyPr wrap="square" lIns="0" tIns="0" rIns="0" bIns="0" rtlCol="0" anchor="t"/>
+          <a:bodyPr wrap="square" lIns="0" tIns="0" rIns="0" bIns="0" rtlCol="0" anchor="ctr"/>
           <a:lstStyle/>
           <a:p>
             <a:pPr marL="0" indent="0" algn="l">
-              <a:spcAft>
-                <a:spcPts val="400"/>
-              </a:spcAft>
-              <a:buNone/>
-            </a:pPr>
-            <a:r>
-              <a:rPr lang="id-ID" sz="1600" b="1" dirty="0">
+              <a:buNone/>
+            </a:pPr>
+            <a:r>
+              <a:rPr lang="id-ID" sz="1200" b="1" dirty="0">
                 <a:solidFill>
                   <a:srgbClr val="B3402F"/>
                 </a:solidFill>
-                <a:latin typeface="Cambria" pitchFamily="34" charset="0"/>
-                <a:ea typeface="Cambria" pitchFamily="34" charset="-122"/>
-                <a:cs typeface="Cambria" pitchFamily="34" charset="-120"/>
-              </a:rPr>
-              <a:t>Gap dari audit</a:t>
-            </a:r>
-          </a:p>
-          <a:p>
-            <a:pPr marL="0" indent="0" algn="l">
-              <a:spcAft>
-                <a:spcPts val="300"/>
-              </a:spcAft>
-              <a:buNone/>
-            </a:pPr>
-            <a:r>
-              <a:rPr lang="id-ID" sz="1400" dirty="0">
+                <a:latin typeface="Calibri" pitchFamily="34" charset="0"/>
+                <a:ea typeface="Calibri" pitchFamily="34" charset="-122"/>
+                <a:cs typeface="Calibri" pitchFamily="34" charset="-120"/>
+              </a:rPr>
+              <a:t>Gap dari audit: </a:t>
+            </a:r>
+            <a:r>
+              <a:rPr lang="id-ID" sz="1200" dirty="0">
                 <a:solidFill>
                   <a:srgbClr val="1B2B2A"/>
                 </a:solidFill>
@@ -2163,40 +2153,21 @@
                 <a:ea typeface="Calibri" pitchFamily="34" charset="-122"/>
                 <a:cs typeface="Calibri" pitchFamily="34" charset="-120"/>
               </a:rPr>
-              <a:t>Perangkat tidak modular; baterai dan layar direkatkan untuk menjaga ketahanan air.</a:t>
-            </a:r>
-          </a:p>
-          <a:p>
-            <a:pPr marL="0" indent="0" algn="l">
-              <a:spcAft>
-                <a:spcPts val="300"/>
-              </a:spcAft>
-              <a:buNone/>
-            </a:pPr>
-            <a:r>
-              <a:rPr lang="id-ID" sz="1400" dirty="0">
-                <a:solidFill>
-                  <a:srgbClr val="1B2B2A"/>
-                </a:solidFill>
-                <a:latin typeface="Calibri" pitchFamily="34" charset="0"/>
-                <a:ea typeface="Calibri" pitchFamily="34" charset="-122"/>
-                <a:cs typeface="Calibri" pitchFamily="34" charset="-120"/>
-              </a:rPr>
-              <a:t>Penyandingan serial suku cadang membatasi reparasi di luar jalur resmi, meski Self Service Repair tersedia.</a:t>
-            </a:r>
-          </a:p>
-        </p:txBody>
-      </p:sp>
-      <p:sp>
-        <p:nvSpPr>
-          <p:cNvPr id="104" name="Kartu Usulan perubahan"/>
+              <a:t>perekat baterai sudah dapat dilepas arus listrik, tetapi perangkat tetap tidak modular dan suku cadang baru wajib dikalibrasi/disandingkan.</a:t>
+            </a:r>
+          </a:p>
+        </p:txBody>
+      </p:sp>
+      <p:sp>
+        <p:nvSpPr>
+          <p:cNvPr id="203" name="Kartu Usulan"/>
           <p:cNvSpPr/>
           <p:nvPr/>
         </p:nvSpPr>
         <p:spPr>
           <a:xfrm>
-            <a:off x="6187440" y="1280160"/>
-            <a:ext cx="5547360" cy="1737360"/>
+            <a:off x="6187440" y="1188720"/>
+            <a:ext cx="5547360" cy="868680"/>
           </a:xfrm>
           <a:prstGeom prst="roundRect">
             <a:avLst>
@@ -2210,7 +2181,6 @@
             <a:solidFill>
               <a:srgbClr val="D5E2DD"/>
             </a:solidFill>
-            <a:prstDash val="solid"/>
           </a:ln>
           <a:effectLst>
             <a:outerShdw blurRad="76200" dist="25400" dir="5400000" algn="bl" rotWithShape="0">
@@ -2223,14 +2193,14 @@
       </p:sp>
       <p:sp>
         <p:nvSpPr>
-          <p:cNvPr id="105" name="Isi Usulan perubahan"/>
+          <p:cNvPr id="204" name="Isi Usulan"/>
           <p:cNvSpPr txBox="1"/>
           <p:nvPr/>
         </p:nvSpPr>
         <p:spPr>
           <a:xfrm>
-            <a:off x="6370320" y="1417320"/>
-            <a:ext cx="5181600" cy="1508760"/>
+            <a:off x="6370320" y="1280160"/>
+            <a:ext cx="5181600" cy="731520"/>
           </a:xfrm>
           <a:prstGeom prst="rect">
             <a:avLst/>
@@ -2239,36 +2209,25 @@
           <a:ln/>
         </p:spPr>
         <p:txBody>
-          <a:bodyPr wrap="square" lIns="0" tIns="0" rIns="0" bIns="0" rtlCol="0" anchor="t"/>
+          <a:bodyPr wrap="square" lIns="0" tIns="0" rIns="0" bIns="0" rtlCol="0" anchor="ctr"/>
           <a:lstStyle/>
           <a:p>
             <a:pPr marL="0" indent="0" algn="l">
-              <a:spcAft>
-                <a:spcPts val="400"/>
-              </a:spcAft>
-              <a:buNone/>
-            </a:pPr>
-            <a:r>
-              <a:rPr lang="id-ID" sz="1600" b="1" dirty="0">
+              <a:buNone/>
+            </a:pPr>
+            <a:r>
+              <a:rPr lang="id-ID" sz="1200" b="1" dirty="0">
                 <a:solidFill>
                   <a:srgbClr val="1F6F5C"/>
                 </a:solidFill>
-                <a:latin typeface="Cambria" pitchFamily="34" charset="0"/>
-                <a:ea typeface="Cambria" pitchFamily="34" charset="-122"/>
-                <a:cs typeface="Cambria" pitchFamily="34" charset="-120"/>
-              </a:rPr>
-              <a:t>Usulan perubahan</a:t>
-            </a:r>
-          </a:p>
-          <a:p>
-            <a:pPr marL="0" indent="0" algn="l">
-              <a:spcAft>
-                <a:spcPts val="300"/>
-              </a:spcAft>
-              <a:buNone/>
-            </a:pPr>
-            <a:r>
-              <a:rPr lang="id-ID" sz="1400" dirty="0">
+                <a:latin typeface="Calibri" pitchFamily="34" charset="0"/>
+                <a:ea typeface="Calibri" pitchFamily="34" charset="-122"/>
+                <a:cs typeface="Calibri" pitchFamily="34" charset="-120"/>
+              </a:rPr>
+              <a:t>Usulan: </a:t>
+            </a:r>
+            <a:r>
+              <a:rPr lang="id-ID" sz="1200" dirty="0">
                 <a:solidFill>
                   <a:srgbClr val="1B2B2A"/>
                 </a:solidFill>
@@ -2276,40 +2235,21 @@
                 <a:ea typeface="Calibri" pitchFamily="34" charset="-122"/>
                 <a:cs typeface="Calibri" pitchFamily="34" charset="-120"/>
               </a:rPr>
-              <a:t>(a) Baterai sebagai modul dengan tab tarik dan jalur akses yang jelas.</a:t>
-            </a:r>
-          </a:p>
-          <a:p>
-            <a:pPr marL="0" indent="0" algn="l">
-              <a:spcAft>
-                <a:spcPts val="300"/>
-              </a:spcAft>
-              <a:buNone/>
-            </a:pPr>
-            <a:r>
-              <a:rPr lang="id-ID" sz="1400" dirty="0">
-                <a:solidFill>
-                  <a:srgbClr val="1B2B2A"/>
-                </a:solidFill>
-                <a:latin typeface="Calibri" pitchFamily="34" charset="0"/>
-                <a:ea typeface="Calibri" pitchFamily="34" charset="-122"/>
-                <a:cs typeface="Calibri" pitchFamily="34" charset="-120"/>
-              </a:rPr>
-              <a:t>(b) Hapus penyandingan serial untuk baterai, port, dan layar; segel air tetap dipertahankan dan rating IP diuji ulang.</a:t>
-            </a:r>
-          </a:p>
-        </p:txBody>
-      </p:sp>
-      <p:sp>
-        <p:nvSpPr>
-          <p:cNvPr id="106" name="Kartu Sebelum"/>
+              <a:t>standarkan dimensi dan konektor modul baterai lintas generasi; hapus penyandingan serial untuk baterai, port, dan layar.</a:t>
+            </a:r>
+          </a:p>
+        </p:txBody>
+      </p:sp>
+      <p:sp>
+        <p:nvSpPr>
+          <p:cNvPr id="205" name="Kartu Sebelum"/>
           <p:cNvSpPr/>
           <p:nvPr/>
         </p:nvSpPr>
         <p:spPr>
           <a:xfrm>
-            <a:off x="457200" y="3246120"/>
-            <a:ext cx="5227320" cy="2240280"/>
+            <a:off x="457200" y="2194560"/>
+            <a:ext cx="5341620" cy="4114800"/>
           </a:xfrm>
           <a:prstGeom prst="roundRect">
             <a:avLst>
@@ -2323,7 +2263,6 @@
             <a:solidFill>
               <a:srgbClr val="D5E2DD"/>
             </a:solidFill>
-            <a:prstDash val="solid"/>
           </a:ln>
           <a:effectLst>
             <a:outerShdw blurRad="76200" dist="25400" dir="5400000" algn="bl" rotWithShape="0">
@@ -2336,14 +2275,82 @@
       </p:sp>
       <p:sp>
         <p:nvSpPr>
-          <p:cNvPr id="107" name="Isi Sebelum"/>
+          <p:cNvPr id="206" name="Diagram latar Sebelum"/>
+          <p:cNvSpPr/>
+          <p:nvPr/>
+        </p:nvSpPr>
+        <p:spPr>
+          <a:xfrm>
+            <a:off x="594360" y="2331720"/>
+            <a:ext cx="5067300" cy="1600200"/>
+          </a:xfrm>
+          <a:prstGeom prst="roundRect">
+            <a:avLst>
+              <a:gd name="adj" fmla="val 6452"/>
+            </a:avLst>
+          </a:prstGeom>
+          <a:solidFill>
+            <a:srgbClr val="F4F8F6"/>
+          </a:solidFill>
+          <a:ln w="9525">
+            <a:solidFill>
+              <a:srgbClr val="D5E2DD"/>
+            </a:solidFill>
+          </a:ln>
+        </p:spPr>
+      </p:sp>
+      <p:sp>
+        <p:nvSpPr>
+          <p:cNvPr id="207" name="Lapisan Kaca dan panel layar"/>
+          <p:cNvSpPr/>
+          <p:nvPr/>
+        </p:nvSpPr>
+        <p:spPr>
+          <a:xfrm>
+            <a:off x="999744" y="2491740"/>
+            <a:ext cx="2128266" cy="208026"/>
+          </a:xfrm>
+          <a:prstGeom prst="parallelogram">
+            <a:avLst/>
+          </a:prstGeom>
+          <a:solidFill>
+            <a:srgbClr val="9FC3B6"/>
+          </a:solidFill>
+          <a:ln>
+            <a:noFill/>
+          </a:ln>
+        </p:spPr>
+        <p:txBody>
+          <a:bodyPr wrap="square" lIns="45720" tIns="0" rIns="45720" bIns="0" rtlCol="0" anchor="ctr"/>
+          <a:lstStyle/>
+          <a:p>
+            <a:pPr marL="0" indent="0" algn="ctr">
+              <a:buNone/>
+            </a:pPr>
+            <a:r>
+              <a:rPr lang="id-ID" sz="1000" b="1" dirty="0">
+                <a:solidFill>
+                  <a:srgbClr val="12302B"/>
+                </a:solidFill>
+                <a:latin typeface="Calibri" pitchFamily="34" charset="0"/>
+                <a:ea typeface="Calibri" pitchFamily="34" charset="-122"/>
+                <a:cs typeface="Calibri" pitchFamily="34" charset="-120"/>
+              </a:rPr>
+              <a:t>Kaca dan panel layar</a:t>
+            </a:r>
+          </a:p>
+        </p:txBody>
+      </p:sp>
+      <p:sp>
+        <p:nvSpPr>
+          <p:cNvPr id="208" name="Ket Kaca dan panel layar"/>
           <p:cNvSpPr txBox="1"/>
           <p:nvPr/>
         </p:nvSpPr>
         <p:spPr>
           <a:xfrm>
-            <a:off x="640080" y="3383280"/>
-            <a:ext cx="4861560" cy="2011680"/>
+            <a:off x="3432048" y="2485753"/>
+            <a:ext cx="2229612" cy="220000"/>
           </a:xfrm>
           <a:prstGeom prst="rect">
             <a:avLst/>
@@ -2352,57 +2359,118 @@
           <a:ln/>
         </p:spPr>
         <p:txBody>
-          <a:bodyPr wrap="square" lIns="0" tIns="0" rIns="0" bIns="0" rtlCol="0" anchor="t"/>
+          <a:bodyPr wrap="square" lIns="0" tIns="0" rIns="0" bIns="0" rtlCol="0" anchor="ctr"/>
           <a:lstStyle/>
           <a:p>
             <a:pPr marL="0" indent="0" algn="l">
-              <a:spcAft>
-                <a:spcPts val="600"/>
-              </a:spcAft>
-              <a:buNone/>
-            </a:pPr>
-            <a:r>
-              <a:rPr lang="id-ID" sz="2000" b="1" dirty="0">
+              <a:buNone/>
+            </a:pPr>
+            <a:r>
+              <a:rPr lang="id-ID" sz="1000" dirty="0">
                 <a:solidFill>
                   <a:srgbClr val="5B6B68"/>
                 </a:solidFill>
-                <a:latin typeface="Cambria" pitchFamily="34" charset="0"/>
-                <a:ea typeface="Cambria" pitchFamily="34" charset="-122"/>
-                <a:cs typeface="Cambria" pitchFamily="34" charset="-120"/>
-              </a:rPr>
-              <a:t>Sebelum</a:t>
-            </a:r>
-          </a:p>
+                <a:latin typeface="Calibri" pitchFamily="34" charset="0"/>
+                <a:ea typeface="Calibri" pitchFamily="34" charset="-122"/>
+                <a:cs typeface="Calibri" pitchFamily="34" charset="-120"/>
+              </a:rPr>
+              <a:t>disegel perekat (tahan air IP68)</a:t>
+            </a:r>
+          </a:p>
+        </p:txBody>
+      </p:sp>
+      <p:sp>
+        <p:nvSpPr>
+          <p:cNvPr id="209" name="Lapisan Baterai"/>
+          <p:cNvSpPr/>
+          <p:nvPr/>
+        </p:nvSpPr>
+        <p:spPr>
+          <a:xfrm>
+            <a:off x="999744" y="2811780"/>
+            <a:ext cx="2128266" cy="208026"/>
+          </a:xfrm>
+          <a:prstGeom prst="parallelogram">
+            <a:avLst/>
+          </a:prstGeom>
+          <a:solidFill>
+            <a:srgbClr val="E8B04B"/>
+          </a:solidFill>
+          <a:ln>
+            <a:noFill/>
+          </a:ln>
+        </p:spPr>
+        <p:txBody>
+          <a:bodyPr wrap="square" lIns="45720" tIns="0" rIns="45720" bIns="0" rtlCol="0" anchor="ctr"/>
+          <a:lstStyle/>
+          <a:p>
+            <a:pPr marL="0" indent="0" algn="ctr">
+              <a:buNone/>
+            </a:pPr>
+            <a:r>
+              <a:rPr lang="id-ID" sz="1000" b="1" dirty="0">
+                <a:solidFill>
+                  <a:srgbClr val="12302B"/>
+                </a:solidFill>
+                <a:latin typeface="Calibri" pitchFamily="34" charset="0"/>
+                <a:ea typeface="Calibri" pitchFamily="34" charset="-122"/>
+                <a:cs typeface="Calibri" pitchFamily="34" charset="-120"/>
+              </a:rPr>
+              <a:t>Baterai</a:t>
+            </a:r>
+          </a:p>
+        </p:txBody>
+      </p:sp>
+      <p:sp>
+        <p:nvSpPr>
+          <p:cNvPr id="210" name="Ket Baterai"/>
+          <p:cNvSpPr txBox="1"/>
+          <p:nvPr/>
+        </p:nvSpPr>
+        <p:spPr>
+          <a:xfrm>
+            <a:off x="3432048" y="2805793"/>
+            <a:ext cx="2229612" cy="220000"/>
+          </a:xfrm>
+          <a:prstGeom prst="rect">
+            <a:avLst/>
+          </a:prstGeom>
+          <a:noFill/>
+          <a:ln/>
+        </p:spPr>
+        <p:txBody>
+          <a:bodyPr wrap="square" lIns="0" tIns="0" rIns="0" bIns="0" rtlCol="0" anchor="ctr"/>
+          <a:lstStyle/>
           <a:p>
             <a:pPr marL="0" indent="0" algn="l">
               <a:buNone/>
             </a:pPr>
             <a:r>
-              <a:rPr lang="id-ID" sz="1600" dirty="0">
-                <a:solidFill>
-                  <a:srgbClr val="1B2B2A"/>
-                </a:solidFill>
-                <a:latin typeface="Calibri" pitchFamily="34" charset="0"/>
-                <a:ea typeface="Calibri" pitchFamily="34" charset="-122"/>
-                <a:cs typeface="Calibri" pitchFamily="34" charset="-120"/>
-              </a:rPr>
-              <a:t>Baterai dan layar disegel perekat; suku cadang disandingkan secara serial sehingga penggantian di luar jalur resmi dibatasi. Waktu ganti baterai tidak dipublikasikan.</a:t>
-            </a:r>
-          </a:p>
-        </p:txBody>
-      </p:sp>
-      <p:sp>
-        <p:nvSpPr>
-          <p:cNvPr id="108" name="Panah"/>
+              <a:rPr lang="id-ID" sz="1000" dirty="0">
+                <a:solidFill>
+                  <a:srgbClr val="5B6B68"/>
+                </a:solidFill>
+                <a:latin typeface="Calibri" pitchFamily="34" charset="0"/>
+                <a:ea typeface="Calibri" pitchFamily="34" charset="-122"/>
+                <a:cs typeface="Calibri" pitchFamily="34" charset="-120"/>
+              </a:rPr>
+              <a:t>perekat lepas-listrik ±90 detik</a:t>
+            </a:r>
+          </a:p>
+        </p:txBody>
+      </p:sp>
+      <p:sp>
+        <p:nvSpPr>
+          <p:cNvPr id="211" name="Lapisan Papan logika"/>
           <p:cNvSpPr/>
           <p:nvPr/>
         </p:nvSpPr>
         <p:spPr>
           <a:xfrm>
-            <a:off x="5821680" y="4137660"/>
-            <a:ext cx="548640" cy="457200"/>
-          </a:xfrm>
-          <a:prstGeom prst="rightArrow">
+            <a:off x="999744" y="3131820"/>
+            <a:ext cx="2128266" cy="208026"/>
+          </a:xfrm>
+          <a:prstGeom prst="parallelogram">
             <a:avLst/>
           </a:prstGeom>
           <a:solidFill>
@@ -2412,17 +2480,295 @@
             <a:noFill/>
           </a:ln>
         </p:spPr>
-      </p:sp>
-      <p:sp>
-        <p:nvSpPr>
-          <p:cNvPr id="109" name="Kartu Sesudah"/>
+        <p:txBody>
+          <a:bodyPr wrap="square" lIns="45720" tIns="0" rIns="45720" bIns="0" rtlCol="0" anchor="ctr"/>
+          <a:lstStyle/>
+          <a:p>
+            <a:pPr marL="0" indent="0" algn="ctr">
+              <a:buNone/>
+            </a:pPr>
+            <a:r>
+              <a:rPr lang="id-ID" sz="1000" b="1" dirty="0">
+                <a:solidFill>
+                  <a:srgbClr val="FFFFFF"/>
+                </a:solidFill>
+                <a:latin typeface="Calibri" pitchFamily="34" charset="0"/>
+                <a:ea typeface="Calibri" pitchFamily="34" charset="-122"/>
+                <a:cs typeface="Calibri" pitchFamily="34" charset="-120"/>
+              </a:rPr>
+              <a:t>Papan logika</a:t>
+            </a:r>
+          </a:p>
+        </p:txBody>
+      </p:sp>
+      <p:sp>
+        <p:nvSpPr>
+          <p:cNvPr id="212" name="Ket Papan logika"/>
+          <p:cNvSpPr txBox="1"/>
+          <p:nvPr/>
+        </p:nvSpPr>
+        <p:spPr>
+          <a:xfrm>
+            <a:off x="3432048" y="3125833"/>
+            <a:ext cx="2229612" cy="220000"/>
+          </a:xfrm>
+          <a:prstGeom prst="rect">
+            <a:avLst/>
+          </a:prstGeom>
+          <a:noFill/>
+          <a:ln/>
+        </p:spPr>
+        <p:txBody>
+          <a:bodyPr wrap="square" lIns="0" tIns="0" rIns="0" bIns="0" rtlCol="0" anchor="ctr"/>
+          <a:lstStyle/>
+          <a:p>
+            <a:pPr marL="0" indent="0" algn="l">
+              <a:buNone/>
+            </a:pPr>
+            <a:r>
+              <a:rPr lang="id-ID" sz="1000" b="1" dirty="0">
+                <a:solidFill>
+                  <a:srgbClr val="B5651D"/>
+                </a:solidFill>
+                <a:latin typeface="Calibri" pitchFamily="34" charset="0"/>
+                <a:ea typeface="Calibri" pitchFamily="34" charset="-122"/>
+                <a:cs typeface="Calibri" pitchFamily="34" charset="-120"/>
+              </a:rPr>
+              <a:t>suku cadang disandingkan serial</a:t>
+            </a:r>
+          </a:p>
+        </p:txBody>
+      </p:sp>
+      <p:sp>
+        <p:nvSpPr>
+          <p:cNvPr id="213" name="Lapisan Rangka aluminium"/>
           <p:cNvSpPr/>
           <p:nvPr/>
         </p:nvSpPr>
         <p:spPr>
           <a:xfrm>
-            <a:off x="6507480" y="3246120"/>
-            <a:ext cx="5227320" cy="2240280"/>
+            <a:off x="999744" y="3451860"/>
+            <a:ext cx="2128266" cy="208026"/>
+          </a:xfrm>
+          <a:prstGeom prst="parallelogram">
+            <a:avLst/>
+          </a:prstGeom>
+          <a:solidFill>
+            <a:srgbClr val="12302B"/>
+          </a:solidFill>
+          <a:ln>
+            <a:noFill/>
+          </a:ln>
+        </p:spPr>
+        <p:txBody>
+          <a:bodyPr wrap="square" lIns="45720" tIns="0" rIns="45720" bIns="0" rtlCol="0" anchor="ctr"/>
+          <a:lstStyle/>
+          <a:p>
+            <a:pPr marL="0" indent="0" algn="ctr">
+              <a:buNone/>
+            </a:pPr>
+            <a:r>
+              <a:rPr lang="id-ID" sz="1000" b="1" dirty="0">
+                <a:solidFill>
+                  <a:srgbClr val="FFFFFF"/>
+                </a:solidFill>
+                <a:latin typeface="Calibri" pitchFamily="34" charset="0"/>
+                <a:ea typeface="Calibri" pitchFamily="34" charset="-122"/>
+                <a:cs typeface="Calibri" pitchFamily="34" charset="-120"/>
+              </a:rPr>
+              <a:t>Rangka aluminium</a:t>
+            </a:r>
+          </a:p>
+        </p:txBody>
+      </p:sp>
+      <p:sp>
+        <p:nvSpPr>
+          <p:cNvPr id="214" name="Ket Rangka aluminium"/>
+          <p:cNvSpPr txBox="1"/>
+          <p:nvPr/>
+        </p:nvSpPr>
+        <p:spPr>
+          <a:xfrm>
+            <a:off x="3432048" y="3445873"/>
+            <a:ext cx="2229612" cy="220000"/>
+          </a:xfrm>
+          <a:prstGeom prst="rect">
+            <a:avLst/>
+          </a:prstGeom>
+          <a:noFill/>
+          <a:ln/>
+        </p:spPr>
+        <p:txBody>
+          <a:bodyPr wrap="square" lIns="0" tIns="0" rIns="0" bIns="0" rtlCol="0" anchor="ctr"/>
+          <a:lstStyle/>
+          <a:p>
+            <a:pPr marL="0" indent="0" algn="l">
+              <a:buNone/>
+            </a:pPr>
+            <a:r>
+              <a:rPr lang="id-ID" sz="1000" dirty="0">
+                <a:solidFill>
+                  <a:srgbClr val="5B6B68"/>
+                </a:solidFill>
+                <a:latin typeface="Calibri" pitchFamily="34" charset="0"/>
+                <a:ea typeface="Calibri" pitchFamily="34" charset="-122"/>
+                <a:cs typeface="Calibri" pitchFamily="34" charset="-120"/>
+              </a:rPr>
+              <a:t>85% aluminium daur ulang</a:t>
+            </a:r>
+          </a:p>
+        </p:txBody>
+      </p:sp>
+      <p:sp>
+        <p:nvSpPr>
+          <p:cNvPr id="215" name="Judul Sebelum"/>
+          <p:cNvSpPr txBox="1"/>
+          <p:nvPr/>
+        </p:nvSpPr>
+        <p:spPr>
+          <a:xfrm>
+            <a:off x="640080" y="4023360"/>
+            <a:ext cx="4975860" cy="320040"/>
+          </a:xfrm>
+          <a:prstGeom prst="rect">
+            <a:avLst/>
+          </a:prstGeom>
+          <a:noFill/>
+          <a:ln/>
+        </p:spPr>
+        <p:txBody>
+          <a:bodyPr wrap="square" lIns="0" tIns="0" rIns="0" bIns="0" rtlCol="0" anchor="t"/>
+          <a:lstStyle/>
+          <a:p>
+            <a:pPr marL="0" indent="0" algn="l">
+              <a:buNone/>
+            </a:pPr>
+            <a:r>
+              <a:rPr lang="id-ID" sz="1600" b="1" dirty="0">
+                <a:solidFill>
+                  <a:srgbClr val="5B6B68"/>
+                </a:solidFill>
+                <a:latin typeface="Cambria" pitchFamily="34" charset="0"/>
+                <a:ea typeface="Cambria" pitchFamily="34" charset="-122"/>
+                <a:cs typeface="Cambria" pitchFamily="34" charset="-120"/>
+              </a:rPr>
+              <a:t>Sebelum</a:t>
+            </a:r>
+          </a:p>
+        </p:txBody>
+      </p:sp>
+      <p:sp>
+        <p:nvSpPr>
+          <p:cNvPr id="216" name="Poin Sebelum"/>
+          <p:cNvSpPr txBox="1"/>
+          <p:nvPr/>
+        </p:nvSpPr>
+        <p:spPr>
+          <a:xfrm>
+            <a:off x="640080" y="4389120"/>
+            <a:ext cx="4975860" cy="1874520"/>
+          </a:xfrm>
+          <a:prstGeom prst="rect">
+            <a:avLst/>
+          </a:prstGeom>
+          <a:noFill/>
+          <a:ln/>
+        </p:spPr>
+        <p:txBody>
+          <a:bodyPr wrap="square" lIns="0" tIns="0" rIns="0" bIns="0" rtlCol="0" anchor="t"/>
+          <a:lstStyle/>
+          <a:p>
+            <a:pPr marL="228600" indent="-228600" algn="l">
+              <a:spcAft>
+                <a:spcPts val="200"/>
+              </a:spcAft>
+              <a:buFont typeface="Arial"/>
+              <a:buChar char="•"/>
+            </a:pPr>
+            <a:r>
+              <a:rPr lang="id-ID" sz="1200" dirty="0">
+                <a:solidFill>
+                  <a:srgbClr val="1B2B2A"/>
+                </a:solidFill>
+                <a:latin typeface="Calibri" pitchFamily="34" charset="0"/>
+                <a:ea typeface="Calibri" pitchFamily="34" charset="-122"/>
+                <a:cs typeface="Calibri" pitchFamily="34" charset="-120"/>
+              </a:rPr>
+              <a:t>Baterai iPhone 16 dilepas dengan arus listrik ±90 detik (panduan reparasi Apple; iFixit, 2024).</a:t>
+            </a:r>
+          </a:p>
+          <a:p>
+            <a:pPr marL="228600" indent="-228600" algn="l">
+              <a:spcAft>
+                <a:spcPts val="200"/>
+              </a:spcAft>
+              <a:buFont typeface="Arial"/>
+              <a:buChar char="•"/>
+            </a:pPr>
+            <a:r>
+              <a:rPr lang="id-ID" sz="1200" dirty="0">
+                <a:solidFill>
+                  <a:srgbClr val="1B2B2A"/>
+                </a:solidFill>
+                <a:latin typeface="Calibri" pitchFamily="34" charset="0"/>
+                <a:ea typeface="Calibri" pitchFamily="34" charset="-122"/>
+                <a:cs typeface="Calibri" pitchFamily="34" charset="-120"/>
+              </a:rPr>
+              <a:t>Suku cadang dicocokkan ke nomor seri dan dikalibrasi lewat Repair Assistant; Oregon SB 1596 melarang praktik ini untuk perangkat produksi 2025 ke atas.</a:t>
+            </a:r>
+          </a:p>
+          <a:p>
+            <a:pPr marL="228600" indent="-228600" algn="l">
+              <a:spcAft>
+                <a:spcPts val="200"/>
+              </a:spcAft>
+              <a:buFont typeface="Arial"/>
+              <a:buChar char="•"/>
+            </a:pPr>
+            <a:r>
+              <a:rPr lang="id-ID" sz="1200" dirty="0">
+                <a:solidFill>
+                  <a:srgbClr val="1B2B2A"/>
+                </a:solidFill>
+                <a:latin typeface="Calibri" pitchFamily="34" charset="0"/>
+                <a:ea typeface="Calibri" pitchFamily="34" charset="-122"/>
+                <a:cs typeface="Calibri" pitchFamily="34" charset="-120"/>
+              </a:rPr>
+              <a:t>Ukuran baterai berubah tiap generasi, sehingga stok suku cadang lama cepat usang.</a:t>
+            </a:r>
+          </a:p>
+          <a:p>
+            <a:pPr marL="228600" indent="-228600" algn="l">
+              <a:spcAft>
+                <a:spcPts val="200"/>
+              </a:spcAft>
+              <a:buFont typeface="Arial"/>
+              <a:buChar char="•"/>
+            </a:pPr>
+            <a:r>
+              <a:rPr lang="id-ID" sz="1200" dirty="0">
+                <a:solidFill>
+                  <a:srgbClr val="1B2B2A"/>
+                </a:solidFill>
+                <a:latin typeface="Calibri" pitchFamily="34" charset="0"/>
+                <a:ea typeface="Calibri" pitchFamily="34" charset="-122"/>
+                <a:cs typeface="Calibri" pitchFamily="34" charset="-120"/>
+              </a:rPr>
+              <a:t>Waktu total penggantian dan rasio reparasi tidak dipublikasikan.</a:t>
+            </a:r>
+          </a:p>
+        </p:txBody>
+      </p:sp>
+      <p:sp>
+        <p:nvSpPr>
+          <p:cNvPr id="217" name="Kartu Sesudah — usulan"/>
+          <p:cNvSpPr/>
+          <p:nvPr/>
+        </p:nvSpPr>
+        <p:spPr>
+          <a:xfrm>
+            <a:off x="6393180" y="2194560"/>
+            <a:ext cx="5341620" cy="4114800"/>
           </a:xfrm>
           <a:prstGeom prst="roundRect">
             <a:avLst>
@@ -2436,7 +2782,6 @@
             <a:solidFill>
               <a:srgbClr val="1F6F5C"/>
             </a:solidFill>
-            <a:prstDash val="solid"/>
           </a:ln>
           <a:effectLst>
             <a:outerShdw blurRad="76200" dist="25400" dir="5400000" algn="bl" rotWithShape="0">
@@ -2449,14 +2794,82 @@
       </p:sp>
       <p:sp>
         <p:nvSpPr>
-          <p:cNvPr id="110" name="Isi Sesudah"/>
+          <p:cNvPr id="218" name="Diagram latar Sesudah — usulan"/>
+          <p:cNvSpPr/>
+          <p:nvPr/>
+        </p:nvSpPr>
+        <p:spPr>
+          <a:xfrm>
+            <a:off x="6530340" y="2331720"/>
+            <a:ext cx="5067300" cy="1600200"/>
+          </a:xfrm>
+          <a:prstGeom prst="roundRect">
+            <a:avLst>
+              <a:gd name="adj" fmla="val 6452"/>
+            </a:avLst>
+          </a:prstGeom>
+          <a:solidFill>
+            <a:srgbClr val="FFFFFF"/>
+          </a:solidFill>
+          <a:ln w="9525">
+            <a:solidFill>
+              <a:srgbClr val="D5E2DD"/>
+            </a:solidFill>
+          </a:ln>
+        </p:spPr>
+      </p:sp>
+      <p:sp>
+        <p:nvSpPr>
+          <p:cNvPr id="219" name="Lapisan Kaca dan panel layar"/>
+          <p:cNvSpPr/>
+          <p:nvPr/>
+        </p:nvSpPr>
+        <p:spPr>
+          <a:xfrm>
+            <a:off x="6935724" y="2491740"/>
+            <a:ext cx="2128266" cy="208026"/>
+          </a:xfrm>
+          <a:prstGeom prst="parallelogram">
+            <a:avLst/>
+          </a:prstGeom>
+          <a:solidFill>
+            <a:srgbClr val="9FC3B6"/>
+          </a:solidFill>
+          <a:ln>
+            <a:noFill/>
+          </a:ln>
+        </p:spPr>
+        <p:txBody>
+          <a:bodyPr wrap="square" lIns="45720" tIns="0" rIns="45720" bIns="0" rtlCol="0" anchor="ctr"/>
+          <a:lstStyle/>
+          <a:p>
+            <a:pPr marL="0" indent="0" algn="ctr">
+              <a:buNone/>
+            </a:pPr>
+            <a:r>
+              <a:rPr lang="id-ID" sz="1000" b="1" dirty="0">
+                <a:solidFill>
+                  <a:srgbClr val="12302B"/>
+                </a:solidFill>
+                <a:latin typeface="Calibri" pitchFamily="34" charset="0"/>
+                <a:ea typeface="Calibri" pitchFamily="34" charset="-122"/>
+                <a:cs typeface="Calibri" pitchFamily="34" charset="-120"/>
+              </a:rPr>
+              <a:t>Kaca dan panel layar</a:t>
+            </a:r>
+          </a:p>
+        </p:txBody>
+      </p:sp>
+      <p:sp>
+        <p:nvSpPr>
+          <p:cNvPr id="220" name="Ket Kaca dan panel layar"/>
           <p:cNvSpPr txBox="1"/>
           <p:nvPr/>
         </p:nvSpPr>
         <p:spPr>
           <a:xfrm>
-            <a:off x="6690360" y="3383280"/>
-            <a:ext cx="4861560" cy="2011680"/>
+            <a:off x="9368028" y="2485753"/>
+            <a:ext cx="2229612" cy="220000"/>
           </a:xfrm>
           <a:prstGeom prst="rect">
             <a:avLst/>
@@ -2465,17 +2878,292 @@
           <a:ln/>
         </p:spPr>
         <p:txBody>
+          <a:bodyPr wrap="square" lIns="0" tIns="0" rIns="0" bIns="0" rtlCol="0" anchor="ctr"/>
+          <a:lstStyle/>
+          <a:p>
+            <a:pPr marL="0" indent="0" algn="l">
+              <a:buNone/>
+            </a:pPr>
+            <a:r>
+              <a:rPr lang="id-ID" sz="1000" b="1" dirty="0">
+                <a:solidFill>
+                  <a:srgbClr val="1F6F5C"/>
+                </a:solidFill>
+                <a:latin typeface="Calibri" pitchFamily="34" charset="0"/>
+                <a:ea typeface="Calibri" pitchFamily="34" charset="-122"/>
+                <a:cs typeface="Calibri" pitchFamily="34" charset="-120"/>
+              </a:rPr>
+              <a:t>segel tetap; uji IP diulang</a:t>
+            </a:r>
+          </a:p>
+        </p:txBody>
+      </p:sp>
+      <p:sp>
+        <p:nvSpPr>
+          <p:cNvPr id="221" name="Lapisan Baterai"/>
+          <p:cNvSpPr/>
+          <p:nvPr/>
+        </p:nvSpPr>
+        <p:spPr>
+          <a:xfrm>
+            <a:off x="6935724" y="2811780"/>
+            <a:ext cx="2128266" cy="208026"/>
+          </a:xfrm>
+          <a:prstGeom prst="parallelogram">
+            <a:avLst/>
+          </a:prstGeom>
+          <a:solidFill>
+            <a:srgbClr val="F2C66B"/>
+          </a:solidFill>
+          <a:ln>
+            <a:noFill/>
+          </a:ln>
+        </p:spPr>
+        <p:txBody>
+          <a:bodyPr wrap="square" lIns="45720" tIns="0" rIns="45720" bIns="0" rtlCol="0" anchor="ctr"/>
+          <a:lstStyle/>
+          <a:p>
+            <a:pPr marL="0" indent="0" algn="ctr">
+              <a:buNone/>
+            </a:pPr>
+            <a:r>
+              <a:rPr lang="id-ID" sz="1000" b="1" dirty="0">
+                <a:solidFill>
+                  <a:srgbClr val="12302B"/>
+                </a:solidFill>
+                <a:latin typeface="Calibri" pitchFamily="34" charset="0"/>
+                <a:ea typeface="Calibri" pitchFamily="34" charset="-122"/>
+                <a:cs typeface="Calibri" pitchFamily="34" charset="-120"/>
+              </a:rPr>
+              <a:t>Modul baterai</a:t>
+            </a:r>
+          </a:p>
+        </p:txBody>
+      </p:sp>
+      <p:sp>
+        <p:nvSpPr>
+          <p:cNvPr id="223" name="Ket Baterai"/>
+          <p:cNvSpPr txBox="1"/>
+          <p:nvPr/>
+        </p:nvSpPr>
+        <p:spPr>
+          <a:xfrm>
+            <a:off x="9368028" y="2805793"/>
+            <a:ext cx="2229612" cy="220000"/>
+          </a:xfrm>
+          <a:prstGeom prst="rect">
+            <a:avLst/>
+          </a:prstGeom>
+          <a:noFill/>
+          <a:ln/>
+        </p:spPr>
+        <p:txBody>
+          <a:bodyPr wrap="square" lIns="0" tIns="0" rIns="0" bIns="0" rtlCol="0" anchor="ctr"/>
+          <a:lstStyle/>
+          <a:p>
+            <a:pPr marL="0" indent="0" algn="l">
+              <a:buNone/>
+            </a:pPr>
+            <a:r>
+              <a:rPr lang="id-ID" sz="1000" b="1" dirty="0">
+                <a:solidFill>
+                  <a:srgbClr val="1F6F5C"/>
+                </a:solidFill>
+                <a:latin typeface="Calibri" pitchFamily="34" charset="0"/>
+                <a:ea typeface="Calibri" pitchFamily="34" charset="-122"/>
+                <a:cs typeface="Calibri" pitchFamily="34" charset="-120"/>
+              </a:rPr>
+              <a:t>dimensi dan konektor tetap lintas generasi</a:t>
+            </a:r>
+          </a:p>
+        </p:txBody>
+      </p:sp>
+      <p:sp>
+        <p:nvSpPr>
+          <p:cNvPr id="224" name="Lapisan Papan logika"/>
+          <p:cNvSpPr/>
+          <p:nvPr/>
+        </p:nvSpPr>
+        <p:spPr>
+          <a:xfrm>
+            <a:off x="6935724" y="3131820"/>
+            <a:ext cx="2128266" cy="208026"/>
+          </a:xfrm>
+          <a:prstGeom prst="parallelogram">
+            <a:avLst/>
+          </a:prstGeom>
+          <a:solidFill>
+            <a:srgbClr val="1F6F5C"/>
+          </a:solidFill>
+          <a:ln>
+            <a:noFill/>
+          </a:ln>
+        </p:spPr>
+        <p:txBody>
+          <a:bodyPr wrap="square" lIns="45720" tIns="0" rIns="45720" bIns="0" rtlCol="0" anchor="ctr"/>
+          <a:lstStyle/>
+          <a:p>
+            <a:pPr marL="0" indent="0" algn="ctr">
+              <a:buNone/>
+            </a:pPr>
+            <a:r>
+              <a:rPr lang="id-ID" sz="1000" b="1" dirty="0">
+                <a:solidFill>
+                  <a:srgbClr val="FFFFFF"/>
+                </a:solidFill>
+                <a:latin typeface="Calibri" pitchFamily="34" charset="0"/>
+                <a:ea typeface="Calibri" pitchFamily="34" charset="-122"/>
+                <a:cs typeface="Calibri" pitchFamily="34" charset="-120"/>
+              </a:rPr>
+              <a:t>Papan logika</a:t>
+            </a:r>
+          </a:p>
+        </p:txBody>
+      </p:sp>
+      <p:sp>
+        <p:nvSpPr>
+          <p:cNvPr id="225" name="Ket Papan logika"/>
+          <p:cNvSpPr txBox="1"/>
+          <p:nvPr/>
+        </p:nvSpPr>
+        <p:spPr>
+          <a:xfrm>
+            <a:off x="9368028" y="3125833"/>
+            <a:ext cx="2229612" cy="220000"/>
+          </a:xfrm>
+          <a:prstGeom prst="rect">
+            <a:avLst/>
+          </a:prstGeom>
+          <a:noFill/>
+          <a:ln/>
+        </p:spPr>
+        <p:txBody>
+          <a:bodyPr wrap="square" lIns="0" tIns="0" rIns="0" bIns="0" rtlCol="0" anchor="ctr"/>
+          <a:lstStyle/>
+          <a:p>
+            <a:pPr marL="0" indent="0" algn="l">
+              <a:buNone/>
+            </a:pPr>
+            <a:r>
+              <a:rPr lang="id-ID" sz="1000" b="1" dirty="0">
+                <a:solidFill>
+                  <a:srgbClr val="1F6F5C"/>
+                </a:solidFill>
+                <a:latin typeface="Calibri" pitchFamily="34" charset="0"/>
+                <a:ea typeface="Calibri" pitchFamily="34" charset="-122"/>
+                <a:cs typeface="Calibri" pitchFamily="34" charset="-120"/>
+              </a:rPr>
+              <a:t>penyandingan dihapus</a:t>
+            </a:r>
+          </a:p>
+        </p:txBody>
+      </p:sp>
+      <p:sp>
+        <p:nvSpPr>
+          <p:cNvPr id="226" name="Lapisan Rangka aluminium"/>
+          <p:cNvSpPr/>
+          <p:nvPr/>
+        </p:nvSpPr>
+        <p:spPr>
+          <a:xfrm>
+            <a:off x="6935724" y="3451860"/>
+            <a:ext cx="2128266" cy="208026"/>
+          </a:xfrm>
+          <a:prstGeom prst="parallelogram">
+            <a:avLst/>
+          </a:prstGeom>
+          <a:solidFill>
+            <a:srgbClr val="12302B"/>
+          </a:solidFill>
+          <a:ln>
+            <a:noFill/>
+          </a:ln>
+        </p:spPr>
+        <p:txBody>
+          <a:bodyPr wrap="square" lIns="45720" tIns="0" rIns="45720" bIns="0" rtlCol="0" anchor="ctr"/>
+          <a:lstStyle/>
+          <a:p>
+            <a:pPr marL="0" indent="0" algn="ctr">
+              <a:buNone/>
+            </a:pPr>
+            <a:r>
+              <a:rPr lang="id-ID" sz="1000" b="1" dirty="0">
+                <a:solidFill>
+                  <a:srgbClr val="FFFFFF"/>
+                </a:solidFill>
+                <a:latin typeface="Calibri" pitchFamily="34" charset="0"/>
+                <a:ea typeface="Calibri" pitchFamily="34" charset="-122"/>
+                <a:cs typeface="Calibri" pitchFamily="34" charset="-120"/>
+              </a:rPr>
+              <a:t>Rangka aluminium</a:t>
+            </a:r>
+          </a:p>
+        </p:txBody>
+      </p:sp>
+      <p:sp>
+        <p:nvSpPr>
+          <p:cNvPr id="227" name="Ket Rangka aluminium"/>
+          <p:cNvSpPr txBox="1"/>
+          <p:nvPr/>
+        </p:nvSpPr>
+        <p:spPr>
+          <a:xfrm>
+            <a:off x="9368028" y="3445873"/>
+            <a:ext cx="2229612" cy="220000"/>
+          </a:xfrm>
+          <a:prstGeom prst="rect">
+            <a:avLst/>
+          </a:prstGeom>
+          <a:noFill/>
+          <a:ln/>
+        </p:spPr>
+        <p:txBody>
+          <a:bodyPr wrap="square" lIns="0" tIns="0" rIns="0" bIns="0" rtlCol="0" anchor="ctr"/>
+          <a:lstStyle/>
+          <a:p>
+            <a:pPr marL="0" indent="0" algn="l">
+              <a:buNone/>
+            </a:pPr>
+            <a:r>
+              <a:rPr lang="id-ID" sz="1000" dirty="0">
+                <a:solidFill>
+                  <a:srgbClr val="5B6B68"/>
+                </a:solidFill>
+                <a:latin typeface="Calibri" pitchFamily="34" charset="0"/>
+                <a:ea typeface="Calibri" pitchFamily="34" charset="-122"/>
+                <a:cs typeface="Calibri" pitchFamily="34" charset="-120"/>
+              </a:rPr>
+              <a:t>tetap</a:t>
+            </a:r>
+          </a:p>
+        </p:txBody>
+      </p:sp>
+      <p:sp>
+        <p:nvSpPr>
+          <p:cNvPr id="228" name="Judul Sesudah — usulan"/>
+          <p:cNvSpPr txBox="1"/>
+          <p:nvPr/>
+        </p:nvSpPr>
+        <p:spPr>
+          <a:xfrm>
+            <a:off x="6576060" y="4023360"/>
+            <a:ext cx="4975860" cy="320040"/>
+          </a:xfrm>
+          <a:prstGeom prst="rect">
+            <a:avLst/>
+          </a:prstGeom>
+          <a:noFill/>
+          <a:ln/>
+        </p:spPr>
+        <p:txBody>
           <a:bodyPr wrap="square" lIns="0" tIns="0" rIns="0" bIns="0" rtlCol="0" anchor="t"/>
           <a:lstStyle/>
           <a:p>
             <a:pPr marL="0" indent="0" algn="l">
-              <a:spcAft>
-                <a:spcPts val="600"/>
-              </a:spcAft>
-              <a:buNone/>
-            </a:pPr>
-            <a:r>
-              <a:rPr lang="id-ID" sz="2000" b="1" dirty="0">
+              <a:buNone/>
+            </a:pPr>
+            <a:r>
+              <a:rPr lang="id-ID" sz="1600" b="1" dirty="0">
                 <a:solidFill>
                   <a:srgbClr val="1F6F5C"/>
                 </a:solidFill>
@@ -2483,37 +3171,21 @@
                 <a:ea typeface="Cambria" pitchFamily="34" charset="-122"/>
                 <a:cs typeface="Cambria" pitchFamily="34" charset="-120"/>
               </a:rPr>
-              <a:t>Sesudah</a:t>
-            </a:r>
-          </a:p>
-          <a:p>
-            <a:pPr marL="0" indent="0" algn="l">
-              <a:buNone/>
-            </a:pPr>
-            <a:r>
-              <a:rPr lang="id-ID" sz="1600" dirty="0">
-                <a:solidFill>
-                  <a:srgbClr val="12302B"/>
-                </a:solidFill>
-                <a:latin typeface="Calibri" pitchFamily="34" charset="0"/>
-                <a:ea typeface="Calibri" pitchFamily="34" charset="-122"/>
-                <a:cs typeface="Calibri" pitchFamily="34" charset="-120"/>
-              </a:rPr>
-              <a:t>Baterai berbentuk modul dengan tab tarik; suku cadang asli dapat dipasang tanpa penyandingan. Target ganti baterai ≤ 5 menit dengan ketahanan air tidak menurun.</a:t>
-            </a:r>
-          </a:p>
-        </p:txBody>
-      </p:sp>
-      <p:sp>
-        <p:nvSpPr>
-          <p:cNvPr id="111" name="Strategi"/>
+              <a:t>Sesudah — usulan</a:t>
+            </a:r>
+          </a:p>
+        </p:txBody>
+      </p:sp>
+      <p:sp>
+        <p:nvSpPr>
+          <p:cNvPr id="229" name="Poin Sesudah — usulan"/>
           <p:cNvSpPr txBox="1"/>
           <p:nvPr/>
         </p:nvSpPr>
         <p:spPr>
           <a:xfrm>
-            <a:off x="457200" y="5669280"/>
-            <a:ext cx="11277600" cy="457200"/>
+            <a:off x="6576060" y="4389120"/>
+            <a:ext cx="4975860" cy="1874520"/>
           </a:xfrm>
           <a:prstGeom prst="rect">
             <a:avLst/>
@@ -2522,58 +3194,111 @@
           <a:ln/>
         </p:spPr>
         <p:txBody>
-          <a:bodyPr wrap="square" lIns="0" tIns="0" rIns="0" bIns="0" rtlCol="0" anchor="ctr"/>
-          <a:lstStyle/>
-          <a:p>
-            <a:pPr marL="0" indent="0" algn="l">
-              <a:buNone/>
-            </a:pPr>
-            <a:r>
-              <a:rPr lang="id-ID" sz="1300" b="1" dirty="0">
-                <a:solidFill>
-                  <a:srgbClr val="1F6F5C"/>
-                </a:solidFill>
-                <a:latin typeface="Calibri" pitchFamily="34" charset="0"/>
-                <a:ea typeface="Calibri" pitchFamily="34" charset="-122"/>
-                <a:cs typeface="Calibri" pitchFamily="34" charset="-120"/>
-              </a:rPr>
-              <a:t>Strategi: </a:t>
-            </a:r>
-            <a:r>
-              <a:rPr lang="id-ID" sz="1300" b="1" dirty="0">
-                <a:solidFill>
-                  <a:srgbClr val="1F6F5C"/>
-                </a:solidFill>
-                <a:latin typeface="Calibri" pitchFamily="34" charset="0"/>
-                <a:ea typeface="Calibri" pitchFamily="34" charset="-122"/>
-                <a:cs typeface="Calibri" pitchFamily="34" charset="-120"/>
-              </a:rPr>
-              <a:t>memperlambat aliran (slowing)</a:t>
-            </a:r>
-            <a:r>
-              <a:rPr lang="id-ID" sz="1300" b="1" dirty="0">
-                <a:solidFill>
-                  <a:srgbClr val="5B6B68"/>
-                </a:solidFill>
-                <a:latin typeface="Calibri" pitchFamily="34" charset="0"/>
-                <a:ea typeface="Calibri" pitchFamily="34" charset="-122"/>
-                <a:cs typeface="Calibri" pitchFamily="34" charset="-120"/>
-              </a:rPr>
-              <a:t>   ·   KPI: </a:t>
-            </a:r>
-            <a:r>
-              <a:rPr lang="id-ID" sz="1300" dirty="0">
-                <a:solidFill>
-                  <a:srgbClr val="5B6B68"/>
-                </a:solidFill>
-                <a:latin typeface="Calibri" pitchFamily="34" charset="0"/>
-                <a:ea typeface="Calibri" pitchFamily="34" charset="-122"/>
-                <a:cs typeface="Calibri" pitchFamily="34" charset="-120"/>
-              </a:rPr>
-              <a:t>waktu ganti baterai, rasio reparasi, rating ketahanan air</a:t>
-            </a:r>
-          </a:p>
-        </p:txBody>
+          <a:bodyPr wrap="square" lIns="0" tIns="0" rIns="0" bIns="0" rtlCol="0" anchor="t"/>
+          <a:lstStyle/>
+          <a:p>
+            <a:pPr marL="228600" indent="-228600" algn="l">
+              <a:spcAft>
+                <a:spcPts val="200"/>
+              </a:spcAft>
+              <a:buFont typeface="Arial"/>
+              <a:buChar char="•"/>
+            </a:pPr>
+            <a:r>
+              <a:rPr lang="id-ID" sz="1200" dirty="0">
+                <a:solidFill>
+                  <a:srgbClr val="12302B"/>
+                </a:solidFill>
+                <a:latin typeface="Calibri" pitchFamily="34" charset="0"/>
+                <a:ea typeface="Calibri" pitchFamily="34" charset="-122"/>
+                <a:cs typeface="Calibri" pitchFamily="34" charset="-120"/>
+              </a:rPr>
+              <a:t>Modul baterai dengan dimensi dan konektor tetap, tetap memakai perekat lepas-listrik.</a:t>
+            </a:r>
+          </a:p>
+          <a:p>
+            <a:pPr marL="228600" indent="-228600" algn="l">
+              <a:spcAft>
+                <a:spcPts val="200"/>
+              </a:spcAft>
+              <a:buFont typeface="Arial"/>
+              <a:buChar char="•"/>
+            </a:pPr>
+            <a:r>
+              <a:rPr lang="id-ID" sz="1200" dirty="0">
+                <a:solidFill>
+                  <a:srgbClr val="12302B"/>
+                </a:solidFill>
+                <a:latin typeface="Calibri" pitchFamily="34" charset="0"/>
+                <a:ea typeface="Calibri" pitchFamily="34" charset="-122"/>
+                <a:cs typeface="Calibri" pitchFamily="34" charset="-120"/>
+              </a:rPr>
+              <a:t>Suku cadang asli dan bekas dapat dipasang tanpa penyandingan; kalibrasi tetap tersedia.</a:t>
+            </a:r>
+          </a:p>
+          <a:p>
+            <a:pPr marL="228600" indent="-228600" algn="l">
+              <a:spcAft>
+                <a:spcPts val="200"/>
+              </a:spcAft>
+              <a:buFont typeface="Arial"/>
+              <a:buChar char="•"/>
+            </a:pPr>
+            <a:r>
+              <a:rPr lang="id-ID" sz="1200" dirty="0">
+                <a:solidFill>
+                  <a:srgbClr val="12302B"/>
+                </a:solidFill>
+                <a:latin typeface="Calibri" pitchFamily="34" charset="0"/>
+                <a:ea typeface="Calibri" pitchFamily="34" charset="-122"/>
+                <a:cs typeface="Calibri" pitchFamily="34" charset="-120"/>
+              </a:rPr>
+              <a:t>Syarat: rating IP68 diuji ulang dan tidak boleh menurun (Cordella dkk., 2021: keandalan dan reparabilitas dapat dicapai bersamaan).</a:t>
+            </a:r>
+          </a:p>
+          <a:p>
+            <a:pPr marL="228600" indent="-228600" algn="l">
+              <a:spcAft>
+                <a:spcPts val="200"/>
+              </a:spcAft>
+              <a:buFont typeface="Arial"/>
+              <a:buChar char="•"/>
+            </a:pPr>
+            <a:r>
+              <a:rPr lang="id-ID" sz="1200" dirty="0">
+                <a:solidFill>
+                  <a:srgbClr val="12302B"/>
+                </a:solidFill>
+                <a:latin typeface="Calibri" pitchFamily="34" charset="0"/>
+                <a:ea typeface="Calibri" pitchFamily="34" charset="-122"/>
+                <a:cs typeface="Calibri" pitchFamily="34" charset="-120"/>
+              </a:rPr>
+              <a:t>Dievaluasi dengan KPI waktu penggantian ≤ 5 menit dan rasio reparasi yang dilaporkan.</a:t>
+            </a:r>
+          </a:p>
+        </p:txBody>
+      </p:sp>
+      <p:sp>
+        <p:nvSpPr>
+          <p:cNvPr id="230" name="Panah"/>
+          <p:cNvSpPr/>
+          <p:nvPr/>
+        </p:nvSpPr>
+        <p:spPr>
+          <a:xfrm>
+            <a:off x="5890260" y="4069080"/>
+            <a:ext cx="411480" cy="365760"/>
+          </a:xfrm>
+          <a:prstGeom prst="rightArrow">
+            <a:avLst/>
+          </a:prstGeom>
+          <a:solidFill>
+            <a:srgbClr val="1F6F5C"/>
+          </a:solidFill>
+          <a:ln>
+            <a:noFill/>
+          </a:ln>
+        </p:spPr>
       </p:sp>
     </p:spTree>
   </p:cSld>
@@ -2666,7 +3391,7 @@
                 <a:ea typeface="Cambria" pitchFamily="34" charset="-122"/>
                 <a:cs typeface="Cambria" pitchFamily="34" charset="-120"/>
               </a:rPr>
-              <a:t>4.3</a:t>
+              <a:t>4.4</a:t>
             </a:r>
             <a:endParaRPr lang="en-US" sz="2000" dirty="0"/>
           </a:p>
@@ -2705,7 +3430,7 @@
                 <a:ea typeface="Cambria" pitchFamily="34" charset="-122"/>
                 <a:cs typeface="Cambria" pitchFamily="34" charset="-120"/>
               </a:rPr>
-              <a:t>Usulan #2: Paspor komposisi dan jalur bongkar</a:t>
+              <a:t>Usulan #2: Paspor komposisi dan jalur pembongkaran</a:t>
             </a:r>
             <a:endParaRPr lang="en-US" sz="3000" dirty="0"/>
           </a:p>
@@ -2783,7 +3508,7 @@
                 <a:ea typeface="Calibri" pitchFamily="34" charset="-122"/>
                 <a:cs typeface="Calibri" pitchFamily="34" charset="-120"/>
               </a:rPr>
-              <a:t>8</a:t>
+              <a:t>10</a:t>
             </a:r>
             <a:endParaRPr lang="en-US" sz="1000" dirty="0"/>
           </a:p>
@@ -2791,14 +3516,14 @@
       </p:sp>
       <p:sp>
         <p:nvSpPr>
-          <p:cNvPr id="112" name="Kartu Gap dari audit"/>
+          <p:cNvPr id="231" name="Kartu Gap dari audit"/>
           <p:cNvSpPr/>
           <p:nvPr/>
         </p:nvSpPr>
         <p:spPr>
           <a:xfrm>
-            <a:off x="457200" y="1280160"/>
-            <a:ext cx="5547360" cy="1737360"/>
+            <a:off x="457200" y="1188720"/>
+            <a:ext cx="5547360" cy="868680"/>
           </a:xfrm>
           <a:prstGeom prst="roundRect">
             <a:avLst>
@@ -2812,7 +3537,6 @@
             <a:solidFill>
               <a:srgbClr val="D5E2DD"/>
             </a:solidFill>
-            <a:prstDash val="solid"/>
           </a:ln>
           <a:effectLst>
             <a:outerShdw blurRad="76200" dist="25400" dir="5400000" algn="bl" rotWithShape="0">
@@ -2825,14 +3549,14 @@
       </p:sp>
       <p:sp>
         <p:nvSpPr>
-          <p:cNvPr id="113" name="Isi Gap dari audit"/>
+          <p:cNvPr id="232" name="Isi Gap dari audit"/>
           <p:cNvSpPr txBox="1"/>
           <p:nvPr/>
         </p:nvSpPr>
         <p:spPr>
           <a:xfrm>
-            <a:off x="640080" y="1417320"/>
-            <a:ext cx="5181600" cy="1508760"/>
+            <a:off x="640080" y="1280160"/>
+            <a:ext cx="5181600" cy="731520"/>
           </a:xfrm>
           <a:prstGeom prst="rect">
             <a:avLst/>
@@ -2841,36 +3565,25 @@
           <a:ln/>
         </p:spPr>
         <p:txBody>
-          <a:bodyPr wrap="square" lIns="0" tIns="0" rIns="0" bIns="0" rtlCol="0" anchor="t"/>
+          <a:bodyPr wrap="square" lIns="0" tIns="0" rIns="0" bIns="0" rtlCol="0" anchor="ctr"/>
           <a:lstStyle/>
           <a:p>
             <a:pPr marL="0" indent="0" algn="l">
-              <a:spcAft>
-                <a:spcPts val="400"/>
-              </a:spcAft>
-              <a:buNone/>
-            </a:pPr>
-            <a:r>
-              <a:rPr lang="id-ID" sz="1600" b="1" dirty="0">
+              <a:buNone/>
+            </a:pPr>
+            <a:r>
+              <a:rPr lang="id-ID" sz="1200" b="1" dirty="0">
                 <a:solidFill>
                   <a:srgbClr val="B3402F"/>
                 </a:solidFill>
-                <a:latin typeface="Cambria" pitchFamily="34" charset="0"/>
-                <a:ea typeface="Cambria" pitchFamily="34" charset="-122"/>
-                <a:cs typeface="Cambria" pitchFamily="34" charset="-120"/>
-              </a:rPr>
-              <a:t>Gap dari audit</a:t>
-            </a:r>
-          </a:p>
-          <a:p>
-            <a:pPr marL="0" indent="0" algn="l">
-              <a:spcAft>
-                <a:spcPts val="300"/>
-              </a:spcAft>
-              <a:buNone/>
-            </a:pPr>
-            <a:r>
-              <a:rPr lang="id-ID" sz="1400" dirty="0">
+                <a:latin typeface="Calibri" pitchFamily="34" charset="0"/>
+                <a:ea typeface="Calibri" pitchFamily="34" charset="-122"/>
+                <a:cs typeface="Calibri" pitchFamily="34" charset="-120"/>
+              </a:rPr>
+              <a:t>Gap dari audit: </a:t>
+            </a:r>
+            <a:r>
+              <a:rPr lang="id-ID" sz="1200" dirty="0">
                 <a:solidFill>
                   <a:srgbClr val="1B2B2A"/>
                 </a:solidFill>
@@ -2878,40 +3591,21 @@
                 <a:ea typeface="Calibri" pitchFamily="34" charset="-122"/>
                 <a:cs typeface="Calibri" pitchFamily="34" charset="-120"/>
               </a:rPr>
-              <a:t>Akhir masa pakai bernilai Sedang: Trade In tersedia, tetapi data pengumpulan tidak dibuka.</a:t>
-            </a:r>
-          </a:p>
-          <a:p>
-            <a:pPr marL="0" indent="0" algn="l">
-              <a:spcAft>
-                <a:spcPts val="300"/>
-              </a:spcAft>
-              <a:buNone/>
-            </a:pPr>
-            <a:r>
-              <a:rPr lang="id-ID" sz="1400" dirty="0">
-                <a:solidFill>
-                  <a:srgbClr val="1B2B2A"/>
-                </a:solidFill>
-                <a:latin typeface="Calibri" pitchFamily="34" charset="0"/>
-                <a:ea typeface="Calibri" pitchFamily="34" charset="-122"/>
-                <a:cs typeface="Calibri" pitchFamily="34" charset="-120"/>
-              </a:rPr>
-              <a:t>Hanya 22,3% e-waste global terdokumentasi; Indonesia belum punya syarat pengambilan kembali.</a:t>
-            </a:r>
-          </a:p>
-        </p:txBody>
-      </p:sp>
-      <p:sp>
-        <p:nvSpPr>
-          <p:cNvPr id="114" name="Kartu Usulan perubahan"/>
+              <a:t>Trade In dan robot Daisy tersedia, tetapi data pengumpulan per negara tidak dibuka; Indonesia belum punya syarat pengambilan kembali.</a:t>
+            </a:r>
+          </a:p>
+        </p:txBody>
+      </p:sp>
+      <p:sp>
+        <p:nvSpPr>
+          <p:cNvPr id="233" name="Kartu Usulan"/>
           <p:cNvSpPr/>
           <p:nvPr/>
         </p:nvSpPr>
         <p:spPr>
           <a:xfrm>
-            <a:off x="6187440" y="1280160"/>
-            <a:ext cx="5547360" cy="1737360"/>
+            <a:off x="6187440" y="1188720"/>
+            <a:ext cx="5547360" cy="868680"/>
           </a:xfrm>
           <a:prstGeom prst="roundRect">
             <a:avLst>
@@ -2925,7 +3619,6 @@
             <a:solidFill>
               <a:srgbClr val="D5E2DD"/>
             </a:solidFill>
-            <a:prstDash val="solid"/>
           </a:ln>
           <a:effectLst>
             <a:outerShdw blurRad="76200" dist="25400" dir="5400000" algn="bl" rotWithShape="0">
@@ -2938,14 +3631,14 @@
       </p:sp>
       <p:sp>
         <p:nvSpPr>
-          <p:cNvPr id="115" name="Isi Usulan perubahan"/>
+          <p:cNvPr id="234" name="Isi Usulan"/>
           <p:cNvSpPr txBox="1"/>
           <p:nvPr/>
         </p:nvSpPr>
         <p:spPr>
           <a:xfrm>
-            <a:off x="6370320" y="1417320"/>
-            <a:ext cx="5181600" cy="1508760"/>
+            <a:off x="6370320" y="1280160"/>
+            <a:ext cx="5181600" cy="731520"/>
           </a:xfrm>
           <a:prstGeom prst="rect">
             <a:avLst/>
@@ -2954,36 +3647,25 @@
           <a:ln/>
         </p:spPr>
         <p:txBody>
-          <a:bodyPr wrap="square" lIns="0" tIns="0" rIns="0" bIns="0" rtlCol="0" anchor="t"/>
+          <a:bodyPr wrap="square" lIns="0" tIns="0" rIns="0" bIns="0" rtlCol="0" anchor="ctr"/>
           <a:lstStyle/>
           <a:p>
             <a:pPr marL="0" indent="0" algn="l">
-              <a:spcAft>
-                <a:spcPts val="400"/>
-              </a:spcAft>
-              <a:buNone/>
-            </a:pPr>
-            <a:r>
-              <a:rPr lang="id-ID" sz="1600" b="1" dirty="0">
+              <a:buNone/>
+            </a:pPr>
+            <a:r>
+              <a:rPr lang="id-ID" sz="1200" b="1" dirty="0">
                 <a:solidFill>
                   <a:srgbClr val="1F6F5C"/>
                 </a:solidFill>
-                <a:latin typeface="Cambria" pitchFamily="34" charset="0"/>
-                <a:ea typeface="Cambria" pitchFamily="34" charset="-122"/>
-                <a:cs typeface="Cambria" pitchFamily="34" charset="-120"/>
-              </a:rPr>
-              <a:t>Usulan perubahan</a:t>
-            </a:r>
-          </a:p>
-          <a:p>
-            <a:pPr marL="0" indent="0" algn="l">
-              <a:spcAft>
-                <a:spcPts val="300"/>
-              </a:spcAft>
-              <a:buNone/>
-            </a:pPr>
-            <a:r>
-              <a:rPr lang="id-ID" sz="1400" dirty="0">
+                <a:latin typeface="Calibri" pitchFamily="34" charset="0"/>
+                <a:ea typeface="Calibri" pitchFamily="34" charset="-122"/>
+                <a:cs typeface="Calibri" pitchFamily="34" charset="-120"/>
+              </a:rPr>
+              <a:t>Usulan: </a:t>
+            </a:r>
+            <a:r>
+              <a:rPr lang="id-ID" sz="1200" dirty="0">
                 <a:solidFill>
                   <a:srgbClr val="1B2B2A"/>
                 </a:solidFill>
@@ -2991,40 +3673,21 @@
                 <a:ea typeface="Calibri" pitchFamily="34" charset="-122"/>
                 <a:cs typeface="Calibri" pitchFamily="34" charset="-120"/>
               </a:rPr>
-              <a:t>(a) Kode QR berisi komposisi material dan urutan titik pembongkaran, selaras paspor produk digital UE.</a:t>
-            </a:r>
-          </a:p>
-          <a:p>
-            <a:pPr marL="0" indent="0" algn="l">
-              <a:spcAft>
-                <a:spcPts val="300"/>
-              </a:spcAft>
-              <a:buNone/>
-            </a:pPr>
-            <a:r>
-              <a:rPr lang="id-ID" sz="1400" dirty="0">
-                <a:solidFill>
-                  <a:srgbClr val="1B2B2A"/>
-                </a:solidFill>
-                <a:latin typeface="Calibri" pitchFamily="34" charset="0"/>
-                <a:ea typeface="Calibri" pitchFamily="34" charset="-122"/>
-                <a:cs typeface="Calibri" pitchFamily="34" charset="-120"/>
-              </a:rPr>
-              <a:t>(b) Data terbuka bagi mitra daur ulang dan bengkel independen, terhubung ke program pengembalian di pasar berkembang.</a:t>
-            </a:r>
-          </a:p>
-        </p:txBody>
-      </p:sp>
-      <p:sp>
-        <p:nvSpPr>
-          <p:cNvPr id="116" name="Kartu Sebelum"/>
+              <a:t>kode QR berisi komposisi material dan urutan pembongkaran, terbuka bagi mitra daur ulang, selaras paspor produk digital UE.</a:t>
+            </a:r>
+          </a:p>
+        </p:txBody>
+      </p:sp>
+      <p:sp>
+        <p:nvSpPr>
+          <p:cNvPr id="235" name="Kartu Sebelum"/>
           <p:cNvSpPr/>
           <p:nvPr/>
         </p:nvSpPr>
         <p:spPr>
           <a:xfrm>
-            <a:off x="457200" y="3246120"/>
-            <a:ext cx="5227320" cy="2240280"/>
+            <a:off x="457200" y="2194560"/>
+            <a:ext cx="5341620" cy="4114800"/>
           </a:xfrm>
           <a:prstGeom prst="roundRect">
             <a:avLst>
@@ -3038,7 +3701,6 @@
             <a:solidFill>
               <a:srgbClr val="D5E2DD"/>
             </a:solidFill>
-            <a:prstDash val="solid"/>
           </a:ln>
           <a:effectLst>
             <a:outerShdw blurRad="76200" dist="25400" dir="5400000" algn="bl" rotWithShape="0">
@@ -3051,77 +3713,74 @@
       </p:sp>
       <p:sp>
         <p:nvSpPr>
-          <p:cNvPr id="117" name="Isi Sebelum"/>
-          <p:cNvSpPr txBox="1"/>
-          <p:nvPr/>
-        </p:nvSpPr>
-        <p:spPr>
-          <a:xfrm>
-            <a:off x="640080" y="3383280"/>
-            <a:ext cx="4861560" cy="2011680"/>
-          </a:xfrm>
-          <a:prstGeom prst="rect">
-            <a:avLst/>
-          </a:prstGeom>
-          <a:noFill/>
-          <a:ln/>
-        </p:spPr>
-        <p:txBody>
-          <a:bodyPr wrap="square" lIns="0" tIns="0" rIns="0" bIns="0" rtlCol="0" anchor="t"/>
-          <a:lstStyle/>
-          <a:p>
-            <a:pPr marL="0" indent="0" algn="l">
-              <a:spcAft>
-                <a:spcPts val="600"/>
-              </a:spcAft>
-              <a:buNone/>
-            </a:pPr>
-            <a:r>
-              <a:rPr lang="id-ID" sz="2000" b="1" dirty="0">
-                <a:solidFill>
-                  <a:srgbClr val="5B6B68"/>
-                </a:solidFill>
-                <a:latin typeface="Cambria" pitchFamily="34" charset="0"/>
-                <a:ea typeface="Cambria" pitchFamily="34" charset="-122"/>
-                <a:cs typeface="Cambria" pitchFamily="34" charset="-120"/>
-              </a:rPr>
-              <a:t>Sebelum</a:t>
-            </a:r>
-          </a:p>
-          <a:p>
-            <a:pPr marL="0" indent="0" algn="l">
-              <a:buNone/>
-            </a:pPr>
-            <a:r>
-              <a:rPr lang="id-ID" sz="1600" dirty="0">
-                <a:solidFill>
-                  <a:srgbClr val="1B2B2A"/>
-                </a:solidFill>
-                <a:latin typeface="Calibri" pitchFamily="34" charset="0"/>
-                <a:ea typeface="Calibri" pitchFamily="34" charset="-122"/>
-                <a:cs typeface="Calibri" pitchFamily="34" charset="-120"/>
-              </a:rPr>
-              <a:t>Informasi komposisi dan urutan bongkar tidak tersedia pada perangkat. Mitra pemulihan harus menebak cara bongkar sehingga material bercampur dan nilai pemulihan turun.</a:t>
-            </a:r>
-          </a:p>
-        </p:txBody>
-      </p:sp>
-      <p:sp>
-        <p:nvSpPr>
-          <p:cNvPr id="118" name="Panah"/>
+          <p:cNvPr id="236" name="Diagram latar Sebelum"/>
           <p:cNvSpPr/>
           <p:nvPr/>
         </p:nvSpPr>
         <p:spPr>
           <a:xfrm>
-            <a:off x="5821680" y="4137660"/>
-            <a:ext cx="548640" cy="457200"/>
-          </a:xfrm>
-          <a:prstGeom prst="rightArrow">
-            <a:avLst/>
+            <a:off x="594360" y="2331720"/>
+            <a:ext cx="5067300" cy="1600200"/>
+          </a:xfrm>
+          <a:prstGeom prst="roundRect">
+            <a:avLst>
+              <a:gd name="adj" fmla="val 6452"/>
+            </a:avLst>
           </a:prstGeom>
           <a:solidFill>
-            <a:srgbClr val="1F6F5C"/>
+            <a:srgbClr val="F4F8F6"/>
+          </a:solidFill>
+          <a:ln w="9525">
+            <a:solidFill>
+              <a:srgbClr val="D5E2DD"/>
+            </a:solidFill>
+          </a:ln>
+        </p:spPr>
+      </p:sp>
+      <p:sp>
+        <p:nvSpPr>
+          <p:cNvPr id="237" name="Ponsel"/>
+          <p:cNvSpPr/>
+          <p:nvPr/>
+        </p:nvSpPr>
+        <p:spPr>
+          <a:xfrm>
+            <a:off x="898398" y="2491740"/>
+            <a:ext cx="1114806" cy="1248156"/>
+          </a:xfrm>
+          <a:prstGeom prst="roundRect">
+            <a:avLst>
+              <a:gd name="adj" fmla="val 6452"/>
+            </a:avLst>
+          </a:prstGeom>
+          <a:solidFill>
+            <a:srgbClr val="2B3A38"/>
+          </a:solidFill>
+          <a:ln w="9525">
+            <a:solidFill>
+              <a:srgbClr val="12302B"/>
+            </a:solidFill>
+          </a:ln>
+        </p:spPr>
+      </p:sp>
+      <p:sp>
+        <p:nvSpPr>
+          <p:cNvPr id="238" name="Layar"/>
+          <p:cNvSpPr/>
+          <p:nvPr/>
+        </p:nvSpPr>
+        <p:spPr>
+          <a:xfrm>
+            <a:off x="958398" y="2551740"/>
+            <a:ext cx="994806" cy="1128156"/>
+          </a:xfrm>
+          <a:prstGeom prst="roundRect">
+            <a:avLst>
+              <a:gd name="adj" fmla="val 6452"/>
+            </a:avLst>
+          </a:prstGeom>
+          <a:solidFill>
+            <a:srgbClr val="6F7F7C"/>
           </a:solidFill>
           <a:ln>
             <a:noFill/>
@@ -3130,14 +3789,260 @@
       </p:sp>
       <p:sp>
         <p:nvSpPr>
-          <p:cNvPr id="119" name="Kartu Sesudah"/>
+          <p:cNvPr id="239" name="Tanya"/>
+          <p:cNvSpPr txBox="1"/>
+          <p:nvPr/>
+        </p:nvSpPr>
+        <p:spPr>
+          <a:xfrm>
+            <a:off x="898398" y="2815818"/>
+            <a:ext cx="1114806" cy="600000"/>
+          </a:xfrm>
+          <a:prstGeom prst="rect">
+            <a:avLst/>
+          </a:prstGeom>
+          <a:noFill/>
+          <a:ln/>
+        </p:spPr>
+        <p:txBody>
+          <a:bodyPr wrap="square" lIns="0" tIns="0" rIns="0" bIns="0" rtlCol="0" anchor="ctr"/>
+          <a:lstStyle/>
+          <a:p>
+            <a:pPr marL="0" indent="0" algn="ctr">
+              <a:buNone/>
+            </a:pPr>
+            <a:r>
+              <a:rPr lang="id-ID" sz="3600" b="1" dirty="0">
+                <a:solidFill>
+                  <a:srgbClr val="FFFFFF"/>
+                </a:solidFill>
+                <a:latin typeface="Calibri" pitchFamily="34" charset="0"/>
+                <a:ea typeface="Calibri" pitchFamily="34" charset="-122"/>
+                <a:cs typeface="Calibri" pitchFamily="34" charset="-120"/>
+              </a:rPr>
+              <a:t>?</a:t>
+            </a:r>
+          </a:p>
+        </p:txBody>
+      </p:sp>
+      <p:sp>
+        <p:nvSpPr>
+          <p:cNvPr id="240" name="Campur"/>
           <p:cNvSpPr/>
           <p:nvPr/>
         </p:nvSpPr>
         <p:spPr>
           <a:xfrm>
-            <a:off x="6507480" y="3246120"/>
-            <a:ext cx="5227320" cy="2240280"/>
+            <a:off x="3128010" y="2731770"/>
+            <a:ext cx="2229612" cy="800100"/>
+          </a:xfrm>
+          <a:prstGeom prst="roundRect">
+            <a:avLst/>
+          </a:prstGeom>
+          <a:solidFill>
+            <a:srgbClr val="EDEDED"/>
+          </a:solidFill>
+          <a:ln w="12700">
+            <a:solidFill>
+              <a:srgbClr val="B8B8B8"/>
+            </a:solidFill>
+            <a:prstDash val="dash"/>
+          </a:ln>
+        </p:spPr>
+        <p:txBody>
+          <a:bodyPr wrap="square" lIns="45720" tIns="0" rIns="45720" bIns="0" rtlCol="0" anchor="ctr"/>
+          <a:lstStyle/>
+          <a:p>
+            <a:pPr marL="0" indent="0" algn="ctr">
+              <a:buNone/>
+            </a:pPr>
+            <a:r>
+              <a:rPr lang="id-ID" sz="1000" b="1" dirty="0">
+                <a:solidFill>
+                  <a:srgbClr val="5B6B68"/>
+                </a:solidFill>
+                <a:latin typeface="Calibri" pitchFamily="34" charset="0"/>
+                <a:ea typeface="Calibri" pitchFamily="34" charset="-122"/>
+                <a:cs typeface="Calibri" pitchFamily="34" charset="-120"/>
+              </a:rPr>
+              <a:t>Material tercampur, urutan bongkar ditebak</a:t>
+            </a:r>
+          </a:p>
+        </p:txBody>
+      </p:sp>
+      <p:cxnSp>
+        <p:nvCxnSpPr>
+          <p:cNvPr id="241" name="ke campur"/>
+          <p:cNvCxnSpPr/>
+          <p:nvPr/>
+        </p:nvCxnSpPr>
+        <p:spPr>
+          <a:xfrm>
+            <a:off x="2053204" y="3115818"/>
+            <a:ext cx="1034806" cy="0"/>
+          </a:xfrm>
+          <a:prstGeom prst="straightConnector1">
+            <a:avLst/>
+          </a:prstGeom>
+          <a:ln w="12700">
+            <a:solidFill>
+              <a:srgbClr val="5B6B68"/>
+            </a:solidFill>
+            <a:prstDash val="dash"/>
+            <a:tailEnd type="triangle"/>
+          </a:ln>
+        </p:spPr>
+      </p:cxnSp>
+      <p:sp>
+        <p:nvSpPr>
+          <p:cNvPr id="242" name="Judul Sebelum"/>
+          <p:cNvSpPr txBox="1"/>
+          <p:nvPr/>
+        </p:nvSpPr>
+        <p:spPr>
+          <a:xfrm>
+            <a:off x="640080" y="4023360"/>
+            <a:ext cx="4975860" cy="320040"/>
+          </a:xfrm>
+          <a:prstGeom prst="rect">
+            <a:avLst/>
+          </a:prstGeom>
+          <a:noFill/>
+          <a:ln/>
+        </p:spPr>
+        <p:txBody>
+          <a:bodyPr wrap="square" lIns="0" tIns="0" rIns="0" bIns="0" rtlCol="0" anchor="t"/>
+          <a:lstStyle/>
+          <a:p>
+            <a:pPr marL="0" indent="0" algn="l">
+              <a:buNone/>
+            </a:pPr>
+            <a:r>
+              <a:rPr lang="id-ID" sz="1600" b="1" dirty="0">
+                <a:solidFill>
+                  <a:srgbClr val="5B6B68"/>
+                </a:solidFill>
+                <a:latin typeface="Cambria" pitchFamily="34" charset="0"/>
+                <a:ea typeface="Cambria" pitchFamily="34" charset="-122"/>
+                <a:cs typeface="Cambria" pitchFamily="34" charset="-120"/>
+              </a:rPr>
+              <a:t>Sebelum</a:t>
+            </a:r>
+          </a:p>
+        </p:txBody>
+      </p:sp>
+      <p:sp>
+        <p:nvSpPr>
+          <p:cNvPr id="243" name="Poin Sebelum"/>
+          <p:cNvSpPr txBox="1"/>
+          <p:nvPr/>
+        </p:nvSpPr>
+        <p:spPr>
+          <a:xfrm>
+            <a:off x="640080" y="4389120"/>
+            <a:ext cx="4975860" cy="1874520"/>
+          </a:xfrm>
+          <a:prstGeom prst="rect">
+            <a:avLst/>
+          </a:prstGeom>
+          <a:noFill/>
+          <a:ln/>
+        </p:spPr>
+        <p:txBody>
+          <a:bodyPr wrap="square" lIns="0" tIns="0" rIns="0" bIns="0" rtlCol="0" anchor="t"/>
+          <a:lstStyle/>
+          <a:p>
+            <a:pPr marL="228600" indent="-228600" algn="l">
+              <a:spcAft>
+                <a:spcPts val="200"/>
+              </a:spcAft>
+              <a:buFont typeface="Arial"/>
+              <a:buChar char="•"/>
+            </a:pPr>
+            <a:r>
+              <a:rPr lang="id-ID" sz="1200" dirty="0">
+                <a:solidFill>
+                  <a:srgbClr val="1B2B2A"/>
+                </a:solidFill>
+                <a:latin typeface="Calibri" pitchFamily="34" charset="0"/>
+                <a:ea typeface="Calibri" pitchFamily="34" charset="-122"/>
+                <a:cs typeface="Calibri" pitchFamily="34" charset="-120"/>
+              </a:rPr>
+              <a:t>Daisy membongkar 36 model iPhone, tetapi hanya di fasilitas Apple (Apple, 2026).</a:t>
+            </a:r>
+          </a:p>
+          <a:p>
+            <a:pPr marL="228600" indent="-228600" algn="l">
+              <a:spcAft>
+                <a:spcPts val="200"/>
+              </a:spcAft>
+              <a:buFont typeface="Arial"/>
+              <a:buChar char="•"/>
+            </a:pPr>
+            <a:r>
+              <a:rPr lang="id-ID" sz="1200" dirty="0">
+                <a:solidFill>
+                  <a:srgbClr val="1B2B2A"/>
+                </a:solidFill>
+                <a:latin typeface="Calibri" pitchFamily="34" charset="0"/>
+                <a:ea typeface="Calibri" pitchFamily="34" charset="-122"/>
+                <a:cs typeface="Calibri" pitchFamily="34" charset="-120"/>
+              </a:rPr>
+              <a:t>Mitra daur ulang lain tidak punya data komposisi dan urutan bongkar.</a:t>
+            </a:r>
+          </a:p>
+          <a:p>
+            <a:pPr marL="228600" indent="-228600" algn="l">
+              <a:spcAft>
+                <a:spcPts val="200"/>
+              </a:spcAft>
+              <a:buFont typeface="Arial"/>
+              <a:buChar char="•"/>
+            </a:pPr>
+            <a:r>
+              <a:rPr lang="id-ID" sz="1200" dirty="0">
+                <a:solidFill>
+                  <a:srgbClr val="1B2B2A"/>
+                </a:solidFill>
+                <a:latin typeface="Calibri" pitchFamily="34" charset="0"/>
+                <a:ea typeface="Calibri" pitchFamily="34" charset="-122"/>
+                <a:cs typeface="Calibri" pitchFamily="34" charset="-120"/>
+              </a:rPr>
+              <a:t>Global: hanya 22,3% e-waste terdokumentasi dikumpulkan dan didaur ulang; Indonesia menghasilkan ±1,9 miliar kg (ITU dan UNITAR, 2024).</a:t>
+            </a:r>
+          </a:p>
+          <a:p>
+            <a:pPr marL="228600" indent="-228600" algn="l">
+              <a:spcAft>
+                <a:spcPts val="200"/>
+              </a:spcAft>
+              <a:buFont typeface="Arial"/>
+              <a:buChar char="•"/>
+            </a:pPr>
+            <a:r>
+              <a:rPr lang="id-ID" sz="1200" dirty="0">
+                <a:solidFill>
+                  <a:srgbClr val="1B2B2A"/>
+                </a:solidFill>
+                <a:latin typeface="Calibri" pitchFamily="34" charset="0"/>
+                <a:ea typeface="Calibri" pitchFamily="34" charset="-122"/>
+                <a:cs typeface="Calibri" pitchFamily="34" charset="-120"/>
+              </a:rPr>
+              <a:t>Belum ada bukti terbuka bahwa Trade In menaikkan tingkat pengumpulan.</a:t>
+            </a:r>
+          </a:p>
+        </p:txBody>
+      </p:sp>
+      <p:sp>
+        <p:nvSpPr>
+          <p:cNvPr id="244" name="Kartu Sesudah — usulan"/>
+          <p:cNvSpPr/>
+          <p:nvPr/>
+        </p:nvSpPr>
+        <p:spPr>
+          <a:xfrm>
+            <a:off x="6393180" y="2194560"/>
+            <a:ext cx="5341620" cy="4114800"/>
           </a:xfrm>
           <a:prstGeom prst="roundRect">
             <a:avLst>
@@ -3151,7 +4056,6 @@
             <a:solidFill>
               <a:srgbClr val="1F6F5C"/>
             </a:solidFill>
-            <a:prstDash val="solid"/>
           </a:ln>
           <a:effectLst>
             <a:outerShdw blurRad="76200" dist="25400" dir="5400000" algn="bl" rotWithShape="0">
@@ -3164,14 +4068,884 @@
       </p:sp>
       <p:sp>
         <p:nvSpPr>
-          <p:cNvPr id="120" name="Isi Sesudah"/>
+          <p:cNvPr id="245" name="Diagram latar Sesudah — usulan"/>
+          <p:cNvSpPr/>
+          <p:nvPr/>
+        </p:nvSpPr>
+        <p:spPr>
+          <a:xfrm>
+            <a:off x="6530340" y="2331720"/>
+            <a:ext cx="5067300" cy="1600200"/>
+          </a:xfrm>
+          <a:prstGeom prst="roundRect">
+            <a:avLst>
+              <a:gd name="adj" fmla="val 6452"/>
+            </a:avLst>
+          </a:prstGeom>
+          <a:solidFill>
+            <a:srgbClr val="FFFFFF"/>
+          </a:solidFill>
+          <a:ln w="9525">
+            <a:solidFill>
+              <a:srgbClr val="D5E2DD"/>
+            </a:solidFill>
+          </a:ln>
+        </p:spPr>
+      </p:sp>
+      <p:sp>
+        <p:nvSpPr>
+          <p:cNvPr id="246" name="Ponsel"/>
+          <p:cNvSpPr/>
+          <p:nvPr/>
+        </p:nvSpPr>
+        <p:spPr>
+          <a:xfrm>
+            <a:off x="6834378" y="2491740"/>
+            <a:ext cx="1114806" cy="1248156"/>
+          </a:xfrm>
+          <a:prstGeom prst="roundRect">
+            <a:avLst>
+              <a:gd name="adj" fmla="val 6452"/>
+            </a:avLst>
+          </a:prstGeom>
+          <a:solidFill>
+            <a:srgbClr val="2B3A38"/>
+          </a:solidFill>
+          <a:ln w="9525">
+            <a:solidFill>
+              <a:srgbClr val="12302B"/>
+            </a:solidFill>
+          </a:ln>
+        </p:spPr>
+      </p:sp>
+      <p:sp>
+        <p:nvSpPr>
+          <p:cNvPr id="247" name="Layar"/>
+          <p:cNvSpPr/>
+          <p:nvPr/>
+        </p:nvSpPr>
+        <p:spPr>
+          <a:xfrm>
+            <a:off x="6894378" y="2551740"/>
+            <a:ext cx="994806" cy="1128156"/>
+          </a:xfrm>
+          <a:prstGeom prst="roundRect">
+            <a:avLst>
+              <a:gd name="adj" fmla="val 6452"/>
+            </a:avLst>
+          </a:prstGeom>
+          <a:solidFill>
+            <a:srgbClr val="9FC3B6"/>
+          </a:solidFill>
+          <a:ln>
+            <a:noFill/>
+          </a:ln>
+        </p:spPr>
+      </p:sp>
+      <p:sp>
+        <p:nvSpPr>
+          <p:cNvPr id="248" name="QR latar"/>
+          <p:cNvSpPr/>
+          <p:nvPr/>
+        </p:nvSpPr>
+        <p:spPr>
+          <a:xfrm>
+            <a:off x="7191781" y="2855818"/>
+            <a:ext cx="400000" cy="400000"/>
+          </a:xfrm>
+          <a:prstGeom prst="rect">
+            <a:avLst/>
+          </a:prstGeom>
+          <a:solidFill>
+            <a:srgbClr val="FFFFFF"/>
+          </a:solidFill>
+          <a:ln w="9525">
+            <a:solidFill>
+              <a:srgbClr val="12302B"/>
+            </a:solidFill>
+          </a:ln>
+        </p:spPr>
+      </p:sp>
+      <p:sp>
+        <p:nvSpPr>
+          <p:cNvPr id="249" name="QR"/>
+          <p:cNvSpPr/>
+          <p:nvPr/>
+        </p:nvSpPr>
+        <p:spPr>
+          <a:xfrm>
+            <a:off x="7191781" y="2855818"/>
+            <a:ext cx="57142" cy="57142"/>
+          </a:xfrm>
+          <a:prstGeom prst="rect">
+            <a:avLst/>
+          </a:prstGeom>
+          <a:solidFill>
+            <a:srgbClr val="12302B"/>
+          </a:solidFill>
+          <a:ln>
+            <a:noFill/>
+          </a:ln>
+        </p:spPr>
+      </p:sp>
+      <p:sp>
+        <p:nvSpPr>
+          <p:cNvPr id="250" name="QR"/>
+          <p:cNvSpPr/>
+          <p:nvPr/>
+        </p:nvSpPr>
+        <p:spPr>
+          <a:xfrm>
+            <a:off x="7248923" y="2855818"/>
+            <a:ext cx="57142" cy="57142"/>
+          </a:xfrm>
+          <a:prstGeom prst="rect">
+            <a:avLst/>
+          </a:prstGeom>
+          <a:solidFill>
+            <a:srgbClr val="12302B"/>
+          </a:solidFill>
+          <a:ln>
+            <a:noFill/>
+          </a:ln>
+        </p:spPr>
+      </p:sp>
+      <p:sp>
+        <p:nvSpPr>
+          <p:cNvPr id="251" name="QR"/>
+          <p:cNvSpPr/>
+          <p:nvPr/>
+        </p:nvSpPr>
+        <p:spPr>
+          <a:xfrm>
+            <a:off x="7306065" y="2855818"/>
+            <a:ext cx="57142" cy="57142"/>
+          </a:xfrm>
+          <a:prstGeom prst="rect">
+            <a:avLst/>
+          </a:prstGeom>
+          <a:solidFill>
+            <a:srgbClr val="12302B"/>
+          </a:solidFill>
+          <a:ln>
+            <a:noFill/>
+          </a:ln>
+        </p:spPr>
+      </p:sp>
+      <p:sp>
+        <p:nvSpPr>
+          <p:cNvPr id="252" name="QR"/>
+          <p:cNvSpPr/>
+          <p:nvPr/>
+        </p:nvSpPr>
+        <p:spPr>
+          <a:xfrm>
+            <a:off x="7363207" y="2855818"/>
+            <a:ext cx="57142" cy="57142"/>
+          </a:xfrm>
+          <a:prstGeom prst="rect">
+            <a:avLst/>
+          </a:prstGeom>
+          <a:solidFill>
+            <a:srgbClr val="12302B"/>
+          </a:solidFill>
+          <a:ln>
+            <a:noFill/>
+          </a:ln>
+        </p:spPr>
+      </p:sp>
+      <p:sp>
+        <p:nvSpPr>
+          <p:cNvPr id="253" name="QR"/>
+          <p:cNvSpPr/>
+          <p:nvPr/>
+        </p:nvSpPr>
+        <p:spPr>
+          <a:xfrm>
+            <a:off x="7477491" y="2855818"/>
+            <a:ext cx="57142" cy="57142"/>
+          </a:xfrm>
+          <a:prstGeom prst="rect">
+            <a:avLst/>
+          </a:prstGeom>
+          <a:solidFill>
+            <a:srgbClr val="12302B"/>
+          </a:solidFill>
+          <a:ln>
+            <a:noFill/>
+          </a:ln>
+        </p:spPr>
+      </p:sp>
+      <p:sp>
+        <p:nvSpPr>
+          <p:cNvPr id="254" name="QR"/>
+          <p:cNvSpPr/>
+          <p:nvPr/>
+        </p:nvSpPr>
+        <p:spPr>
+          <a:xfrm>
+            <a:off x="7534633" y="2855818"/>
+            <a:ext cx="57142" cy="57142"/>
+          </a:xfrm>
+          <a:prstGeom prst="rect">
+            <a:avLst/>
+          </a:prstGeom>
+          <a:solidFill>
+            <a:srgbClr val="12302B"/>
+          </a:solidFill>
+          <a:ln>
+            <a:noFill/>
+          </a:ln>
+        </p:spPr>
+      </p:sp>
+      <p:sp>
+        <p:nvSpPr>
+          <p:cNvPr id="255" name="QR"/>
+          <p:cNvSpPr/>
+          <p:nvPr/>
+        </p:nvSpPr>
+        <p:spPr>
+          <a:xfrm>
+            <a:off x="7191781" y="2912960"/>
+            <a:ext cx="57142" cy="57142"/>
+          </a:xfrm>
+          <a:prstGeom prst="rect">
+            <a:avLst/>
+          </a:prstGeom>
+          <a:solidFill>
+            <a:srgbClr val="12302B"/>
+          </a:solidFill>
+          <a:ln>
+            <a:noFill/>
+          </a:ln>
+        </p:spPr>
+      </p:sp>
+      <p:sp>
+        <p:nvSpPr>
+          <p:cNvPr id="256" name="QR"/>
+          <p:cNvSpPr/>
+          <p:nvPr/>
+        </p:nvSpPr>
+        <p:spPr>
+          <a:xfrm>
+            <a:off x="7248923" y="2912960"/>
+            <a:ext cx="57142" cy="57142"/>
+          </a:xfrm>
+          <a:prstGeom prst="rect">
+            <a:avLst/>
+          </a:prstGeom>
+          <a:solidFill>
+            <a:srgbClr val="12302B"/>
+          </a:solidFill>
+          <a:ln>
+            <a:noFill/>
+          </a:ln>
+        </p:spPr>
+      </p:sp>
+      <p:sp>
+        <p:nvSpPr>
+          <p:cNvPr id="257" name="QR"/>
+          <p:cNvSpPr/>
+          <p:nvPr/>
+        </p:nvSpPr>
+        <p:spPr>
+          <a:xfrm>
+            <a:off x="7306065" y="2912960"/>
+            <a:ext cx="57142" cy="57142"/>
+          </a:xfrm>
+          <a:prstGeom prst="rect">
+            <a:avLst/>
+          </a:prstGeom>
+          <a:solidFill>
+            <a:srgbClr val="12302B"/>
+          </a:solidFill>
+          <a:ln>
+            <a:noFill/>
+          </a:ln>
+        </p:spPr>
+      </p:sp>
+      <p:sp>
+        <p:nvSpPr>
+          <p:cNvPr id="258" name="QR"/>
+          <p:cNvSpPr/>
+          <p:nvPr/>
+        </p:nvSpPr>
+        <p:spPr>
+          <a:xfrm>
+            <a:off x="7420349" y="2912960"/>
+            <a:ext cx="57142" cy="57142"/>
+          </a:xfrm>
+          <a:prstGeom prst="rect">
+            <a:avLst/>
+          </a:prstGeom>
+          <a:solidFill>
+            <a:srgbClr val="12302B"/>
+          </a:solidFill>
+          <a:ln>
+            <a:noFill/>
+          </a:ln>
+        </p:spPr>
+      </p:sp>
+      <p:sp>
+        <p:nvSpPr>
+          <p:cNvPr id="259" name="QR"/>
+          <p:cNvSpPr/>
+          <p:nvPr/>
+        </p:nvSpPr>
+        <p:spPr>
+          <a:xfrm>
+            <a:off x="7477491" y="2912960"/>
+            <a:ext cx="57142" cy="57142"/>
+          </a:xfrm>
+          <a:prstGeom prst="rect">
+            <a:avLst/>
+          </a:prstGeom>
+          <a:solidFill>
+            <a:srgbClr val="12302B"/>
+          </a:solidFill>
+          <a:ln>
+            <a:noFill/>
+          </a:ln>
+        </p:spPr>
+      </p:sp>
+      <p:sp>
+        <p:nvSpPr>
+          <p:cNvPr id="260" name="QR"/>
+          <p:cNvSpPr/>
+          <p:nvPr/>
+        </p:nvSpPr>
+        <p:spPr>
+          <a:xfrm>
+            <a:off x="7534633" y="2912960"/>
+            <a:ext cx="57142" cy="57142"/>
+          </a:xfrm>
+          <a:prstGeom prst="rect">
+            <a:avLst/>
+          </a:prstGeom>
+          <a:solidFill>
+            <a:srgbClr val="12302B"/>
+          </a:solidFill>
+          <a:ln>
+            <a:noFill/>
+          </a:ln>
+        </p:spPr>
+      </p:sp>
+      <p:sp>
+        <p:nvSpPr>
+          <p:cNvPr id="261" name="QR"/>
+          <p:cNvSpPr/>
+          <p:nvPr/>
+        </p:nvSpPr>
+        <p:spPr>
+          <a:xfrm>
+            <a:off x="7191781" y="2970102"/>
+            <a:ext cx="57142" cy="57142"/>
+          </a:xfrm>
+          <a:prstGeom prst="rect">
+            <a:avLst/>
+          </a:prstGeom>
+          <a:solidFill>
+            <a:srgbClr val="12302B"/>
+          </a:solidFill>
+          <a:ln>
+            <a:noFill/>
+          </a:ln>
+        </p:spPr>
+      </p:sp>
+      <p:sp>
+        <p:nvSpPr>
+          <p:cNvPr id="262" name="QR"/>
+          <p:cNvSpPr/>
+          <p:nvPr/>
+        </p:nvSpPr>
+        <p:spPr>
+          <a:xfrm>
+            <a:off x="7306065" y="2970102"/>
+            <a:ext cx="57142" cy="57142"/>
+          </a:xfrm>
+          <a:prstGeom prst="rect">
+            <a:avLst/>
+          </a:prstGeom>
+          <a:solidFill>
+            <a:srgbClr val="12302B"/>
+          </a:solidFill>
+          <a:ln>
+            <a:noFill/>
+          </a:ln>
+        </p:spPr>
+      </p:sp>
+      <p:sp>
+        <p:nvSpPr>
+          <p:cNvPr id="263" name="QR"/>
+          <p:cNvSpPr/>
+          <p:nvPr/>
+        </p:nvSpPr>
+        <p:spPr>
+          <a:xfrm>
+            <a:off x="7363207" y="2970102"/>
+            <a:ext cx="57142" cy="57142"/>
+          </a:xfrm>
+          <a:prstGeom prst="rect">
+            <a:avLst/>
+          </a:prstGeom>
+          <a:solidFill>
+            <a:srgbClr val="12302B"/>
+          </a:solidFill>
+          <a:ln>
+            <a:noFill/>
+          </a:ln>
+        </p:spPr>
+      </p:sp>
+      <p:sp>
+        <p:nvSpPr>
+          <p:cNvPr id="264" name="QR"/>
+          <p:cNvSpPr/>
+          <p:nvPr/>
+        </p:nvSpPr>
+        <p:spPr>
+          <a:xfrm>
+            <a:off x="7420349" y="2970102"/>
+            <a:ext cx="57142" cy="57142"/>
+          </a:xfrm>
+          <a:prstGeom prst="rect">
+            <a:avLst/>
+          </a:prstGeom>
+          <a:solidFill>
+            <a:srgbClr val="12302B"/>
+          </a:solidFill>
+          <a:ln>
+            <a:noFill/>
+          </a:ln>
+        </p:spPr>
+      </p:sp>
+      <p:sp>
+        <p:nvSpPr>
+          <p:cNvPr id="265" name="QR"/>
+          <p:cNvSpPr/>
+          <p:nvPr/>
+        </p:nvSpPr>
+        <p:spPr>
+          <a:xfrm>
+            <a:off x="7477491" y="2970102"/>
+            <a:ext cx="57142" cy="57142"/>
+          </a:xfrm>
+          <a:prstGeom prst="rect">
+            <a:avLst/>
+          </a:prstGeom>
+          <a:solidFill>
+            <a:srgbClr val="12302B"/>
+          </a:solidFill>
+          <a:ln>
+            <a:noFill/>
+          </a:ln>
+        </p:spPr>
+      </p:sp>
+      <p:sp>
+        <p:nvSpPr>
+          <p:cNvPr id="266" name="QR"/>
+          <p:cNvSpPr/>
+          <p:nvPr/>
+        </p:nvSpPr>
+        <p:spPr>
+          <a:xfrm>
+            <a:off x="7534633" y="2970102"/>
+            <a:ext cx="57142" cy="57142"/>
+          </a:xfrm>
+          <a:prstGeom prst="rect">
+            <a:avLst/>
+          </a:prstGeom>
+          <a:solidFill>
+            <a:srgbClr val="12302B"/>
+          </a:solidFill>
+          <a:ln>
+            <a:noFill/>
+          </a:ln>
+        </p:spPr>
+      </p:sp>
+      <p:sp>
+        <p:nvSpPr>
+          <p:cNvPr id="267" name="QR"/>
+          <p:cNvSpPr/>
+          <p:nvPr/>
+        </p:nvSpPr>
+        <p:spPr>
+          <a:xfrm>
+            <a:off x="7248923" y="3027244"/>
+            <a:ext cx="57142" cy="57142"/>
+          </a:xfrm>
+          <a:prstGeom prst="rect">
+            <a:avLst/>
+          </a:prstGeom>
+          <a:solidFill>
+            <a:srgbClr val="12302B"/>
+          </a:solidFill>
+          <a:ln>
+            <a:noFill/>
+          </a:ln>
+        </p:spPr>
+      </p:sp>
+      <p:sp>
+        <p:nvSpPr>
+          <p:cNvPr id="268" name="QR"/>
+          <p:cNvSpPr/>
+          <p:nvPr/>
+        </p:nvSpPr>
+        <p:spPr>
+          <a:xfrm>
+            <a:off x="7306065" y="3027244"/>
+            <a:ext cx="57142" cy="57142"/>
+          </a:xfrm>
+          <a:prstGeom prst="rect">
+            <a:avLst/>
+          </a:prstGeom>
+          <a:solidFill>
+            <a:srgbClr val="12302B"/>
+          </a:solidFill>
+          <a:ln>
+            <a:noFill/>
+          </a:ln>
+        </p:spPr>
+      </p:sp>
+      <p:sp>
+        <p:nvSpPr>
+          <p:cNvPr id="269" name="QR"/>
+          <p:cNvSpPr/>
+          <p:nvPr/>
+        </p:nvSpPr>
+        <p:spPr>
+          <a:xfrm>
+            <a:off x="7534633" y="3027244"/>
+            <a:ext cx="57142" cy="57142"/>
+          </a:xfrm>
+          <a:prstGeom prst="rect">
+            <a:avLst/>
+          </a:prstGeom>
+          <a:solidFill>
+            <a:srgbClr val="12302B"/>
+          </a:solidFill>
+          <a:ln>
+            <a:noFill/>
+          </a:ln>
+        </p:spPr>
+      </p:sp>
+      <p:sp>
+        <p:nvSpPr>
+          <p:cNvPr id="270" name="QR"/>
+          <p:cNvSpPr/>
+          <p:nvPr/>
+        </p:nvSpPr>
+        <p:spPr>
+          <a:xfrm>
+            <a:off x="7248923" y="3084386"/>
+            <a:ext cx="57142" cy="57142"/>
+          </a:xfrm>
+          <a:prstGeom prst="rect">
+            <a:avLst/>
+          </a:prstGeom>
+          <a:solidFill>
+            <a:srgbClr val="12302B"/>
+          </a:solidFill>
+          <a:ln>
+            <a:noFill/>
+          </a:ln>
+        </p:spPr>
+      </p:sp>
+      <p:sp>
+        <p:nvSpPr>
+          <p:cNvPr id="271" name="QR"/>
+          <p:cNvSpPr/>
+          <p:nvPr/>
+        </p:nvSpPr>
+        <p:spPr>
+          <a:xfrm>
+            <a:off x="7363207" y="3084386"/>
+            <a:ext cx="57142" cy="57142"/>
+          </a:xfrm>
+          <a:prstGeom prst="rect">
+            <a:avLst/>
+          </a:prstGeom>
+          <a:solidFill>
+            <a:srgbClr val="12302B"/>
+          </a:solidFill>
+          <a:ln>
+            <a:noFill/>
+          </a:ln>
+        </p:spPr>
+      </p:sp>
+      <p:sp>
+        <p:nvSpPr>
+          <p:cNvPr id="272" name="QR"/>
+          <p:cNvSpPr/>
+          <p:nvPr/>
+        </p:nvSpPr>
+        <p:spPr>
+          <a:xfrm>
+            <a:off x="7420349" y="3084386"/>
+            <a:ext cx="57142" cy="57142"/>
+          </a:xfrm>
+          <a:prstGeom prst="rect">
+            <a:avLst/>
+          </a:prstGeom>
+          <a:solidFill>
+            <a:srgbClr val="12302B"/>
+          </a:solidFill>
+          <a:ln>
+            <a:noFill/>
+          </a:ln>
+        </p:spPr>
+      </p:sp>
+      <p:sp>
+        <p:nvSpPr>
+          <p:cNvPr id="273" name="QR"/>
+          <p:cNvSpPr/>
+          <p:nvPr/>
+        </p:nvSpPr>
+        <p:spPr>
+          <a:xfrm>
+            <a:off x="7477491" y="3084386"/>
+            <a:ext cx="57142" cy="57142"/>
+          </a:xfrm>
+          <a:prstGeom prst="rect">
+            <a:avLst/>
+          </a:prstGeom>
+          <a:solidFill>
+            <a:srgbClr val="12302B"/>
+          </a:solidFill>
+          <a:ln>
+            <a:noFill/>
+          </a:ln>
+        </p:spPr>
+      </p:sp>
+      <p:sp>
+        <p:nvSpPr>
+          <p:cNvPr id="274" name="QR"/>
+          <p:cNvSpPr/>
+          <p:nvPr/>
+        </p:nvSpPr>
+        <p:spPr>
+          <a:xfrm>
+            <a:off x="7534633" y="3084386"/>
+            <a:ext cx="57142" cy="57142"/>
+          </a:xfrm>
+          <a:prstGeom prst="rect">
+            <a:avLst/>
+          </a:prstGeom>
+          <a:solidFill>
+            <a:srgbClr val="12302B"/>
+          </a:solidFill>
+          <a:ln>
+            <a:noFill/>
+          </a:ln>
+        </p:spPr>
+      </p:sp>
+      <p:sp>
+        <p:nvSpPr>
+          <p:cNvPr id="275" name="QR"/>
+          <p:cNvSpPr/>
+          <p:nvPr/>
+        </p:nvSpPr>
+        <p:spPr>
+          <a:xfrm>
+            <a:off x="7191781" y="3141528"/>
+            <a:ext cx="57142" cy="57142"/>
+          </a:xfrm>
+          <a:prstGeom prst="rect">
+            <a:avLst/>
+          </a:prstGeom>
+          <a:solidFill>
+            <a:srgbClr val="12302B"/>
+          </a:solidFill>
+          <a:ln>
+            <a:noFill/>
+          </a:ln>
+        </p:spPr>
+      </p:sp>
+      <p:sp>
+        <p:nvSpPr>
+          <p:cNvPr id="276" name="QR"/>
+          <p:cNvSpPr/>
+          <p:nvPr/>
+        </p:nvSpPr>
+        <p:spPr>
+          <a:xfrm>
+            <a:off x="7248923" y="3141528"/>
+            <a:ext cx="57142" cy="57142"/>
+          </a:xfrm>
+          <a:prstGeom prst="rect">
+            <a:avLst/>
+          </a:prstGeom>
+          <a:solidFill>
+            <a:srgbClr val="12302B"/>
+          </a:solidFill>
+          <a:ln>
+            <a:noFill/>
+          </a:ln>
+        </p:spPr>
+      </p:sp>
+      <p:sp>
+        <p:nvSpPr>
+          <p:cNvPr id="277" name="QR"/>
+          <p:cNvSpPr/>
+          <p:nvPr/>
+        </p:nvSpPr>
+        <p:spPr>
+          <a:xfrm>
+            <a:off x="7363207" y="3141528"/>
+            <a:ext cx="57142" cy="57142"/>
+          </a:xfrm>
+          <a:prstGeom prst="rect">
+            <a:avLst/>
+          </a:prstGeom>
+          <a:solidFill>
+            <a:srgbClr val="12302B"/>
+          </a:solidFill>
+          <a:ln>
+            <a:noFill/>
+          </a:ln>
+        </p:spPr>
+      </p:sp>
+      <p:sp>
+        <p:nvSpPr>
+          <p:cNvPr id="278" name="QR"/>
+          <p:cNvSpPr/>
+          <p:nvPr/>
+        </p:nvSpPr>
+        <p:spPr>
+          <a:xfrm>
+            <a:off x="7534633" y="3141528"/>
+            <a:ext cx="57142" cy="57142"/>
+          </a:xfrm>
+          <a:prstGeom prst="rect">
+            <a:avLst/>
+          </a:prstGeom>
+          <a:solidFill>
+            <a:srgbClr val="12302B"/>
+          </a:solidFill>
+          <a:ln>
+            <a:noFill/>
+          </a:ln>
+        </p:spPr>
+      </p:sp>
+      <p:sp>
+        <p:nvSpPr>
+          <p:cNvPr id="279" name="QR"/>
+          <p:cNvSpPr/>
+          <p:nvPr/>
+        </p:nvSpPr>
+        <p:spPr>
+          <a:xfrm>
+            <a:off x="7191781" y="3198670"/>
+            <a:ext cx="57142" cy="57142"/>
+          </a:xfrm>
+          <a:prstGeom prst="rect">
+            <a:avLst/>
+          </a:prstGeom>
+          <a:solidFill>
+            <a:srgbClr val="12302B"/>
+          </a:solidFill>
+          <a:ln>
+            <a:noFill/>
+          </a:ln>
+        </p:spPr>
+      </p:sp>
+      <p:sp>
+        <p:nvSpPr>
+          <p:cNvPr id="280" name="QR"/>
+          <p:cNvSpPr/>
+          <p:nvPr/>
+        </p:nvSpPr>
+        <p:spPr>
+          <a:xfrm>
+            <a:off x="7248923" y="3198670"/>
+            <a:ext cx="57142" cy="57142"/>
+          </a:xfrm>
+          <a:prstGeom prst="rect">
+            <a:avLst/>
+          </a:prstGeom>
+          <a:solidFill>
+            <a:srgbClr val="12302B"/>
+          </a:solidFill>
+          <a:ln>
+            <a:noFill/>
+          </a:ln>
+        </p:spPr>
+      </p:sp>
+      <p:sp>
+        <p:nvSpPr>
+          <p:cNvPr id="281" name="QR"/>
+          <p:cNvSpPr/>
+          <p:nvPr/>
+        </p:nvSpPr>
+        <p:spPr>
+          <a:xfrm>
+            <a:off x="7363207" y="3198670"/>
+            <a:ext cx="57142" cy="57142"/>
+          </a:xfrm>
+          <a:prstGeom prst="rect">
+            <a:avLst/>
+          </a:prstGeom>
+          <a:solidFill>
+            <a:srgbClr val="12302B"/>
+          </a:solidFill>
+          <a:ln>
+            <a:noFill/>
+          </a:ln>
+        </p:spPr>
+      </p:sp>
+      <p:sp>
+        <p:nvSpPr>
+          <p:cNvPr id="282" name="QR"/>
+          <p:cNvSpPr/>
+          <p:nvPr/>
+        </p:nvSpPr>
+        <p:spPr>
+          <a:xfrm>
+            <a:off x="7420349" y="3198670"/>
+            <a:ext cx="57142" cy="57142"/>
+          </a:xfrm>
+          <a:prstGeom prst="rect">
+            <a:avLst/>
+          </a:prstGeom>
+          <a:solidFill>
+            <a:srgbClr val="12302B"/>
+          </a:solidFill>
+          <a:ln>
+            <a:noFill/>
+          </a:ln>
+        </p:spPr>
+      </p:sp>
+      <p:sp>
+        <p:nvSpPr>
+          <p:cNvPr id="283" name="QR"/>
+          <p:cNvSpPr/>
+          <p:nvPr/>
+        </p:nvSpPr>
+        <p:spPr>
+          <a:xfrm>
+            <a:off x="7477491" y="3198670"/>
+            <a:ext cx="57142" cy="57142"/>
+          </a:xfrm>
+          <a:prstGeom prst="rect">
+            <a:avLst/>
+          </a:prstGeom>
+          <a:solidFill>
+            <a:srgbClr val="12302B"/>
+          </a:solidFill>
+          <a:ln>
+            <a:noFill/>
+          </a:ln>
+        </p:spPr>
+      </p:sp>
+      <p:sp>
+        <p:nvSpPr>
+          <p:cNvPr id="284" name="QR teks"/>
           <p:cNvSpPr txBox="1"/>
           <p:nvPr/>
         </p:nvSpPr>
         <p:spPr>
           <a:xfrm>
-            <a:off x="6690360" y="3383280"/>
-            <a:ext cx="4861560" cy="2011680"/>
+            <a:off x="6834378" y="3305818"/>
+            <a:ext cx="1114806" cy="200000"/>
           </a:xfrm>
           <a:prstGeom prst="rect">
             <a:avLst/>
@@ -3183,14 +4957,247 @@
           <a:bodyPr wrap="square" lIns="0" tIns="0" rIns="0" bIns="0" rtlCol="0" anchor="t"/>
           <a:lstStyle/>
           <a:p>
+            <a:pPr marL="0" indent="0" algn="ctr">
+              <a:buNone/>
+            </a:pPr>
+            <a:r>
+              <a:rPr lang="id-ID" sz="900" b="1" dirty="0">
+                <a:solidFill>
+                  <a:srgbClr val="12302B"/>
+                </a:solidFill>
+                <a:latin typeface="Calibri" pitchFamily="34" charset="0"/>
+                <a:ea typeface="Calibri" pitchFamily="34" charset="-122"/>
+                <a:cs typeface="Calibri" pitchFamily="34" charset="-120"/>
+              </a:rPr>
+              <a:t>paspor digital</a:t>
+            </a:r>
+          </a:p>
+        </p:txBody>
+      </p:sp>
+      <p:sp>
+        <p:nvSpPr>
+          <p:cNvPr id="285" name="Bin Aluminium"/>
+          <p:cNvSpPr/>
+          <p:nvPr/>
+        </p:nvSpPr>
+        <p:spPr>
+          <a:xfrm>
+            <a:off x="9063990" y="2571750"/>
+            <a:ext cx="2229612" cy="304038"/>
+          </a:xfrm>
+          <a:prstGeom prst="roundRect">
+            <a:avLst/>
+          </a:prstGeom>
+          <a:solidFill>
+            <a:srgbClr val="E3EFEA"/>
+          </a:solidFill>
+          <a:ln w="12700">
+            <a:solidFill>
+              <a:srgbClr val="1F6F5C"/>
+            </a:solidFill>
+          </a:ln>
+        </p:spPr>
+        <p:txBody>
+          <a:bodyPr wrap="square" lIns="45720" tIns="0" rIns="45720" bIns="0" rtlCol="0" anchor="ctr"/>
+          <a:lstStyle/>
+          <a:p>
+            <a:pPr marL="0" indent="0" algn="ctr">
+              <a:buNone/>
+            </a:pPr>
+            <a:r>
+              <a:rPr lang="id-ID" sz="1000" b="1" dirty="0">
+                <a:solidFill>
+                  <a:srgbClr val="12302B"/>
+                </a:solidFill>
+                <a:latin typeface="Calibri" pitchFamily="34" charset="0"/>
+                <a:ea typeface="Calibri" pitchFamily="34" charset="-122"/>
+                <a:cs typeface="Calibri" pitchFamily="34" charset="-120"/>
+              </a:rPr>
+              <a:t>Aluminium</a:t>
+            </a:r>
+          </a:p>
+        </p:txBody>
+      </p:sp>
+      <p:cxnSp>
+        <p:nvCxnSpPr>
+          <p:cNvPr id="286" name="ke Aluminium"/>
+          <p:cNvCxnSpPr/>
+          <p:nvPr/>
+        </p:nvCxnSpPr>
+        <p:spPr>
+          <a:xfrm flipV="1">
+            <a:off x="7989184" y="2723769"/>
+            <a:ext cx="1034806" cy="392049"/>
+          </a:xfrm>
+          <a:prstGeom prst="straightConnector1">
+            <a:avLst/>
+          </a:prstGeom>
+          <a:ln w="12700">
+            <a:solidFill>
+              <a:srgbClr val="1F6F5C"/>
+            </a:solidFill>
+            <a:tailEnd type="triangle"/>
+          </a:ln>
+        </p:spPr>
+      </p:cxnSp>
+      <p:sp>
+        <p:nvSpPr>
+          <p:cNvPr id="287" name="Bin Baterai (kobalt, litium)"/>
+          <p:cNvSpPr/>
+          <p:nvPr/>
+        </p:nvSpPr>
+        <p:spPr>
+          <a:xfrm>
+            <a:off x="9063990" y="2987802"/>
+            <a:ext cx="2229612" cy="304038"/>
+          </a:xfrm>
+          <a:prstGeom prst="roundRect">
+            <a:avLst/>
+          </a:prstGeom>
+          <a:solidFill>
+            <a:srgbClr val="E3EFEA"/>
+          </a:solidFill>
+          <a:ln w="12700">
+            <a:solidFill>
+              <a:srgbClr val="C98A12"/>
+            </a:solidFill>
+          </a:ln>
+        </p:spPr>
+        <p:txBody>
+          <a:bodyPr wrap="square" lIns="45720" tIns="0" rIns="45720" bIns="0" rtlCol="0" anchor="ctr"/>
+          <a:lstStyle/>
+          <a:p>
+            <a:pPr marL="0" indent="0" algn="ctr">
+              <a:buNone/>
+            </a:pPr>
+            <a:r>
+              <a:rPr lang="id-ID" sz="1000" b="1" dirty="0">
+                <a:solidFill>
+                  <a:srgbClr val="12302B"/>
+                </a:solidFill>
+                <a:latin typeface="Calibri" pitchFamily="34" charset="0"/>
+                <a:ea typeface="Calibri" pitchFamily="34" charset="-122"/>
+                <a:cs typeface="Calibri" pitchFamily="34" charset="-120"/>
+              </a:rPr>
+              <a:t>Baterai (kobalt, litium)</a:t>
+            </a:r>
+          </a:p>
+        </p:txBody>
+      </p:sp>
+      <p:cxnSp>
+        <p:nvCxnSpPr>
+          <p:cNvPr id="288" name="ke Baterai (kobalt, litium)"/>
+          <p:cNvCxnSpPr/>
+          <p:nvPr/>
+        </p:nvCxnSpPr>
+        <p:spPr>
+          <a:xfrm>
+            <a:off x="7989184" y="3115818"/>
+            <a:ext cx="1034806" cy="24003"/>
+          </a:xfrm>
+          <a:prstGeom prst="straightConnector1">
+            <a:avLst/>
+          </a:prstGeom>
+          <a:ln w="12700">
+            <a:solidFill>
+              <a:srgbClr val="1F6F5C"/>
+            </a:solidFill>
+            <a:tailEnd type="triangle"/>
+          </a:ln>
+        </p:spPr>
+      </p:cxnSp>
+      <p:sp>
+        <p:nvSpPr>
+          <p:cNvPr id="289" name="Bin Papan logika (emas, timah)"/>
+          <p:cNvSpPr/>
+          <p:nvPr/>
+        </p:nvSpPr>
+        <p:spPr>
+          <a:xfrm>
+            <a:off x="9063990" y="3403854"/>
+            <a:ext cx="2229612" cy="304038"/>
+          </a:xfrm>
+          <a:prstGeom prst="roundRect">
+            <a:avLst/>
+          </a:prstGeom>
+          <a:solidFill>
+            <a:srgbClr val="E3EFEA"/>
+          </a:solidFill>
+          <a:ln w="12700">
+            <a:solidFill>
+              <a:srgbClr val="1F6F5C"/>
+            </a:solidFill>
+          </a:ln>
+        </p:spPr>
+        <p:txBody>
+          <a:bodyPr wrap="square" lIns="45720" tIns="0" rIns="45720" bIns="0" rtlCol="0" anchor="ctr"/>
+          <a:lstStyle/>
+          <a:p>
+            <a:pPr marL="0" indent="0" algn="ctr">
+              <a:buNone/>
+            </a:pPr>
+            <a:r>
+              <a:rPr lang="id-ID" sz="1000" b="1" dirty="0">
+                <a:solidFill>
+                  <a:srgbClr val="12302B"/>
+                </a:solidFill>
+                <a:latin typeface="Calibri" pitchFamily="34" charset="0"/>
+                <a:ea typeface="Calibri" pitchFamily="34" charset="-122"/>
+                <a:cs typeface="Calibri" pitchFamily="34" charset="-120"/>
+              </a:rPr>
+              <a:t>Papan logika (emas, timah)</a:t>
+            </a:r>
+          </a:p>
+        </p:txBody>
+      </p:sp>
+      <p:cxnSp>
+        <p:nvCxnSpPr>
+          <p:cNvPr id="290" name="ke Papan logika (emas, timah)"/>
+          <p:cNvCxnSpPr/>
+          <p:nvPr/>
+        </p:nvCxnSpPr>
+        <p:spPr>
+          <a:xfrm>
+            <a:off x="7989184" y="3115818"/>
+            <a:ext cx="1034806" cy="440055"/>
+          </a:xfrm>
+          <a:prstGeom prst="straightConnector1">
+            <a:avLst/>
+          </a:prstGeom>
+          <a:ln w="12700">
+            <a:solidFill>
+              <a:srgbClr val="1F6F5C"/>
+            </a:solidFill>
+            <a:tailEnd type="triangle"/>
+          </a:ln>
+        </p:spPr>
+      </p:cxnSp>
+      <p:sp>
+        <p:nvSpPr>
+          <p:cNvPr id="291" name="Judul Sesudah — usulan"/>
+          <p:cNvSpPr txBox="1"/>
+          <p:nvPr/>
+        </p:nvSpPr>
+        <p:spPr>
+          <a:xfrm>
+            <a:off x="6576060" y="4023360"/>
+            <a:ext cx="4975860" cy="320040"/>
+          </a:xfrm>
+          <a:prstGeom prst="rect">
+            <a:avLst/>
+          </a:prstGeom>
+          <a:noFill/>
+          <a:ln/>
+        </p:spPr>
+        <p:txBody>
+          <a:bodyPr wrap="square" lIns="0" tIns="0" rIns="0" bIns="0" rtlCol="0" anchor="t"/>
+          <a:lstStyle/>
+          <a:p>
             <a:pPr marL="0" indent="0" algn="l">
-              <a:spcAft>
-                <a:spcPts val="600"/>
-              </a:spcAft>
-              <a:buNone/>
-            </a:pPr>
-            <a:r>
-              <a:rPr lang="id-ID" sz="2000" b="1" dirty="0">
+              <a:buNone/>
+            </a:pPr>
+            <a:r>
+              <a:rPr lang="id-ID" sz="1600" b="1" dirty="0">
                 <a:solidFill>
                   <a:srgbClr val="1F6F5C"/>
                 </a:solidFill>
@@ -3198,37 +5205,21 @@
                 <a:ea typeface="Cambria" pitchFamily="34" charset="-122"/>
                 <a:cs typeface="Cambria" pitchFamily="34" charset="-120"/>
               </a:rPr>
-              <a:t>Sesudah</a:t>
-            </a:r>
-          </a:p>
-          <a:p>
-            <a:pPr marL="0" indent="0" algn="l">
-              <a:buNone/>
-            </a:pPr>
-            <a:r>
-              <a:rPr lang="id-ID" sz="1600" dirty="0">
-                <a:solidFill>
-                  <a:srgbClr val="12302B"/>
-                </a:solidFill>
-                <a:latin typeface="Calibri" pitchFamily="34" charset="0"/>
-                <a:ea typeface="Calibri" pitchFamily="34" charset="-122"/>
-                <a:cs typeface="Calibri" pitchFamily="34" charset="-120"/>
-              </a:rPr>
-              <a:t>Setiap unit membawa paspor digital: mitra pemulihan memindai QR untuk melihat komposisi dan urutan bongkar, sehingga pemisahan lebih cepat dan material lebih murni.</a:t>
-            </a:r>
-          </a:p>
-        </p:txBody>
-      </p:sp>
-      <p:sp>
-        <p:nvSpPr>
-          <p:cNvPr id="121" name="Strategi"/>
+              <a:t>Sesudah — usulan</a:t>
+            </a:r>
+          </a:p>
+        </p:txBody>
+      </p:sp>
+      <p:sp>
+        <p:nvSpPr>
+          <p:cNvPr id="292" name="Poin Sesudah — usulan"/>
           <p:cNvSpPr txBox="1"/>
           <p:nvPr/>
         </p:nvSpPr>
         <p:spPr>
           <a:xfrm>
-            <a:off x="457200" y="5669280"/>
-            <a:ext cx="11277600" cy="457200"/>
+            <a:off x="6576060" y="4389120"/>
+            <a:ext cx="4975860" cy="1874520"/>
           </a:xfrm>
           <a:prstGeom prst="rect">
             <a:avLst/>
@@ -3237,36 +5228,1079 @@
           <a:ln/>
         </p:spPr>
         <p:txBody>
+          <a:bodyPr wrap="square" lIns="0" tIns="0" rIns="0" bIns="0" rtlCol="0" anchor="t"/>
+          <a:lstStyle/>
+          <a:p>
+            <a:pPr marL="228600" indent="-228600" algn="l">
+              <a:spcAft>
+                <a:spcPts val="200"/>
+              </a:spcAft>
+              <a:buFont typeface="Arial"/>
+              <a:buChar char="•"/>
+            </a:pPr>
+            <a:r>
+              <a:rPr lang="id-ID" sz="1200" dirty="0">
+                <a:solidFill>
+                  <a:srgbClr val="12302B"/>
+                </a:solidFill>
+                <a:latin typeface="Calibri" pitchFamily="34" charset="0"/>
+                <a:ea typeface="Calibri" pitchFamily="34" charset="-122"/>
+                <a:cs typeface="Calibri" pitchFamily="34" charset="-120"/>
+              </a:rPr>
+              <a:t>Setiap unit membawa paspor digital (QR) berisi komposisi dan urutan bongkar.</a:t>
+            </a:r>
+          </a:p>
+          <a:p>
+            <a:pPr marL="228600" indent="-228600" algn="l">
+              <a:spcAft>
+                <a:spcPts val="200"/>
+              </a:spcAft>
+              <a:buFont typeface="Arial"/>
+              <a:buChar char="•"/>
+            </a:pPr>
+            <a:r>
+              <a:rPr lang="id-ID" sz="1200" dirty="0">
+                <a:solidFill>
+                  <a:srgbClr val="12302B"/>
+                </a:solidFill>
+                <a:latin typeface="Calibri" pitchFamily="34" charset="0"/>
+                <a:ea typeface="Calibri" pitchFamily="34" charset="-122"/>
+                <a:cs typeface="Calibri" pitchFamily="34" charset="-120"/>
+              </a:rPr>
+              <a:t>Mitra pemulihan memilah modul untuk pakai ulang, perbaikan, atau daur ulang.</a:t>
+            </a:r>
+          </a:p>
+          <a:p>
+            <a:pPr marL="228600" indent="-228600" algn="l">
+              <a:spcAft>
+                <a:spcPts val="200"/>
+              </a:spcAft>
+              <a:buFont typeface="Arial"/>
+              <a:buChar char="•"/>
+            </a:pPr>
+            <a:r>
+              <a:rPr lang="id-ID" sz="1200" dirty="0">
+                <a:solidFill>
+                  <a:srgbClr val="12302B"/>
+                </a:solidFill>
+                <a:latin typeface="Calibri" pitchFamily="34" charset="0"/>
+                <a:ea typeface="Calibri" pitchFamily="34" charset="-122"/>
+                <a:cs typeface="Calibri" pitchFamily="34" charset="-120"/>
+              </a:rPr>
+              <a:t>Dihubungkan dengan program pengembalian di pasar berkembang, termasuk Indonesia.</a:t>
+            </a:r>
+          </a:p>
+          <a:p>
+            <a:pPr marL="228600" indent="-228600" algn="l">
+              <a:spcAft>
+                <a:spcPts val="200"/>
+              </a:spcAft>
+              <a:buFont typeface="Arial"/>
+              <a:buChar char="•"/>
+            </a:pPr>
+            <a:r>
+              <a:rPr lang="id-ID" sz="1200" dirty="0">
+                <a:solidFill>
+                  <a:srgbClr val="12302B"/>
+                </a:solidFill>
+                <a:latin typeface="Calibri" pitchFamily="34" charset="0"/>
+                <a:ea typeface="Calibri" pitchFamily="34" charset="-122"/>
+                <a:cs typeface="Calibri" pitchFamily="34" charset="-120"/>
+              </a:rPr>
+              <a:t>Dievaluasi dengan KPI yang ditetapkan sebelum uji coba: tingkat pengumpulan per negara dan kemurnian material.</a:t>
+            </a:r>
+          </a:p>
+        </p:txBody>
+      </p:sp>
+      <p:sp>
+        <p:nvSpPr>
+          <p:cNvPr id="293" name="Panah"/>
+          <p:cNvSpPr/>
+          <p:nvPr/>
+        </p:nvSpPr>
+        <p:spPr>
+          <a:xfrm>
+            <a:off x="5890260" y="4069080"/>
+            <a:ext cx="411480" cy="365760"/>
+          </a:xfrm>
+          <a:prstGeom prst="rightArrow">
+            <a:avLst/>
+          </a:prstGeom>
+          <a:solidFill>
+            <a:srgbClr val="1F6F5C"/>
+          </a:solidFill>
+          <a:ln>
+            <a:noFill/>
+          </a:ln>
+        </p:spPr>
+      </p:sp>
+    </p:spTree>
+  </p:cSld>
+  <p:clrMapOvr>
+    <a:masterClrMapping/>
+  </p:clrMapOvr>
+</p:sld>
+</file>
+
+<file path=ppt/slides/slide12.xml><?xml version="1.0" encoding="utf-8"?>
+<p:sld xmlns:a="http://schemas.openxmlformats.org/drawingml/2006/main" xmlns:r="http://schemas.openxmlformats.org/officeDocument/2006/relationships" xmlns:p="http://schemas.openxmlformats.org/presentationml/2006/main">
+  <p:cSld name="Slide 6">
+    <p:bg>
+      <p:bgPr>
+        <a:solidFill>
+          <a:srgbClr val="F4F8F6"/>
+        </a:solidFill>
+        <a:effectLst/>
+      </p:bgPr>
+    </p:bg>
+    <p:spTree>
+      <p:nvGrpSpPr>
+        <p:cNvPr id="1" name=""/>
+        <p:cNvGrpSpPr/>
+        <p:nvPr/>
+      </p:nvGrpSpPr>
+      <p:grpSpPr>
+        <a:xfrm>
+          <a:off x="0" y="0"/>
+          <a:ext cx="0" cy="0"/>
+          <a:chOff x="0" y="0"/>
+          <a:chExt cx="0" cy="0"/>
+        </a:xfrm>
+      </p:grpSpPr>
+      <p:sp>
+        <p:nvSpPr>
+          <p:cNvPr id="2" name="badge"/>
+          <p:cNvSpPr/>
+          <p:nvPr/>
+        </p:nvSpPr>
+        <p:spPr>
+          <a:xfrm>
+            <a:off x="457200" y="384048"/>
+            <a:ext cx="566928" cy="566928"/>
+          </a:xfrm>
+          <a:prstGeom prst="ellipse">
+            <a:avLst/>
+          </a:prstGeom>
+          <a:solidFill>
+            <a:srgbClr val="1F6F5C"/>
+          </a:solidFill>
+          <a:ln w="12700">
+            <a:solidFill>
+              <a:srgbClr val="1F6F5C"/>
+            </a:solidFill>
+            <a:prstDash val="solid"/>
+          </a:ln>
+        </p:spPr>
+      </p:sp>
+      <p:sp>
+        <p:nvSpPr>
+          <p:cNvPr id="3" name="Text 1"/>
+          <p:cNvSpPr txBox="1"/>
+          <p:nvPr/>
+        </p:nvSpPr>
+        <p:spPr>
+          <a:xfrm>
+            <a:off x="457200" y="384048"/>
+            <a:ext cx="566928" cy="566928"/>
+          </a:xfrm>
+          <a:prstGeom prst="rect">
+            <a:avLst/>
+          </a:prstGeom>
+          <a:noFill/>
+          <a:ln/>
+        </p:spPr>
+        <p:txBody>
           <a:bodyPr wrap="square" lIns="0" tIns="0" rIns="0" bIns="0" rtlCol="0" anchor="ctr"/>
           <a:lstStyle/>
           <a:p>
+            <a:pPr marL="0" indent="0" algn="ctr">
+              <a:buNone/>
+            </a:pPr>
+            <a:r>
+              <a:rPr lang="en-US" sz="2000" b="1" dirty="0">
+                <a:solidFill>
+                  <a:srgbClr val="FFFFFF"/>
+                </a:solidFill>
+                <a:latin typeface="Cambria" pitchFamily="34" charset="0"/>
+                <a:ea typeface="Cambria" pitchFamily="34" charset="-122"/>
+                <a:cs typeface="Cambria" pitchFamily="34" charset="-120"/>
+              </a:rPr>
+              <a:t>2.1</a:t>
+            </a:r>
+            <a:endParaRPr lang="en-US" sz="2000" dirty="0"/>
+          </a:p>
+        </p:txBody>
+      </p:sp>
+      <p:sp>
+        <p:nvSpPr>
+          <p:cNvPr id="4" name="Text 2"/>
+          <p:cNvSpPr txBox="1"/>
+          <p:nvPr/>
+        </p:nvSpPr>
+        <p:spPr>
+          <a:xfrm>
+            <a:off x="1188720" y="292608"/>
+            <a:ext cx="9692640" cy="457200"/>
+          </a:xfrm>
+          <a:prstGeom prst="rect">
+            <a:avLst/>
+          </a:prstGeom>
+          <a:noFill/>
+          <a:ln/>
+        </p:spPr>
+        <p:txBody>
+          <a:bodyPr wrap="square" lIns="0" tIns="0" rIns="0" bIns="0" rtlCol="0" anchor="ctr"/>
+          <a:lstStyle/>
+          <a:p>
+            <a:pPr marL="0" indent="0">
+              <a:buNone/>
+            </a:pPr>
+            <a:r>
+              <a:rPr lang="en-US" sz="3000" b="1" dirty="0" err="1">
+                <a:solidFill>
+                  <a:srgbClr val="12302B"/>
+                </a:solidFill>
+                <a:latin typeface="Cambria" pitchFamily="34" charset="0"/>
+                <a:ea typeface="Cambria" pitchFamily="34" charset="-122"/>
+                <a:cs typeface="Cambria" pitchFamily="34" charset="-120"/>
+              </a:rPr>
+              <a:t>Landasan bukti: laporan Apple, jurnal, regulasi</a:t>
+            </a:r>
+            <a:endParaRPr lang="en-US" sz="3000" dirty="0"/>
+          </a:p>
+        </p:txBody>
+      </p:sp>
+      <p:sp>
+        <p:nvSpPr>
+          <p:cNvPr id="5" name="Text 3"/>
+          <p:cNvSpPr txBox="1"/>
+          <p:nvPr/>
+        </p:nvSpPr>
+        <p:spPr>
+          <a:xfrm>
+            <a:off x="1188720" y="768096"/>
+            <a:ext cx="10424160" cy="292608"/>
+          </a:xfrm>
+          <a:prstGeom prst="rect">
+            <a:avLst/>
+          </a:prstGeom>
+          <a:noFill/>
+          <a:ln/>
+        </p:spPr>
+        <p:txBody>
+          <a:bodyPr wrap="square" lIns="0" tIns="0" rIns="0" bIns="0" rtlCol="0" anchor="t"/>
+          <a:lstStyle/>
+          <a:p>
+            <a:pPr marL="0" indent="0">
+              <a:buNone/>
+            </a:pPr>
+            <a:r>
+              <a:rPr lang="en-US" sz="1400" i="1" dirty="0">
+                <a:solidFill>
+                  <a:srgbClr val="5B6B68"/>
+                </a:solidFill>
+                <a:latin typeface="Calibri" pitchFamily="34" charset="0"/>
+                <a:ea typeface="Calibri" pitchFamily="34" charset="-122"/>
+                <a:cs typeface="Calibri" pitchFamily="34" charset="-120"/>
+              </a:rPr>
+              <a:t>Setiap klaim di audit merujuk ke salah satu sumber berikut; angka dibaca apa adanya, tidak diolah ulang kecuali disebut</a:t>
+            </a:r>
+            <a:endParaRPr lang="en-US" sz="1400" dirty="0"/>
+          </a:p>
+        </p:txBody>
+      </p:sp>
+      <p:sp>
+        <p:nvSpPr>
+          <p:cNvPr id="30" name="Text 27"/>
+          <p:cNvSpPr txBox="1"/>
+          <p:nvPr/>
+        </p:nvSpPr>
+        <p:spPr>
+          <a:xfrm>
+            <a:off x="11247120" y="6473952"/>
+            <a:ext cx="457200" cy="228600"/>
+          </a:xfrm>
+          <a:prstGeom prst="rect">
+            <a:avLst/>
+          </a:prstGeom>
+          <a:noFill/>
+          <a:ln/>
+        </p:spPr>
+        <p:txBody>
+          <a:bodyPr wrap="square" lIns="0" tIns="0" rIns="0" bIns="0" rtlCol="0" anchor="t"/>
+          <a:lstStyle/>
+          <a:p>
+            <a:pPr marL="0" indent="0" algn="r">
+              <a:buNone/>
+            </a:pPr>
+            <a:r>
+              <a:rPr lang="en-US" sz="1000" dirty="0">
+                <a:solidFill>
+                  <a:srgbClr val="5B6B68"/>
+                </a:solidFill>
+                <a:latin typeface="Calibri" pitchFamily="34" charset="0"/>
+                <a:ea typeface="Calibri" pitchFamily="34" charset="-122"/>
+                <a:cs typeface="Calibri" pitchFamily="34" charset="-120"/>
+              </a:rPr>
+              <a:t>4</a:t>
+            </a:r>
+            <a:endParaRPr lang="en-US" sz="1000" dirty="0"/>
+          </a:p>
+        </p:txBody>
+      </p:sp>
+      <p:sp>
+        <p:nvSpPr>
+          <p:cNvPr id="294" name="Kolom Laporan resmi Apple"/>
+          <p:cNvSpPr/>
+          <p:nvPr/>
+        </p:nvSpPr>
+        <p:spPr>
+          <a:xfrm>
+            <a:off x="457200" y="1188720"/>
+            <a:ext cx="3637280" cy="5029200"/>
+          </a:xfrm>
+          <a:prstGeom prst="roundRect">
+            <a:avLst>
+              <a:gd name="adj" fmla="val 6452"/>
+            </a:avLst>
+          </a:prstGeom>
+          <a:solidFill>
+            <a:srgbClr val="FFFFFF"/>
+          </a:solidFill>
+          <a:ln w="9525">
+            <a:solidFill>
+              <a:srgbClr val="D5E2DD"/>
+            </a:solidFill>
+          </a:ln>
+          <a:effectLst>
+            <a:outerShdw blurRad="76200" dist="25400" dir="5400000" algn="bl" rotWithShape="0">
+              <a:srgbClr val="000000">
+                <a:alpha val="12000"/>
+              </a:srgbClr>
+            </a:outerShdw>
+          </a:effectLst>
+        </p:spPr>
+      </p:sp>
+      <p:sp>
+        <p:nvSpPr>
+          <p:cNvPr id="295" name="Tag Laporan resmi Apple"/>
+          <p:cNvSpPr/>
+          <p:nvPr/>
+        </p:nvSpPr>
+        <p:spPr>
+          <a:xfrm>
+            <a:off x="594360" y="1325880"/>
+            <a:ext cx="3362960" cy="320040"/>
+          </a:xfrm>
+          <a:prstGeom prst="roundRect">
+            <a:avLst/>
+          </a:prstGeom>
+          <a:solidFill>
+            <a:srgbClr val="1F6F5C"/>
+          </a:solidFill>
+          <a:ln>
+            <a:noFill/>
+          </a:ln>
+        </p:spPr>
+        <p:txBody>
+          <a:bodyPr wrap="square" lIns="45720" tIns="0" rIns="45720" bIns="0" rtlCol="0" anchor="ctr"/>
+          <a:lstStyle/>
+          <a:p>
+            <a:pPr marL="0" indent="0" algn="ctr">
+              <a:buNone/>
+            </a:pPr>
+            <a:r>
+              <a:rPr lang="id-ID" sz="1300" b="1" dirty="0">
+                <a:solidFill>
+                  <a:srgbClr val="FFFFFF"/>
+                </a:solidFill>
+                <a:latin typeface="Calibri" pitchFamily="34" charset="0"/>
+                <a:ea typeface="Calibri" pitchFamily="34" charset="-122"/>
+                <a:cs typeface="Calibri" pitchFamily="34" charset="-120"/>
+              </a:rPr>
+              <a:t>Laporan resmi Apple</a:t>
+            </a:r>
+          </a:p>
+        </p:txBody>
+      </p:sp>
+      <p:sp>
+        <p:nvSpPr>
+          <p:cNvPr id="296" name="Isi Laporan resmi Apple"/>
+          <p:cNvSpPr txBox="1"/>
+          <p:nvPr/>
+        </p:nvSpPr>
+        <p:spPr>
+          <a:xfrm>
+            <a:off x="640080" y="1783080"/>
+            <a:ext cx="3271520" cy="4343400"/>
+          </a:xfrm>
+          <a:prstGeom prst="rect">
+            <a:avLst/>
+          </a:prstGeom>
+          <a:noFill/>
+          <a:ln/>
+        </p:spPr>
+        <p:txBody>
+          <a:bodyPr wrap="square" lIns="0" tIns="0" rIns="0" bIns="0" rtlCol="0" anchor="t"/>
+          <a:lstStyle/>
+          <a:p>
             <a:pPr marL="0" indent="0" algn="l">
+              <a:spcAft>
+                <a:spcPts val="900"/>
+              </a:spcAft>
+              <a:buNone/>
+            </a:pPr>
+            <a:r>
+              <a:rPr lang="id-ID" sz="1250" b="1" dirty="0">
+                <a:solidFill>
+                  <a:srgbClr val="12302B"/>
+                </a:solidFill>
+                <a:latin typeface="Calibri" pitchFamily="34" charset="0"/>
+                <a:ea typeface="Calibri" pitchFamily="34" charset="-122"/>
+                <a:cs typeface="Calibri" pitchFamily="34" charset="-120"/>
+              </a:rPr>
+              <a:t>Apple (2024a), PER iPhone 16 dan 16 Plus. </a:t>
+            </a:r>
+            <a:r>
+              <a:rPr lang="id-ID" sz="1250" dirty="0">
+                <a:solidFill>
+                  <a:srgbClr val="1B2B2A"/>
+                </a:solidFill>
+                <a:latin typeface="Calibri" pitchFamily="34" charset="0"/>
+                <a:ea typeface="Calibri" pitchFamily="34" charset="-122"/>
+                <a:cs typeface="Calibri" pitchFamily="34" charset="-120"/>
+              </a:rPr>
+              <a:t>Jejak karbon 60 kg CO2e (16 Plus 128 GB): produksi 79%, pemakaian 18%, transportasi 4%, akhir masa pakai &lt;1%. Emisi turun 30% dari skenario business-as-usual: listrik rendah karbon pemasok 20%, aluminium daur ulang ±8%.</a:t>
+            </a:r>
+          </a:p>
+          <a:p>
+            <a:pPr marL="0" indent="0" algn="l">
+              <a:spcAft>
+                <a:spcPts val="900"/>
+              </a:spcAft>
+              <a:buNone/>
+            </a:pPr>
+            <a:r>
+              <a:rPr lang="id-ID" sz="1250" b="1" dirty="0">
+                <a:solidFill>
+                  <a:srgbClr val="12302B"/>
+                </a:solidFill>
+                <a:latin typeface="Calibri" pitchFamily="34" charset="0"/>
+                <a:ea typeface="Calibri" pitchFamily="34" charset="-122"/>
+                <a:cs typeface="Calibri" pitchFamily="34" charset="-120"/>
+              </a:rPr>
+              <a:t>Apple (2026), Environmental Progress Report. </a:t>
+            </a:r>
+            <a:r>
+              <a:rPr lang="id-ID" sz="1250" dirty="0">
+                <a:solidFill>
+                  <a:srgbClr val="1B2B2A"/>
+                </a:solidFill>
+                <a:latin typeface="Calibri" pitchFamily="34" charset="0"/>
+                <a:ea typeface="Calibri" pitchFamily="34" charset="-122"/>
+                <a:cs typeface="Calibri" pitchFamily="34" charset="-120"/>
+              </a:rPr>
+              <a:t>30% material daur ulang lintas produk (2025); 100% kobalt daur ulang di baterai rancangan Apple; robot Daisy membongkar 36 model iPhone.</a:t>
+            </a:r>
+          </a:p>
+          <a:p>
+            <a:pPr marL="0" indent="0" algn="l">
+              <a:spcAft>
+                <a:spcPts val="900"/>
+              </a:spcAft>
+              <a:buNone/>
+            </a:pPr>
+            <a:r>
+              <a:rPr lang="id-ID" sz="1250" b="1" dirty="0">
+                <a:solidFill>
+                  <a:srgbClr val="12302B"/>
+                </a:solidFill>
+                <a:latin typeface="Calibri" pitchFamily="34" charset="0"/>
+                <a:ea typeface="Calibri" pitchFamily="34" charset="-122"/>
+                <a:cs typeface="Calibri" pitchFamily="34" charset="-120"/>
+              </a:rPr>
+              <a:t>Apple (2024b), pernyataan PSTI Inggris. </a:t>
+            </a:r>
+            <a:r>
+              <a:rPr lang="id-ID" sz="1250" dirty="0">
+                <a:solidFill>
+                  <a:srgbClr val="1B2B2A"/>
+                </a:solidFill>
+                <a:latin typeface="Calibri" pitchFamily="34" charset="0"/>
+                <a:ea typeface="Calibri" pitchFamily="34" charset="-122"/>
+                <a:cs typeface="Calibri" pitchFamily="34" charset="-120"/>
+              </a:rPr>
+              <a:t>Pembaruan keamanan minimal 5 tahun sejak tanggal penjualan pertama.</a:t>
+            </a:r>
+          </a:p>
+        </p:txBody>
+      </p:sp>
+      <p:sp>
+        <p:nvSpPr>
+          <p:cNvPr id="297" name="Kolom Jurnal ilmiah"/>
+          <p:cNvSpPr/>
+          <p:nvPr/>
+        </p:nvSpPr>
+        <p:spPr>
+          <a:xfrm>
+            <a:off x="4277360" y="1188720"/>
+            <a:ext cx="3637280" cy="5029200"/>
+          </a:xfrm>
+          <a:prstGeom prst="roundRect">
+            <a:avLst>
+              <a:gd name="adj" fmla="val 6452"/>
+            </a:avLst>
+          </a:prstGeom>
+          <a:solidFill>
+            <a:srgbClr val="FFFFFF"/>
+          </a:solidFill>
+          <a:ln w="9525">
+            <a:solidFill>
+              <a:srgbClr val="D5E2DD"/>
+            </a:solidFill>
+          </a:ln>
+          <a:effectLst>
+            <a:outerShdw blurRad="76200" dist="25400" dir="5400000" algn="bl" rotWithShape="0">
+              <a:srgbClr val="000000">
+                <a:alpha val="12000"/>
+              </a:srgbClr>
+            </a:outerShdw>
+          </a:effectLst>
+        </p:spPr>
+      </p:sp>
+      <p:sp>
+        <p:nvSpPr>
+          <p:cNvPr id="298" name="Tag Jurnal ilmiah"/>
+          <p:cNvSpPr/>
+          <p:nvPr/>
+        </p:nvSpPr>
+        <p:spPr>
+          <a:xfrm>
+            <a:off x="4414520" y="1325880"/>
+            <a:ext cx="3362960" cy="320040"/>
+          </a:xfrm>
+          <a:prstGeom prst="roundRect">
+            <a:avLst/>
+          </a:prstGeom>
+          <a:solidFill>
+            <a:srgbClr val="B5651D"/>
+          </a:solidFill>
+          <a:ln>
+            <a:noFill/>
+          </a:ln>
+        </p:spPr>
+        <p:txBody>
+          <a:bodyPr wrap="square" lIns="45720" tIns="0" rIns="45720" bIns="0" rtlCol="0" anchor="ctr"/>
+          <a:lstStyle/>
+          <a:p>
+            <a:pPr marL="0" indent="0" algn="ctr">
               <a:buNone/>
             </a:pPr>
             <a:r>
               <a:rPr lang="id-ID" sz="1300" b="1" dirty="0">
                 <a:solidFill>
-                  <a:srgbClr val="B5651D"/>
-                </a:solidFill>
-                <a:latin typeface="Calibri" pitchFamily="34" charset="0"/>
-                <a:ea typeface="Calibri" pitchFamily="34" charset="-122"/>
-                <a:cs typeface="Calibri" pitchFamily="34" charset="-120"/>
-              </a:rPr>
-              <a:t>Strategi: </a:t>
-            </a:r>
+                  <a:srgbClr val="FFFFFF"/>
+                </a:solidFill>
+                <a:latin typeface="Calibri" pitchFamily="34" charset="0"/>
+                <a:ea typeface="Calibri" pitchFamily="34" charset="-122"/>
+                <a:cs typeface="Calibri" pitchFamily="34" charset="-120"/>
+              </a:rPr>
+              <a:t>Jurnal ilmiah</a:t>
+            </a:r>
+          </a:p>
+        </p:txBody>
+      </p:sp>
+      <p:sp>
+        <p:nvSpPr>
+          <p:cNvPr id="299" name="Isi Jurnal ilmiah"/>
+          <p:cNvSpPr txBox="1"/>
+          <p:nvPr/>
+        </p:nvSpPr>
+        <p:spPr>
+          <a:xfrm>
+            <a:off x="4460240" y="1783080"/>
+            <a:ext cx="3271520" cy="4343400"/>
+          </a:xfrm>
+          <a:prstGeom prst="rect">
+            <a:avLst/>
+          </a:prstGeom>
+          <a:noFill/>
+          <a:ln/>
+        </p:spPr>
+        <p:txBody>
+          <a:bodyPr wrap="square" lIns="0" tIns="0" rIns="0" bIns="0" rtlCol="0" anchor="t"/>
+          <a:lstStyle/>
+          <a:p>
+            <a:pPr marL="0" indent="0" algn="l">
+              <a:spcAft>
+                <a:spcPts val="900"/>
+              </a:spcAft>
+              <a:buNone/>
+            </a:pPr>
+            <a:r>
+              <a:rPr lang="id-ID" sz="1250" b="1" dirty="0">
+                <a:solidFill>
+                  <a:srgbClr val="12302B"/>
+                </a:solidFill>
+                <a:latin typeface="Calibri" pitchFamily="34" charset="0"/>
+                <a:ea typeface="Calibri" pitchFamily="34" charset="-122"/>
+                <a:cs typeface="Calibri" pitchFamily="34" charset="-120"/>
+              </a:rPr>
+              <a:t>Cordella dkk. (2021), J. Clean. Prod. </a:t>
+            </a:r>
+            <a:r>
+              <a:rPr lang="id-ID" sz="1250" dirty="0">
+                <a:solidFill>
+                  <a:srgbClr val="1B2B2A"/>
+                </a:solidFill>
+                <a:latin typeface="Calibri" pitchFamily="34" charset="0"/>
+                <a:ea typeface="Calibri" pitchFamily="34" charset="-122"/>
+                <a:cs typeface="Calibri" pitchFamily="34" charset="-120"/>
+              </a:rPr>
+              <a:t>Layar, baterai, penutup belakang, dan perangkat lunak adalah titik kritis daya tahan; keandalan dan reparabilitas dapat dicapai bersamaan.</a:t>
+            </a:r>
+          </a:p>
+          <a:p>
+            <a:pPr marL="0" indent="0" algn="l">
+              <a:spcAft>
+                <a:spcPts val="900"/>
+              </a:spcAft>
+              <a:buNone/>
+            </a:pPr>
+            <a:r>
+              <a:rPr lang="id-ID" sz="1250" b="1" dirty="0">
+                <a:solidFill>
+                  <a:srgbClr val="12302B"/>
+                </a:solidFill>
+                <a:latin typeface="Calibri" pitchFamily="34" charset="0"/>
+                <a:ea typeface="Calibri" pitchFamily="34" charset="-122"/>
+                <a:cs typeface="Calibri" pitchFamily="34" charset="-120"/>
+              </a:rPr>
+              <a:t>Makov dan Fitzpatrick (2021), J. Clean. Prod. </a:t>
+            </a:r>
+            <a:r>
+              <a:rPr lang="id-ID" sz="1250" dirty="0">
+                <a:solidFill>
+                  <a:srgbClr val="1B2B2A"/>
+                </a:solidFill>
+                <a:latin typeface="Calibri" pitchFamily="34" charset="0"/>
+                <a:ea typeface="Calibri" pitchFamily="34" charset="-122"/>
+                <a:cs typeface="Calibri" pitchFamily="34" charset="-120"/>
+              </a:rPr>
+              <a:t>Kinerja 3,5 juta iPhone stabil dari waktu ke waktu, tetapi minat reparasi turun eksponensial: reparabilitas saja tidak cukup.</a:t>
+            </a:r>
+          </a:p>
+          <a:p>
+            <a:pPr marL="0" indent="0" algn="l">
+              <a:spcAft>
+                <a:spcPts val="900"/>
+              </a:spcAft>
+              <a:buNone/>
+            </a:pPr>
+            <a:r>
+              <a:rPr lang="id-ID" sz="1250" b="1" dirty="0">
+                <a:solidFill>
+                  <a:srgbClr val="12302B"/>
+                </a:solidFill>
+                <a:latin typeface="Calibri" pitchFamily="34" charset="0"/>
+                <a:ea typeface="Calibri" pitchFamily="34" charset="-122"/>
+                <a:cs typeface="Calibri" pitchFamily="34" charset="-120"/>
+              </a:rPr>
+              <a:t>Proske dan Jaeger-Erben (2019), J. Clean. Prod. </a:t>
+            </a:r>
+            <a:r>
+              <a:rPr lang="id-ID" sz="1250" dirty="0">
+                <a:solidFill>
+                  <a:srgbClr val="1B2B2A"/>
+                </a:solidFill>
+                <a:latin typeface="Calibri" pitchFamily="34" charset="0"/>
+                <a:ea typeface="Calibri" pitchFamily="34" charset="-122"/>
+                <a:cs typeface="Calibri" pitchFamily="34" charset="-120"/>
+              </a:rPr>
+              <a:t>Modularitas tidak otomatis memperpanjang umur pakai; umur pakai terkait fungsi dan makna simbolik.</a:t>
+            </a:r>
+          </a:p>
+          <a:p>
+            <a:pPr marL="0" indent="0" algn="l">
+              <a:spcAft>
+                <a:spcPts val="900"/>
+              </a:spcAft>
+              <a:buNone/>
+            </a:pPr>
+            <a:r>
+              <a:rPr lang="id-ID" sz="1250" b="1" dirty="0">
+                <a:solidFill>
+                  <a:srgbClr val="12302B"/>
+                </a:solidFill>
+                <a:latin typeface="Calibri" pitchFamily="34" charset="0"/>
+                <a:ea typeface="Calibri" pitchFamily="34" charset="-122"/>
+                <a:cs typeface="Calibri" pitchFamily="34" charset="-120"/>
+              </a:rPr>
+              <a:t>Zink dan Geyer (2017), J. Ind. Ecol. </a:t>
+            </a:r>
+            <a:r>
+              <a:rPr lang="id-ID" sz="1250" dirty="0">
+                <a:solidFill>
+                  <a:srgbClr val="1B2B2A"/>
+                </a:solidFill>
+                <a:latin typeface="Calibri" pitchFamily="34" charset="0"/>
+                <a:ea typeface="Calibri" pitchFamily="34" charset="-122"/>
+                <a:cs typeface="Calibri" pitchFamily="34" charset="-120"/>
+              </a:rPr>
+              <a:t>Ekonomi sirkular dapat memicu rebound produksi.</a:t>
+            </a:r>
+          </a:p>
+        </p:txBody>
+      </p:sp>
+      <p:sp>
+        <p:nvSpPr>
+          <p:cNvPr id="300" name="Kolom Regulasi dan data independen"/>
+          <p:cNvSpPr/>
+          <p:nvPr/>
+        </p:nvSpPr>
+        <p:spPr>
+          <a:xfrm>
+            <a:off x="8097520" y="1188720"/>
+            <a:ext cx="3637280" cy="5029200"/>
+          </a:xfrm>
+          <a:prstGeom prst="roundRect">
+            <a:avLst>
+              <a:gd name="adj" fmla="val 6452"/>
+            </a:avLst>
+          </a:prstGeom>
+          <a:solidFill>
+            <a:srgbClr val="FFFFFF"/>
+          </a:solidFill>
+          <a:ln w="9525">
+            <a:solidFill>
+              <a:srgbClr val="D5E2DD"/>
+            </a:solidFill>
+          </a:ln>
+          <a:effectLst>
+            <a:outerShdw blurRad="76200" dist="25400" dir="5400000" algn="bl" rotWithShape="0">
+              <a:srgbClr val="000000">
+                <a:alpha val="12000"/>
+              </a:srgbClr>
+            </a:outerShdw>
+          </a:effectLst>
+        </p:spPr>
+      </p:sp>
+      <p:sp>
+        <p:nvSpPr>
+          <p:cNvPr id="301" name="Tag Regulasi dan data independen"/>
+          <p:cNvSpPr/>
+          <p:nvPr/>
+        </p:nvSpPr>
+        <p:spPr>
+          <a:xfrm>
+            <a:off x="8234680" y="1325880"/>
+            <a:ext cx="3362960" cy="320040"/>
+          </a:xfrm>
+          <a:prstGeom prst="roundRect">
+            <a:avLst/>
+          </a:prstGeom>
+          <a:solidFill>
+            <a:srgbClr val="12302B"/>
+          </a:solidFill>
+          <a:ln>
+            <a:noFill/>
+          </a:ln>
+        </p:spPr>
+        <p:txBody>
+          <a:bodyPr wrap="square" lIns="45720" tIns="0" rIns="45720" bIns="0" rtlCol="0" anchor="ctr"/>
+          <a:lstStyle/>
+          <a:p>
+            <a:pPr marL="0" indent="0" algn="ctr">
+              <a:buNone/>
+            </a:pPr>
             <a:r>
               <a:rPr lang="id-ID" sz="1300" b="1" dirty="0">
                 <a:solidFill>
-                  <a:srgbClr val="B5651D"/>
-                </a:solidFill>
-                <a:latin typeface="Calibri" pitchFamily="34" charset="0"/>
-                <a:ea typeface="Calibri" pitchFamily="34" charset="-122"/>
-                <a:cs typeface="Calibri" pitchFamily="34" charset="-120"/>
-              </a:rPr>
-              <a:t>menutup aliran (closing)</a:t>
-            </a:r>
-            <a:r>
-              <a:rPr lang="id-ID" sz="1300" b="1" dirty="0">
+                  <a:srgbClr val="FFFFFF"/>
+                </a:solidFill>
+                <a:latin typeface="Calibri" pitchFamily="34" charset="0"/>
+                <a:ea typeface="Calibri" pitchFamily="34" charset="-122"/>
+                <a:cs typeface="Calibri" pitchFamily="34" charset="-120"/>
+              </a:rPr>
+              <a:t>Regulasi dan data independen</a:t>
+            </a:r>
+          </a:p>
+        </p:txBody>
+      </p:sp>
+      <p:sp>
+        <p:nvSpPr>
+          <p:cNvPr id="302" name="Isi Regulasi dan data independen"/>
+          <p:cNvSpPr txBox="1"/>
+          <p:nvPr/>
+        </p:nvSpPr>
+        <p:spPr>
+          <a:xfrm>
+            <a:off x="8280400" y="1783080"/>
+            <a:ext cx="3271520" cy="4343400"/>
+          </a:xfrm>
+          <a:prstGeom prst="rect">
+            <a:avLst/>
+          </a:prstGeom>
+          <a:noFill/>
+          <a:ln/>
+        </p:spPr>
+        <p:txBody>
+          <a:bodyPr wrap="square" lIns="0" tIns="0" rIns="0" bIns="0" rtlCol="0" anchor="t"/>
+          <a:lstStyle/>
+          <a:p>
+            <a:pPr marL="0" indent="0" algn="l">
+              <a:spcAft>
+                <a:spcPts val="900"/>
+              </a:spcAft>
+              <a:buNone/>
+            </a:pPr>
+            <a:r>
+              <a:rPr lang="id-ID" sz="1250" b="1" dirty="0">
+                <a:solidFill>
+                  <a:srgbClr val="12302B"/>
+                </a:solidFill>
+                <a:latin typeface="Calibri" pitchFamily="34" charset="0"/>
+                <a:ea typeface="Calibri" pitchFamily="34" charset="-122"/>
+                <a:cs typeface="Calibri" pitchFamily="34" charset="-120"/>
+              </a:rPr>
+              <a:t>Regulasi (UE) 2023/1670. </a:t>
+            </a:r>
+            <a:r>
+              <a:rPr lang="id-ID" sz="1250" dirty="0">
+                <a:solidFill>
+                  <a:srgbClr val="1B2B2A"/>
+                </a:solidFill>
+                <a:latin typeface="Calibri" pitchFamily="34" charset="0"/>
+                <a:ea typeface="Calibri" pitchFamily="34" charset="-122"/>
+                <a:cs typeface="Calibri" pitchFamily="34" charset="-120"/>
+              </a:rPr>
+              <a:t>Mulai 20 Juni 2025: baterai ≥800 siklus pada 80%, suku cadang 7 tahun, pembaruan OS 5 tahun, label reparasi.</a:t>
+            </a:r>
+          </a:p>
+          <a:p>
+            <a:pPr marL="0" indent="0" algn="l">
+              <a:spcAft>
+                <a:spcPts val="900"/>
+              </a:spcAft>
+              <a:buNone/>
+            </a:pPr>
+            <a:r>
+              <a:rPr lang="id-ID" sz="1250" b="1" dirty="0">
+                <a:solidFill>
+                  <a:srgbClr val="12302B"/>
+                </a:solidFill>
+                <a:latin typeface="Calibri" pitchFamily="34" charset="0"/>
+                <a:ea typeface="Calibri" pitchFamily="34" charset="-122"/>
+                <a:cs typeface="Calibri" pitchFamily="34" charset="-120"/>
+              </a:rPr>
+              <a:t>ITU dan UNITAR (2024). </a:t>
+            </a:r>
+            <a:r>
+              <a:rPr lang="id-ID" sz="1250" dirty="0">
+                <a:solidFill>
+                  <a:srgbClr val="1B2B2A"/>
+                </a:solidFill>
+                <a:latin typeface="Calibri" pitchFamily="34" charset="0"/>
+                <a:ea typeface="Calibri" pitchFamily="34" charset="-122"/>
+                <a:cs typeface="Calibri" pitchFamily="34" charset="-120"/>
+              </a:rPr>
+              <a:t>62 miliar kg e-waste (2022); 22,3% terdokumentasi didaur ulang; Indonesia ±1,9 miliar kg.</a:t>
+            </a:r>
+          </a:p>
+          <a:p>
+            <a:pPr marL="0" indent="0" algn="l">
+              <a:spcAft>
+                <a:spcPts val="900"/>
+              </a:spcAft>
+              <a:buNone/>
+            </a:pPr>
+            <a:r>
+              <a:rPr lang="id-ID" sz="1250" b="1" dirty="0">
+                <a:solidFill>
+                  <a:srgbClr val="12302B"/>
+                </a:solidFill>
+                <a:latin typeface="Calibri" pitchFamily="34" charset="0"/>
+                <a:ea typeface="Calibri" pitchFamily="34" charset="-122"/>
+                <a:cs typeface="Calibri" pitchFamily="34" charset="-120"/>
+              </a:rPr>
+              <a:t>iFixit (2024). </a:t>
+            </a:r>
+            <a:r>
+              <a:rPr lang="id-ID" sz="1250" dirty="0">
+                <a:solidFill>
+                  <a:srgbClr val="1B2B2A"/>
+                </a:solidFill>
+                <a:latin typeface="Calibri" pitchFamily="34" charset="0"/>
+                <a:ea typeface="Calibri" pitchFamily="34" charset="-122"/>
+                <a:cs typeface="Calibri" pitchFamily="34" charset="-120"/>
+              </a:rPr>
+              <a:t>Skor reparabilitas iPhone 16 7/10 (sementara), naik dari 4/10 pada iPhone 15.</a:t>
+            </a:r>
+          </a:p>
+        </p:txBody>
+      </p:sp>
+    </p:spTree>
+  </p:cSld>
+  <p:clrMapOvr>
+    <a:masterClrMapping/>
+  </p:clrMapOvr>
+</p:sld>
+</file>
+
+<file path=ppt/slides/slide13.xml><?xml version="1.0" encoding="utf-8"?>
+<p:sld xmlns:a="http://schemas.openxmlformats.org/drawingml/2006/main" xmlns:r="http://schemas.openxmlformats.org/officeDocument/2006/relationships" xmlns:p="http://schemas.openxmlformats.org/presentationml/2006/main">
+  <p:cSld name="Slide 6">
+    <p:bg>
+      <p:bgPr>
+        <a:solidFill>
+          <a:srgbClr val="F4F8F6"/>
+        </a:solidFill>
+        <a:effectLst/>
+      </p:bgPr>
+    </p:bg>
+    <p:spTree>
+      <p:nvGrpSpPr>
+        <p:cNvPr id="1" name=""/>
+        <p:cNvGrpSpPr/>
+        <p:nvPr/>
+      </p:nvGrpSpPr>
+      <p:grpSpPr>
+        <a:xfrm>
+          <a:off x="0" y="0"/>
+          <a:ext cx="0" cy="0"/>
+          <a:chOff x="0" y="0"/>
+          <a:chExt cx="0" cy="0"/>
+        </a:xfrm>
+      </p:grpSpPr>
+      <p:sp>
+        <p:nvSpPr>
+          <p:cNvPr id="2" name="badge"/>
+          <p:cNvSpPr/>
+          <p:nvPr/>
+        </p:nvSpPr>
+        <p:spPr>
+          <a:xfrm>
+            <a:off x="457200" y="384048"/>
+            <a:ext cx="566928" cy="566928"/>
+          </a:xfrm>
+          <a:prstGeom prst="ellipse">
+            <a:avLst/>
+          </a:prstGeom>
+          <a:solidFill>
+            <a:srgbClr val="1F6F5C"/>
+          </a:solidFill>
+          <a:ln w="12700">
+            <a:solidFill>
+              <a:srgbClr val="1F6F5C"/>
+            </a:solidFill>
+            <a:prstDash val="solid"/>
+          </a:ln>
+        </p:spPr>
+      </p:sp>
+      <p:sp>
+        <p:nvSpPr>
+          <p:cNvPr id="3" name="Text 1"/>
+          <p:cNvSpPr txBox="1"/>
+          <p:nvPr/>
+        </p:nvSpPr>
+        <p:spPr>
+          <a:xfrm>
+            <a:off x="457200" y="384048"/>
+            <a:ext cx="566928" cy="566928"/>
+          </a:xfrm>
+          <a:prstGeom prst="rect">
+            <a:avLst/>
+          </a:prstGeom>
+          <a:noFill/>
+          <a:ln/>
+        </p:spPr>
+        <p:txBody>
+          <a:bodyPr wrap="square" lIns="0" tIns="0" rIns="0" bIns="0" rtlCol="0" anchor="ctr"/>
+          <a:lstStyle/>
+          <a:p>
+            <a:pPr marL="0" indent="0" algn="ctr">
+              <a:buNone/>
+            </a:pPr>
+            <a:r>
+              <a:rPr lang="en-US" sz="2000" b="1" dirty="0">
+                <a:solidFill>
+                  <a:srgbClr val="FFFFFF"/>
+                </a:solidFill>
+                <a:latin typeface="Cambria" pitchFamily="34" charset="0"/>
+                <a:ea typeface="Cambria" pitchFamily="34" charset="-122"/>
+                <a:cs typeface="Cambria" pitchFamily="34" charset="-120"/>
+              </a:rPr>
+              <a:t>4.1</a:t>
+            </a:r>
+            <a:endParaRPr lang="en-US" sz="2000" dirty="0"/>
+          </a:p>
+        </p:txBody>
+      </p:sp>
+      <p:sp>
+        <p:nvSpPr>
+          <p:cNvPr id="4" name="Text 2"/>
+          <p:cNvSpPr txBox="1"/>
+          <p:nvPr/>
+        </p:nvSpPr>
+        <p:spPr>
+          <a:xfrm>
+            <a:off x="1188720" y="292608"/>
+            <a:ext cx="9692640" cy="457200"/>
+          </a:xfrm>
+          <a:prstGeom prst="rect">
+            <a:avLst/>
+          </a:prstGeom>
+          <a:noFill/>
+          <a:ln/>
+        </p:spPr>
+        <p:txBody>
+          <a:bodyPr wrap="square" lIns="0" tIns="0" rIns="0" bIns="0" rtlCol="0" anchor="ctr"/>
+          <a:lstStyle/>
+          <a:p>
+            <a:pPr marL="0" indent="0">
+              <a:buNone/>
+            </a:pPr>
+            <a:r>
+              <a:rPr lang="en-US" sz="3000" b="1" dirty="0" err="1">
+                <a:solidFill>
+                  <a:srgbClr val="12302B"/>
+                </a:solidFill>
+                <a:latin typeface="Cambria" pitchFamily="34" charset="0"/>
+                <a:ea typeface="Cambria" pitchFamily="34" charset="-122"/>
+                <a:cs typeface="Cambria" pitchFamily="34" charset="-120"/>
+              </a:rPr>
+              <a:t>Analisis mendalam: jurnal vs bukti iPhone</a:t>
+            </a:r>
+            <a:endParaRPr lang="en-US" sz="3000" dirty="0"/>
+          </a:p>
+        </p:txBody>
+      </p:sp>
+      <p:sp>
+        <p:nvSpPr>
+          <p:cNvPr id="5" name="Text 3"/>
+          <p:cNvSpPr txBox="1"/>
+          <p:nvPr/>
+        </p:nvSpPr>
+        <p:spPr>
+          <a:xfrm>
+            <a:off x="1188720" y="768096"/>
+            <a:ext cx="10424160" cy="292608"/>
+          </a:xfrm>
+          <a:prstGeom prst="rect">
+            <a:avLst/>
+          </a:prstGeom>
+          <a:noFill/>
+          <a:ln/>
+        </p:spPr>
+        <p:txBody>
+          <a:bodyPr wrap="square" lIns="0" tIns="0" rIns="0" bIns="0" rtlCol="0" anchor="t"/>
+          <a:lstStyle/>
+          <a:p>
+            <a:pPr marL="0" indent="0">
+              <a:buNone/>
+            </a:pPr>
+            <a:r>
+              <a:rPr lang="en-US" sz="1400" i="1" dirty="0">
                 <a:solidFill>
                   <a:srgbClr val="5B6B68"/>
                 </a:solidFill>
@@ -3274,10 +6308,38 @@
                 <a:ea typeface="Calibri" pitchFamily="34" charset="-122"/>
                 <a:cs typeface="Calibri" pitchFamily="34" charset="-120"/>
               </a:rPr>
-              <a:t>   ·   KPI: </a:t>
-            </a:r>
-            <a:r>
-              <a:rPr lang="id-ID" sz="1300" dirty="0">
+              <a:t>Triangulasi temuan jurnal dengan laporan resmi Apple menghasilkan implikasi desain yang menjadi dasar usulan</a:t>
+            </a:r>
+            <a:endParaRPr lang="en-US" sz="1400" dirty="0"/>
+          </a:p>
+        </p:txBody>
+      </p:sp>
+      <p:sp>
+        <p:nvSpPr>
+          <p:cNvPr id="30" name="Text 27"/>
+          <p:cNvSpPr txBox="1"/>
+          <p:nvPr/>
+        </p:nvSpPr>
+        <p:spPr>
+          <a:xfrm>
+            <a:off x="11247120" y="6473952"/>
+            <a:ext cx="457200" cy="228600"/>
+          </a:xfrm>
+          <a:prstGeom prst="rect">
+            <a:avLst/>
+          </a:prstGeom>
+          <a:noFill/>
+          <a:ln/>
+        </p:spPr>
+        <p:txBody>
+          <a:bodyPr wrap="square" lIns="0" tIns="0" rIns="0" bIns="0" rtlCol="0" anchor="t"/>
+          <a:lstStyle/>
+          <a:p>
+            <a:pPr marL="0" indent="0" algn="r">
+              <a:buNone/>
+            </a:pPr>
+            <a:r>
+              <a:rPr lang="en-US" sz="1000" dirty="0">
                 <a:solidFill>
                   <a:srgbClr val="5B6B68"/>
                 </a:solidFill>
@@ -3285,7 +6347,982 @@
                 <a:ea typeface="Calibri" pitchFamily="34" charset="-122"/>
                 <a:cs typeface="Calibri" pitchFamily="34" charset="-120"/>
               </a:rPr>
-              <a:t>tingkat pengumpulan per negara, kemurnian material hasil pemulihan</a:t>
+              <a:t>7</a:t>
+            </a:r>
+            <a:endParaRPr lang="en-US" sz="1000" dirty="0"/>
+          </a:p>
+        </p:txBody>
+      </p:sp>
+      <p:sp>
+        <p:nvSpPr>
+          <p:cNvPr id="303" name="Header tabel"/>
+          <p:cNvSpPr/>
+          <p:nvPr/>
+        </p:nvSpPr>
+        <p:spPr>
+          <a:xfrm>
+            <a:off x="457200" y="1188720"/>
+            <a:ext cx="11277600" cy="365760"/>
+          </a:xfrm>
+          <a:prstGeom prst="rect">
+            <a:avLst/>
+          </a:prstGeom>
+          <a:solidFill>
+            <a:srgbClr val="12302B"/>
+          </a:solidFill>
+          <a:ln>
+            <a:noFill/>
+          </a:ln>
+        </p:spPr>
+      </p:sp>
+      <p:sp>
+        <p:nvSpPr>
+          <p:cNvPr id="304" name="H Sumber"/>
+          <p:cNvSpPr txBox="1"/>
+          <p:nvPr/>
+        </p:nvSpPr>
+        <p:spPr>
+          <a:xfrm>
+            <a:off x="548640" y="1188720"/>
+            <a:ext cx="2103120" cy="365760"/>
+          </a:xfrm>
+          <a:prstGeom prst="rect">
+            <a:avLst/>
+          </a:prstGeom>
+          <a:noFill/>
+          <a:ln/>
+        </p:spPr>
+        <p:txBody>
+          <a:bodyPr wrap="square" lIns="0" tIns="0" rIns="0" bIns="0" rtlCol="0" anchor="ctr"/>
+          <a:lstStyle/>
+          <a:p>
+            <a:pPr marL="0" indent="0" algn="l">
+              <a:buNone/>
+            </a:pPr>
+            <a:r>
+              <a:rPr lang="id-ID" sz="1200" b="1" dirty="0">
+                <a:solidFill>
+                  <a:srgbClr val="FFFFFF"/>
+                </a:solidFill>
+                <a:latin typeface="Calibri" pitchFamily="34" charset="0"/>
+                <a:ea typeface="Calibri" pitchFamily="34" charset="-122"/>
+                <a:cs typeface="Calibri" pitchFamily="34" charset="-120"/>
+              </a:rPr>
+              <a:t>Sumber</a:t>
+            </a:r>
+          </a:p>
+        </p:txBody>
+      </p:sp>
+      <p:sp>
+        <p:nvSpPr>
+          <p:cNvPr id="305" name="H Temuan jurnal"/>
+          <p:cNvSpPr txBox="1"/>
+          <p:nvPr/>
+        </p:nvSpPr>
+        <p:spPr>
+          <a:xfrm>
+            <a:off x="2834640" y="1188720"/>
+            <a:ext cx="2788920" cy="365760"/>
+          </a:xfrm>
+          <a:prstGeom prst="rect">
+            <a:avLst/>
+          </a:prstGeom>
+          <a:noFill/>
+          <a:ln/>
+        </p:spPr>
+        <p:txBody>
+          <a:bodyPr wrap="square" lIns="0" tIns="0" rIns="0" bIns="0" rtlCol="0" anchor="ctr"/>
+          <a:lstStyle/>
+          <a:p>
+            <a:pPr marL="0" indent="0" algn="l">
+              <a:buNone/>
+            </a:pPr>
+            <a:r>
+              <a:rPr lang="id-ID" sz="1200" b="1" dirty="0">
+                <a:solidFill>
+                  <a:srgbClr val="FFFFFF"/>
+                </a:solidFill>
+                <a:latin typeface="Calibri" pitchFamily="34" charset="0"/>
+                <a:ea typeface="Calibri" pitchFamily="34" charset="-122"/>
+                <a:cs typeface="Calibri" pitchFamily="34" charset="-120"/>
+              </a:rPr>
+              <a:t>Temuan jurnal</a:t>
+            </a:r>
+          </a:p>
+        </p:txBody>
+      </p:sp>
+      <p:sp>
+        <p:nvSpPr>
+          <p:cNvPr id="306" name="H Bukti iPhone (laporan resmi)"/>
+          <p:cNvSpPr txBox="1"/>
+          <p:nvPr/>
+        </p:nvSpPr>
+        <p:spPr>
+          <a:xfrm>
+            <a:off x="5806440" y="1188720"/>
+            <a:ext cx="2788920" cy="365760"/>
+          </a:xfrm>
+          <a:prstGeom prst="rect">
+            <a:avLst/>
+          </a:prstGeom>
+          <a:noFill/>
+          <a:ln/>
+        </p:spPr>
+        <p:txBody>
+          <a:bodyPr wrap="square" lIns="0" tIns="0" rIns="0" bIns="0" rtlCol="0" anchor="ctr"/>
+          <a:lstStyle/>
+          <a:p>
+            <a:pPr marL="0" indent="0" algn="l">
+              <a:buNone/>
+            </a:pPr>
+            <a:r>
+              <a:rPr lang="id-ID" sz="1200" b="1" dirty="0">
+                <a:solidFill>
+                  <a:srgbClr val="FFFFFF"/>
+                </a:solidFill>
+                <a:latin typeface="Calibri" pitchFamily="34" charset="0"/>
+                <a:ea typeface="Calibri" pitchFamily="34" charset="-122"/>
+                <a:cs typeface="Calibri" pitchFamily="34" charset="-120"/>
+              </a:rPr>
+              <a:t>Bukti iPhone (laporan resmi)</a:t>
+            </a:r>
+          </a:p>
+        </p:txBody>
+      </p:sp>
+      <p:sp>
+        <p:nvSpPr>
+          <p:cNvPr id="307" name="H Implikasi desain"/>
+          <p:cNvSpPr txBox="1"/>
+          <p:nvPr/>
+        </p:nvSpPr>
+        <p:spPr>
+          <a:xfrm>
+            <a:off x="8778240" y="1188720"/>
+            <a:ext cx="2956560" cy="365760"/>
+          </a:xfrm>
+          <a:prstGeom prst="rect">
+            <a:avLst/>
+          </a:prstGeom>
+          <a:noFill/>
+          <a:ln/>
+        </p:spPr>
+        <p:txBody>
+          <a:bodyPr wrap="square" lIns="0" tIns="0" rIns="0" bIns="0" rtlCol="0" anchor="ctr"/>
+          <a:lstStyle/>
+          <a:p>
+            <a:pPr marL="0" indent="0" algn="l">
+              <a:buNone/>
+            </a:pPr>
+            <a:r>
+              <a:rPr lang="id-ID" sz="1200" b="1" dirty="0">
+                <a:solidFill>
+                  <a:srgbClr val="FFFFFF"/>
+                </a:solidFill>
+                <a:latin typeface="Calibri" pitchFamily="34" charset="0"/>
+                <a:ea typeface="Calibri" pitchFamily="34" charset="-122"/>
+                <a:cs typeface="Calibri" pitchFamily="34" charset="-120"/>
+              </a:rPr>
+              <a:t>Implikasi desain</a:t>
+            </a:r>
+          </a:p>
+        </p:txBody>
+      </p:sp>
+      <p:sp>
+        <p:nvSpPr>
+          <p:cNvPr id="308" name="Baris 0"/>
+          <p:cNvSpPr/>
+          <p:nvPr/>
+        </p:nvSpPr>
+        <p:spPr>
+          <a:xfrm>
+            <a:off x="457200" y="1554480"/>
+            <a:ext cx="11277600" cy="1143000"/>
+          </a:xfrm>
+          <a:prstGeom prst="rect">
+            <a:avLst/>
+          </a:prstGeom>
+          <a:solidFill>
+            <a:srgbClr val="FFFFFF"/>
+          </a:solidFill>
+          <a:ln w="9525">
+            <a:solidFill>
+              <a:srgbClr val="D5E2DD"/>
+            </a:solidFill>
+          </a:ln>
+        </p:spPr>
+      </p:sp>
+      <p:sp>
+        <p:nvSpPr>
+          <p:cNvPr id="309" name="Sel implikasi 0"/>
+          <p:cNvSpPr/>
+          <p:nvPr/>
+        </p:nvSpPr>
+        <p:spPr>
+          <a:xfrm>
+            <a:off x="8686800" y="1554480"/>
+            <a:ext cx="3048000" cy="1143000"/>
+          </a:xfrm>
+          <a:prstGeom prst="rect">
+            <a:avLst/>
+          </a:prstGeom>
+          <a:solidFill>
+            <a:srgbClr val="E3EFEA"/>
+          </a:solidFill>
+          <a:ln w="9525">
+            <a:solidFill>
+              <a:srgbClr val="D5E2DD"/>
+            </a:solidFill>
+          </a:ln>
+        </p:spPr>
+      </p:sp>
+      <p:sp>
+        <p:nvSpPr>
+          <p:cNvPr id="310" name="C00"/>
+          <p:cNvSpPr txBox="1"/>
+          <p:nvPr/>
+        </p:nvSpPr>
+        <p:spPr>
+          <a:xfrm>
+            <a:off x="548640" y="1600200"/>
+            <a:ext cx="2011680" cy="1051560"/>
+          </a:xfrm>
+          <a:prstGeom prst="rect">
+            <a:avLst/>
+          </a:prstGeom>
+          <a:noFill/>
+          <a:ln/>
+        </p:spPr>
+        <p:txBody>
+          <a:bodyPr wrap="square" lIns="0" tIns="0" rIns="0" bIns="0" rtlCol="0" anchor="ctr"/>
+          <a:lstStyle/>
+          <a:p>
+            <a:pPr marL="0" indent="0" algn="l">
+              <a:buNone/>
+            </a:pPr>
+            <a:r>
+              <a:rPr lang="id-ID" sz="1200" b="1" dirty="0">
+                <a:solidFill>
+                  <a:srgbClr val="12302B"/>
+                </a:solidFill>
+                <a:latin typeface="Calibri" pitchFamily="34" charset="0"/>
+                <a:ea typeface="Calibri" pitchFamily="34" charset="-122"/>
+                <a:cs typeface="Calibri" pitchFamily="34" charset="-120"/>
+              </a:rPr>
+              <a:t>Cordella dkk. (2021)</a:t>
+            </a:r>
+          </a:p>
+        </p:txBody>
+      </p:sp>
+      <p:sp>
+        <p:nvSpPr>
+          <p:cNvPr id="311" name="C01"/>
+          <p:cNvSpPr txBox="1"/>
+          <p:nvPr/>
+        </p:nvSpPr>
+        <p:spPr>
+          <a:xfrm>
+            <a:off x="2834640" y="1600200"/>
+            <a:ext cx="2697480" cy="1051560"/>
+          </a:xfrm>
+          <a:prstGeom prst="rect">
+            <a:avLst/>
+          </a:prstGeom>
+          <a:noFill/>
+          <a:ln/>
+        </p:spPr>
+        <p:txBody>
+          <a:bodyPr wrap="square" lIns="0" tIns="0" rIns="0" bIns="0" rtlCol="0" anchor="ctr"/>
+          <a:lstStyle/>
+          <a:p>
+            <a:pPr marL="0" indent="0" algn="l">
+              <a:buNone/>
+            </a:pPr>
+            <a:r>
+              <a:rPr lang="id-ID" sz="1200" dirty="0">
+                <a:solidFill>
+                  <a:srgbClr val="1B2B2A"/>
+                </a:solidFill>
+                <a:latin typeface="Calibri" pitchFamily="34" charset="0"/>
+                <a:ea typeface="Calibri" pitchFamily="34" charset="-122"/>
+                <a:cs typeface="Calibri" pitchFamily="34" charset="-120"/>
+              </a:rPr>
+              <a:t>Ketahanan dan reparabilitas tidak harus dipertukarkan; baterai dan layar titik kritis.</a:t>
+            </a:r>
+          </a:p>
+        </p:txBody>
+      </p:sp>
+      <p:sp>
+        <p:nvSpPr>
+          <p:cNvPr id="312" name="C02"/>
+          <p:cNvSpPr txBox="1"/>
+          <p:nvPr/>
+        </p:nvSpPr>
+        <p:spPr>
+          <a:xfrm>
+            <a:off x="5806440" y="1600200"/>
+            <a:ext cx="2697480" cy="1051560"/>
+          </a:xfrm>
+          <a:prstGeom prst="rect">
+            <a:avLst/>
+          </a:prstGeom>
+          <a:noFill/>
+          <a:ln/>
+        </p:spPr>
+        <p:txBody>
+          <a:bodyPr wrap="square" lIns="0" tIns="0" rIns="0" bIns="0" rtlCol="0" anchor="ctr"/>
+          <a:lstStyle/>
+          <a:p>
+            <a:pPr marL="0" indent="0" algn="l">
+              <a:buNone/>
+            </a:pPr>
+            <a:r>
+              <a:rPr lang="id-ID" sz="1200" dirty="0">
+                <a:solidFill>
+                  <a:srgbClr val="1B2B2A"/>
+                </a:solidFill>
+                <a:latin typeface="Calibri" pitchFamily="34" charset="0"/>
+                <a:ea typeface="Calibri" pitchFamily="34" charset="-122"/>
+                <a:cs typeface="Calibri" pitchFamily="34" charset="-120"/>
+              </a:rPr>
+              <a:t>iPhone 16 tetap IP68, tetapi baterai kini dilepas arus listrik ±90 detik; skor iFixit naik 4 → 7/10.</a:t>
+            </a:r>
+          </a:p>
+        </p:txBody>
+      </p:sp>
+      <p:sp>
+        <p:nvSpPr>
+          <p:cNvPr id="313" name="C03"/>
+          <p:cNvSpPr txBox="1"/>
+          <p:nvPr/>
+        </p:nvSpPr>
+        <p:spPr>
+          <a:xfrm>
+            <a:off x="8778240" y="1600200"/>
+            <a:ext cx="2865120" cy="1051560"/>
+          </a:xfrm>
+          <a:prstGeom prst="rect">
+            <a:avLst/>
+          </a:prstGeom>
+          <a:noFill/>
+          <a:ln/>
+        </p:spPr>
+        <p:txBody>
+          <a:bodyPr wrap="square" lIns="0" tIns="0" rIns="0" bIns="0" rtlCol="0" anchor="ctr"/>
+          <a:lstStyle/>
+          <a:p>
+            <a:pPr marL="0" indent="0" algn="l">
+              <a:buNone/>
+            </a:pPr>
+            <a:r>
+              <a:rPr lang="id-ID" sz="1200" dirty="0">
+                <a:solidFill>
+                  <a:srgbClr val="12302B"/>
+                </a:solidFill>
+                <a:latin typeface="Calibri" pitchFamily="34" charset="0"/>
+                <a:ea typeface="Calibri" pitchFamily="34" charset="-122"/>
+                <a:cs typeface="Calibri" pitchFamily="34" charset="-120"/>
+              </a:rPr>
+              <a:t>Trade-off di slide 2 menyempit. Hambatan tersisa: penyandingan suku cadang dan dimensi baterai yang berubah → Usulan #1.</a:t>
+            </a:r>
+          </a:p>
+        </p:txBody>
+      </p:sp>
+      <p:sp>
+        <p:nvSpPr>
+          <p:cNvPr id="314" name="Baris 1"/>
+          <p:cNvSpPr/>
+          <p:nvPr/>
+        </p:nvSpPr>
+        <p:spPr>
+          <a:xfrm>
+            <a:off x="457200" y="2697480"/>
+            <a:ext cx="11277600" cy="1143000"/>
+          </a:xfrm>
+          <a:prstGeom prst="rect">
+            <a:avLst/>
+          </a:prstGeom>
+          <a:solidFill>
+            <a:srgbClr val="F4F8F6"/>
+          </a:solidFill>
+          <a:ln w="9525">
+            <a:solidFill>
+              <a:srgbClr val="D5E2DD"/>
+            </a:solidFill>
+          </a:ln>
+        </p:spPr>
+      </p:sp>
+      <p:sp>
+        <p:nvSpPr>
+          <p:cNvPr id="315" name="Sel implikasi 1"/>
+          <p:cNvSpPr/>
+          <p:nvPr/>
+        </p:nvSpPr>
+        <p:spPr>
+          <a:xfrm>
+            <a:off x="8686800" y="2697480"/>
+            <a:ext cx="3048000" cy="1143000"/>
+          </a:xfrm>
+          <a:prstGeom prst="rect">
+            <a:avLst/>
+          </a:prstGeom>
+          <a:solidFill>
+            <a:srgbClr val="E3EFEA"/>
+          </a:solidFill>
+          <a:ln w="9525">
+            <a:solidFill>
+              <a:srgbClr val="D5E2DD"/>
+            </a:solidFill>
+          </a:ln>
+        </p:spPr>
+      </p:sp>
+      <p:sp>
+        <p:nvSpPr>
+          <p:cNvPr id="316" name="C10"/>
+          <p:cNvSpPr txBox="1"/>
+          <p:nvPr/>
+        </p:nvSpPr>
+        <p:spPr>
+          <a:xfrm>
+            <a:off x="548640" y="2743200"/>
+            <a:ext cx="2011680" cy="1051560"/>
+          </a:xfrm>
+          <a:prstGeom prst="rect">
+            <a:avLst/>
+          </a:prstGeom>
+          <a:noFill/>
+          <a:ln/>
+        </p:spPr>
+        <p:txBody>
+          <a:bodyPr wrap="square" lIns="0" tIns="0" rIns="0" bIns="0" rtlCol="0" anchor="ctr"/>
+          <a:lstStyle/>
+          <a:p>
+            <a:pPr marL="0" indent="0" algn="l">
+              <a:buNone/>
+            </a:pPr>
+            <a:r>
+              <a:rPr lang="id-ID" sz="1200" b="1" dirty="0">
+                <a:solidFill>
+                  <a:srgbClr val="12302B"/>
+                </a:solidFill>
+                <a:latin typeface="Calibri" pitchFamily="34" charset="0"/>
+                <a:ea typeface="Calibri" pitchFamily="34" charset="-122"/>
+                <a:cs typeface="Calibri" pitchFamily="34" charset="-120"/>
+              </a:rPr>
+              <a:t>Makov dan Fitzpatrick (2021)</a:t>
+            </a:r>
+          </a:p>
+        </p:txBody>
+      </p:sp>
+      <p:sp>
+        <p:nvSpPr>
+          <p:cNvPr id="317" name="C11"/>
+          <p:cNvSpPr txBox="1"/>
+          <p:nvPr/>
+        </p:nvSpPr>
+        <p:spPr>
+          <a:xfrm>
+            <a:off x="2834640" y="2743200"/>
+            <a:ext cx="2697480" cy="1051560"/>
+          </a:xfrm>
+          <a:prstGeom prst="rect">
+            <a:avLst/>
+          </a:prstGeom>
+          <a:noFill/>
+          <a:ln/>
+        </p:spPr>
+        <p:txBody>
+          <a:bodyPr wrap="square" lIns="0" tIns="0" rIns="0" bIns="0" rtlCol="0" anchor="ctr"/>
+          <a:lstStyle/>
+          <a:p>
+            <a:pPr marL="0" indent="0" algn="l">
+              <a:buNone/>
+            </a:pPr>
+            <a:r>
+              <a:rPr lang="id-ID" sz="1200" dirty="0">
+                <a:solidFill>
+                  <a:srgbClr val="1B2B2A"/>
+                </a:solidFill>
+                <a:latin typeface="Calibri" pitchFamily="34" charset="0"/>
+                <a:ea typeface="Calibri" pitchFamily="34" charset="-122"/>
+                <a:cs typeface="Calibri" pitchFamily="34" charset="-120"/>
+              </a:rPr>
+              <a:t>Kinerja iPhone stabil; minat reparasi turun cepat seiring umur.</a:t>
+            </a:r>
+          </a:p>
+        </p:txBody>
+      </p:sp>
+      <p:sp>
+        <p:nvSpPr>
+          <p:cNvPr id="318" name="C12"/>
+          <p:cNvSpPr txBox="1"/>
+          <p:nvPr/>
+        </p:nvSpPr>
+        <p:spPr>
+          <a:xfrm>
+            <a:off x="5806440" y="2743200"/>
+            <a:ext cx="2697480" cy="1051560"/>
+          </a:xfrm>
+          <a:prstGeom prst="rect">
+            <a:avLst/>
+          </a:prstGeom>
+          <a:noFill/>
+          <a:ln/>
+        </p:spPr>
+        <p:txBody>
+          <a:bodyPr wrap="square" lIns="0" tIns="0" rIns="0" bIns="0" rtlCol="0" anchor="ctr"/>
+          <a:lstStyle/>
+          <a:p>
+            <a:pPr marL="0" indent="0" algn="l">
+              <a:buNone/>
+            </a:pPr>
+            <a:r>
+              <a:rPr lang="id-ID" sz="1200" dirty="0">
+                <a:solidFill>
+                  <a:srgbClr val="1B2B2A"/>
+                </a:solidFill>
+                <a:latin typeface="Calibri" pitchFamily="34" charset="0"/>
+                <a:ea typeface="Calibri" pitchFamily="34" charset="-122"/>
+                <a:cs typeface="Calibri" pitchFamily="34" charset="-120"/>
+              </a:rPr>
+              <a:t>Klaim Apple: pembaruan keamanan ≥5 tahun; umur layanan aktual dan rasio reparasi tidak dipublikasikan.</a:t>
+            </a:r>
+          </a:p>
+        </p:txBody>
+      </p:sp>
+      <p:sp>
+        <p:nvSpPr>
+          <p:cNvPr id="319" name="C13"/>
+          <p:cNvSpPr txBox="1"/>
+          <p:nvPr/>
+        </p:nvSpPr>
+        <p:spPr>
+          <a:xfrm>
+            <a:off x="8778240" y="2743200"/>
+            <a:ext cx="2865120" cy="1051560"/>
+          </a:xfrm>
+          <a:prstGeom prst="rect">
+            <a:avLst/>
+          </a:prstGeom>
+          <a:noFill/>
+          <a:ln/>
+        </p:spPr>
+        <p:txBody>
+          <a:bodyPr wrap="square" lIns="0" tIns="0" rIns="0" bIns="0" rtlCol="0" anchor="ctr"/>
+          <a:lstStyle/>
+          <a:p>
+            <a:pPr marL="0" indent="0" algn="l">
+              <a:buNone/>
+            </a:pPr>
+            <a:r>
+              <a:rPr lang="id-ID" sz="1200" dirty="0">
+                <a:solidFill>
+                  <a:srgbClr val="12302B"/>
+                </a:solidFill>
+                <a:latin typeface="Calibri" pitchFamily="34" charset="0"/>
+                <a:ea typeface="Calibri" pitchFamily="34" charset="-122"/>
+                <a:cs typeface="Calibri" pitchFamily="34" charset="-120"/>
+              </a:rPr>
+              <a:t>Umur pakai lebih dibatasi persepsi dan biaya reparasi daripada teknis → KPI umur layanan aktual dan reparasi murah.</a:t>
+            </a:r>
+          </a:p>
+        </p:txBody>
+      </p:sp>
+      <p:sp>
+        <p:nvSpPr>
+          <p:cNvPr id="320" name="Baris 2"/>
+          <p:cNvSpPr/>
+          <p:nvPr/>
+        </p:nvSpPr>
+        <p:spPr>
+          <a:xfrm>
+            <a:off x="457200" y="3840480"/>
+            <a:ext cx="11277600" cy="1143000"/>
+          </a:xfrm>
+          <a:prstGeom prst="rect">
+            <a:avLst/>
+          </a:prstGeom>
+          <a:solidFill>
+            <a:srgbClr val="FFFFFF"/>
+          </a:solidFill>
+          <a:ln w="9525">
+            <a:solidFill>
+              <a:srgbClr val="D5E2DD"/>
+            </a:solidFill>
+          </a:ln>
+        </p:spPr>
+      </p:sp>
+      <p:sp>
+        <p:nvSpPr>
+          <p:cNvPr id="321" name="Sel implikasi 2"/>
+          <p:cNvSpPr/>
+          <p:nvPr/>
+        </p:nvSpPr>
+        <p:spPr>
+          <a:xfrm>
+            <a:off x="8686800" y="3840480"/>
+            <a:ext cx="3048000" cy="1143000"/>
+          </a:xfrm>
+          <a:prstGeom prst="rect">
+            <a:avLst/>
+          </a:prstGeom>
+          <a:solidFill>
+            <a:srgbClr val="E3EFEA"/>
+          </a:solidFill>
+          <a:ln w="9525">
+            <a:solidFill>
+              <a:srgbClr val="D5E2DD"/>
+            </a:solidFill>
+          </a:ln>
+        </p:spPr>
+      </p:sp>
+      <p:sp>
+        <p:nvSpPr>
+          <p:cNvPr id="322" name="C20"/>
+          <p:cNvSpPr txBox="1"/>
+          <p:nvPr/>
+        </p:nvSpPr>
+        <p:spPr>
+          <a:xfrm>
+            <a:off x="548640" y="3886200"/>
+            <a:ext cx="2011680" cy="1051560"/>
+          </a:xfrm>
+          <a:prstGeom prst="rect">
+            <a:avLst/>
+          </a:prstGeom>
+          <a:noFill/>
+          <a:ln/>
+        </p:spPr>
+        <p:txBody>
+          <a:bodyPr wrap="square" lIns="0" tIns="0" rIns="0" bIns="0" rtlCol="0" anchor="ctr"/>
+          <a:lstStyle/>
+          <a:p>
+            <a:pPr marL="0" indent="0" algn="l">
+              <a:buNone/>
+            </a:pPr>
+            <a:r>
+              <a:rPr lang="id-ID" sz="1200" b="1" dirty="0">
+                <a:solidFill>
+                  <a:srgbClr val="12302B"/>
+                </a:solidFill>
+                <a:latin typeface="Calibri" pitchFamily="34" charset="0"/>
+                <a:ea typeface="Calibri" pitchFamily="34" charset="-122"/>
+                <a:cs typeface="Calibri" pitchFamily="34" charset="-120"/>
+              </a:rPr>
+              <a:t>Proske dan Jaeger-Erben (2019)</a:t>
+            </a:r>
+          </a:p>
+        </p:txBody>
+      </p:sp>
+      <p:sp>
+        <p:nvSpPr>
+          <p:cNvPr id="323" name="C21"/>
+          <p:cNvSpPr txBox="1"/>
+          <p:nvPr/>
+        </p:nvSpPr>
+        <p:spPr>
+          <a:xfrm>
+            <a:off x="2834640" y="3886200"/>
+            <a:ext cx="2697480" cy="1051560"/>
+          </a:xfrm>
+          <a:prstGeom prst="rect">
+            <a:avLst/>
+          </a:prstGeom>
+          <a:noFill/>
+          <a:ln/>
+        </p:spPr>
+        <p:txBody>
+          <a:bodyPr wrap="square" lIns="0" tIns="0" rIns="0" bIns="0" rtlCol="0" anchor="ctr"/>
+          <a:lstStyle/>
+          <a:p>
+            <a:pPr marL="0" indent="0" algn="l">
+              <a:buNone/>
+            </a:pPr>
+            <a:r>
+              <a:rPr lang="id-ID" sz="1200" dirty="0">
+                <a:solidFill>
+                  <a:srgbClr val="1B2B2A"/>
+                </a:solidFill>
+                <a:latin typeface="Calibri" pitchFamily="34" charset="0"/>
+                <a:ea typeface="Calibri" pitchFamily="34" charset="-122"/>
+                <a:cs typeface="Calibri" pitchFamily="34" charset="-120"/>
+              </a:rPr>
+              <a:t>Modularitas penuh membawa risiko (lebih banyak material, konektor) dan tidak menjamin umur lebih panjang.</a:t>
+            </a:r>
+          </a:p>
+        </p:txBody>
+      </p:sp>
+      <p:sp>
+        <p:nvSpPr>
+          <p:cNvPr id="324" name="C22"/>
+          <p:cNvSpPr txBox="1"/>
+          <p:nvPr/>
+        </p:nvSpPr>
+        <p:spPr>
+          <a:xfrm>
+            <a:off x="5806440" y="3886200"/>
+            <a:ext cx="2697480" cy="1051560"/>
+          </a:xfrm>
+          <a:prstGeom prst="rect">
+            <a:avLst/>
+          </a:prstGeom>
+          <a:noFill/>
+          <a:ln/>
+        </p:spPr>
+        <p:txBody>
+          <a:bodyPr wrap="square" lIns="0" tIns="0" rIns="0" bIns="0" rtlCol="0" anchor="ctr"/>
+          <a:lstStyle/>
+          <a:p>
+            <a:pPr marL="0" indent="0" algn="l">
+              <a:buNone/>
+            </a:pPr>
+            <a:r>
+              <a:rPr lang="id-ID" sz="1200" dirty="0">
+                <a:solidFill>
+                  <a:srgbClr val="1B2B2A"/>
+                </a:solidFill>
+                <a:latin typeface="Calibri" pitchFamily="34" charset="0"/>
+                <a:ea typeface="Calibri" pitchFamily="34" charset="-122"/>
+                <a:cs typeface="Calibri" pitchFamily="34" charset="-120"/>
+              </a:rPr>
+              <a:t>iPhone tidak modular; desain terpadu menjaga ketahanan air dan bentuk tipis.</a:t>
+            </a:r>
+          </a:p>
+        </p:txBody>
+      </p:sp>
+      <p:sp>
+        <p:nvSpPr>
+          <p:cNvPr id="325" name="C23"/>
+          <p:cNvSpPr txBox="1"/>
+          <p:nvPr/>
+        </p:nvSpPr>
+        <p:spPr>
+          <a:xfrm>
+            <a:off x="8778240" y="3886200"/>
+            <a:ext cx="2865120" cy="1051560"/>
+          </a:xfrm>
+          <a:prstGeom prst="rect">
+            <a:avLst/>
+          </a:prstGeom>
+          <a:noFill/>
+          <a:ln/>
+        </p:spPr>
+        <p:txBody>
+          <a:bodyPr wrap="square" lIns="0" tIns="0" rIns="0" bIns="0" rtlCol="0" anchor="ctr"/>
+          <a:lstStyle/>
+          <a:p>
+            <a:pPr marL="0" indent="0" algn="l">
+              <a:buNone/>
+            </a:pPr>
+            <a:r>
+              <a:rPr lang="id-ID" sz="1200" dirty="0">
+                <a:solidFill>
+                  <a:srgbClr val="12302B"/>
+                </a:solidFill>
+                <a:latin typeface="Calibri" pitchFamily="34" charset="0"/>
+                <a:ea typeface="Calibri" pitchFamily="34" charset="-122"/>
+                <a:cs typeface="Calibri" pitchFamily="34" charset="-120"/>
+              </a:rPr>
+              <a:t>Usulan dibatasi pada modul baterai (komponen kritis), bukan ponsel modular penuh.</a:t>
+            </a:r>
+          </a:p>
+        </p:txBody>
+      </p:sp>
+      <p:sp>
+        <p:nvSpPr>
+          <p:cNvPr id="326" name="Baris 3"/>
+          <p:cNvSpPr/>
+          <p:nvPr/>
+        </p:nvSpPr>
+        <p:spPr>
+          <a:xfrm>
+            <a:off x="457200" y="4983480"/>
+            <a:ext cx="11277600" cy="1143000"/>
+          </a:xfrm>
+          <a:prstGeom prst="rect">
+            <a:avLst/>
+          </a:prstGeom>
+          <a:solidFill>
+            <a:srgbClr val="F4F8F6"/>
+          </a:solidFill>
+          <a:ln w="9525">
+            <a:solidFill>
+              <a:srgbClr val="D5E2DD"/>
+            </a:solidFill>
+          </a:ln>
+        </p:spPr>
+      </p:sp>
+      <p:sp>
+        <p:nvSpPr>
+          <p:cNvPr id="327" name="Sel implikasi 3"/>
+          <p:cNvSpPr/>
+          <p:nvPr/>
+        </p:nvSpPr>
+        <p:spPr>
+          <a:xfrm>
+            <a:off x="8686800" y="4983480"/>
+            <a:ext cx="3048000" cy="1143000"/>
+          </a:xfrm>
+          <a:prstGeom prst="rect">
+            <a:avLst/>
+          </a:prstGeom>
+          <a:solidFill>
+            <a:srgbClr val="E3EFEA"/>
+          </a:solidFill>
+          <a:ln w="9525">
+            <a:solidFill>
+              <a:srgbClr val="D5E2DD"/>
+            </a:solidFill>
+          </a:ln>
+        </p:spPr>
+      </p:sp>
+      <p:sp>
+        <p:nvSpPr>
+          <p:cNvPr id="328" name="C30"/>
+          <p:cNvSpPr txBox="1"/>
+          <p:nvPr/>
+        </p:nvSpPr>
+        <p:spPr>
+          <a:xfrm>
+            <a:off x="548640" y="5029200"/>
+            <a:ext cx="2011680" cy="1051560"/>
+          </a:xfrm>
+          <a:prstGeom prst="rect">
+            <a:avLst/>
+          </a:prstGeom>
+          <a:noFill/>
+          <a:ln/>
+        </p:spPr>
+        <p:txBody>
+          <a:bodyPr wrap="square" lIns="0" tIns="0" rIns="0" bIns="0" rtlCol="0" anchor="ctr"/>
+          <a:lstStyle/>
+          <a:p>
+            <a:pPr marL="0" indent="0" algn="l">
+              <a:buNone/>
+            </a:pPr>
+            <a:r>
+              <a:rPr lang="id-ID" sz="1200" b="1" dirty="0">
+                <a:solidFill>
+                  <a:srgbClr val="12302B"/>
+                </a:solidFill>
+                <a:latin typeface="Calibri" pitchFamily="34" charset="0"/>
+                <a:ea typeface="Calibri" pitchFamily="34" charset="-122"/>
+                <a:cs typeface="Calibri" pitchFamily="34" charset="-120"/>
+              </a:rPr>
+              <a:t>Apple (2024a) dan Zink dan Geyer (2017)</a:t>
+            </a:r>
+          </a:p>
+        </p:txBody>
+      </p:sp>
+      <p:sp>
+        <p:nvSpPr>
+          <p:cNvPr id="329" name="C31"/>
+          <p:cNvSpPr txBox="1"/>
+          <p:nvPr/>
+        </p:nvSpPr>
+        <p:spPr>
+          <a:xfrm>
+            <a:off x="2834640" y="5029200"/>
+            <a:ext cx="2697480" cy="1051560"/>
+          </a:xfrm>
+          <a:prstGeom prst="rect">
+            <a:avLst/>
+          </a:prstGeom>
+          <a:noFill/>
+          <a:ln/>
+        </p:spPr>
+        <p:txBody>
+          <a:bodyPr wrap="square" lIns="0" tIns="0" rIns="0" bIns="0" rtlCol="0" anchor="ctr"/>
+          <a:lstStyle/>
+          <a:p>
+            <a:pPr marL="0" indent="0" algn="l">
+              <a:buNone/>
+            </a:pPr>
+            <a:r>
+              <a:rPr lang="id-ID" sz="1200" dirty="0">
+                <a:solidFill>
+                  <a:srgbClr val="1B2B2A"/>
+                </a:solidFill>
+                <a:latin typeface="Calibri" pitchFamily="34" charset="0"/>
+                <a:ea typeface="Calibri" pitchFamily="34" charset="-122"/>
+                <a:cs typeface="Calibri" pitchFamily="34" charset="-120"/>
+              </a:rPr>
+              <a:t>Rebound: pemulihan dapat mendorong produksi baru.</a:t>
+            </a:r>
+          </a:p>
+        </p:txBody>
+      </p:sp>
+      <p:sp>
+        <p:nvSpPr>
+          <p:cNvPr id="330" name="C32"/>
+          <p:cNvSpPr txBox="1"/>
+          <p:nvPr/>
+        </p:nvSpPr>
+        <p:spPr>
+          <a:xfrm>
+            <a:off x="5806440" y="5029200"/>
+            <a:ext cx="2697480" cy="1051560"/>
+          </a:xfrm>
+          <a:prstGeom prst="rect">
+            <a:avLst/>
+          </a:prstGeom>
+          <a:noFill/>
+          <a:ln/>
+        </p:spPr>
+        <p:txBody>
+          <a:bodyPr wrap="square" lIns="0" tIns="0" rIns="0" bIns="0" rtlCol="0" anchor="ctr"/>
+          <a:lstStyle/>
+          <a:p>
+            <a:pPr marL="0" indent="0" algn="l">
+              <a:buNone/>
+            </a:pPr>
+            <a:r>
+              <a:rPr lang="id-ID" sz="1200" dirty="0">
+                <a:solidFill>
+                  <a:srgbClr val="1B2B2A"/>
+                </a:solidFill>
+                <a:latin typeface="Calibri" pitchFamily="34" charset="0"/>
+                <a:ea typeface="Calibri" pitchFamily="34" charset="-122"/>
+                <a:cs typeface="Calibri" pitchFamily="34" charset="-120"/>
+              </a:rPr>
+              <a:t>Produksi 79% jejak karbon; penurunan 30% terutama dari listrik pemasok (20%), bukan material (±8%).</a:t>
+            </a:r>
+          </a:p>
+        </p:txBody>
+      </p:sp>
+      <p:sp>
+        <p:nvSpPr>
+          <p:cNvPr id="331" name="C33"/>
+          <p:cNvSpPr txBox="1"/>
+          <p:nvPr/>
+        </p:nvSpPr>
+        <p:spPr>
+          <a:xfrm>
+            <a:off x="8778240" y="5029200"/>
+            <a:ext cx="2865120" cy="1051560"/>
+          </a:xfrm>
+          <a:prstGeom prst="rect">
+            <a:avLst/>
+          </a:prstGeom>
+          <a:noFill/>
+          <a:ln/>
+        </p:spPr>
+        <p:txBody>
+          <a:bodyPr wrap="square" lIns="0" tIns="0" rIns="0" bIns="0" rtlCol="0" anchor="ctr"/>
+          <a:lstStyle/>
+          <a:p>
+            <a:pPr marL="0" indent="0" algn="l">
+              <a:buNone/>
+            </a:pPr>
+            <a:r>
+              <a:rPr lang="id-ID" sz="1200" dirty="0">
+                <a:solidFill>
+                  <a:srgbClr val="12302B"/>
+                </a:solidFill>
+                <a:latin typeface="Calibri" pitchFamily="34" charset="0"/>
+                <a:ea typeface="Calibri" pitchFamily="34" charset="-122"/>
+                <a:cs typeface="Calibri" pitchFamily="34" charset="-120"/>
+              </a:rPr>
+              <a:t>Memperpanjang umur 3 → 5 tahun memangkas ±33% dampak per tahun (slide 6) → lebih kuat daripada mengganti material; Trade In perlu dipantau.</a:t>
             </a:r>
           </a:p>
         </p:txBody>
@@ -5212,7 +9249,7 @@
                 <a:ea typeface="Calibri" pitchFamily="34" charset="-122"/>
                 <a:cs typeface="Calibri" pitchFamily="34" charset="-120"/>
               </a:rPr>
-              <a:t>Aluminium daur ulang pada casing (iPhone 16)</a:t>
+              <a:t>Aluminium daur ulang pada casing (Apple, 2024)</a:t>
             </a:r>
             <a:endParaRPr lang="en-US" sz="1400" dirty="0"/>
           </a:p>
@@ -5324,7 +9361,7 @@
                 <a:ea typeface="Calibri" pitchFamily="34" charset="-122"/>
                 <a:cs typeface="Calibri" pitchFamily="34" charset="-120"/>
               </a:rPr>
-              <a:t>Kobalt baterai, emas, dan timah solder daur ulang (iPhone 16)</a:t>
+              <a:t>Kobalt daur ulang pada baterai rancangan Apple (Apple, 2026)</a:t>
             </a:r>
             <a:endParaRPr lang="en-US" sz="1400" dirty="0"/>
           </a:p>
@@ -5397,7 +9434,7 @@
                 <a:ea typeface="Cambria" pitchFamily="34" charset="-122"/>
                 <a:cs typeface="Cambria" pitchFamily="34" charset="-120"/>
               </a:rPr>
-              <a:t>75%</a:t>
+              <a:t>±90 dtk</a:t>
             </a:r>
             <a:endParaRPr lang="en-US" sz="4000" dirty="0"/>
           </a:p>
@@ -5436,7 +9473,7 @@
                 <a:ea typeface="Calibri" pitchFamily="34" charset="-122"/>
                 <a:cs typeface="Calibri" pitchFamily="34" charset="-120"/>
               </a:rPr>
-              <a:t>Pelepasan baterai lebih cepat dibanding iPhone 15</a:t>
+              <a:t>Pelepasan perekat baterai dengan arus listrik (iPhone 16; panduan reparasi Apple)</a:t>
             </a:r>
             <a:endParaRPr lang="en-US" sz="1400" dirty="0"/>
           </a:p>
@@ -5509,7 +9546,7 @@
                 <a:ea typeface="Cambria" pitchFamily="34" charset="-122"/>
                 <a:cs typeface="Cambria" pitchFamily="34" charset="-120"/>
               </a:rPr>
-              <a:t>800</a:t>
+              <a:t>1.000</a:t>
             </a:r>
             <a:endParaRPr lang="en-US" sz="4000" dirty="0"/>
           </a:p>
@@ -5548,7 +9585,7 @@
                 <a:ea typeface="Calibri" pitchFamily="34" charset="-122"/>
                 <a:cs typeface="Calibri" pitchFamily="34" charset="-120"/>
               </a:rPr>
-              <a:t>Siklus baterai dengan kapasitas minimal 80% (</a:t>
+              <a:t>Siklus baterai pada kapasitas 80% (klaim Apple; minimum UE 800, </a:t>
             </a:r>
             <a:r>
               <a:rPr lang="en-US" sz="1400" dirty="0" err="1">
@@ -5559,7 +9596,7 @@
                 <a:ea typeface="Calibri" pitchFamily="34" charset="-122"/>
                 <a:cs typeface="Calibri" pitchFamily="34" charset="-120"/>
               </a:rPr>
-              <a:t>acuan</a:t>
+              <a:t>Reg. 2023/1670</a:t>
             </a:r>
             <a:r>
               <a:rPr lang="en-US" sz="1400" dirty="0">
@@ -5609,7 +9646,7 @@
                 <a:ea typeface="Calibri" pitchFamily="34" charset="-122"/>
                 <a:cs typeface="Calibri" pitchFamily="34" charset="-120"/>
               </a:rPr>
-              <a:t>Catatan: klaim bahan daur ulang berbasis massa dan hanya untuk komponen rancangan Apple.</a:t>
+              <a:t>Catatan: klaim berbasis massa, dilaporkan sendiri oleh Apple (PER 2024; Environmental Progress Report 2026), belum diverifikasi pihak ketiga.</a:t>
             </a:r>
             <a:endParaRPr lang="en-US" sz="1200" dirty="0"/>
           </a:p>
@@ -6554,7 +10591,7 @@
                           <a:ea typeface="Calibri" pitchFamily="34" charset="-122"/>
                           <a:cs typeface="Calibri" pitchFamily="34" charset="-120"/>
                         </a:rPr>
-                        <a:t>800 siklus baterai; umur aktual tidak dipublikasikan</a:t>
+                        <a:t>1.000 siklus @80% (klaim Apple); umur aktual tidak dipublikasikan</a:t>
                       </a:r>
                       <a:endParaRPr lang="en-US" sz="1300" dirty="0">
                         <a:latin typeface="Calibri" charset="0"/>
@@ -6765,7 +10802,7 @@
                           <a:ea typeface="Calibri" pitchFamily="34" charset="-122"/>
                           <a:cs typeface="Calibri" pitchFamily="34" charset="-120"/>
                         </a:rPr>
-                        <a:t>Self Service Repair; penyandingan suku cadang</a:t>
+                        <a:t>Self Service Repair; penyandingan dan kalibrasi; iFixit 7/10</a:t>
                       </a:r>
                       <a:endParaRPr lang="en-US" sz="1300" dirty="0">
                         <a:latin typeface="Calibri" charset="0"/>
@@ -6976,7 +11013,7 @@
                           <a:ea typeface="Calibri" pitchFamily="34" charset="-122"/>
                           <a:cs typeface="Calibri" pitchFamily="34" charset="-120"/>
                         </a:rPr>
-                        <a:t>Baterai direkatkan; perekat lepas-listrik</a:t>
+                        <a:t>Baterai lepas-listrik ±90 dtk; layar tetap disegel</a:t>
                       </a:r>
                       <a:endParaRPr lang="en-US" sz="1300" dirty="0">
                         <a:latin typeface="Calibri" charset="0"/>
@@ -7187,7 +11224,7 @@
                           <a:ea typeface="Calibri" pitchFamily="34" charset="-122"/>
                           <a:cs typeface="Calibri" pitchFamily="34" charset="-120"/>
                         </a:rPr>
-                        <a:t>5 tahun di UE; pasar lain tidak diatur</a:t>
+                        <a:t>Min. 5 tahun pembaruan keamanan (PSTI); UE wajib OS 5 tahun</a:t>
                       </a:r>
                       <a:endParaRPr lang="en-US" sz="1300" dirty="0">
                         <a:latin typeface="Calibri" charset="0"/>
@@ -7725,6 +11762,19 @@
               </a:rPr>
               <a:t>Kekuatan: material dan ketahanan. Hambatan: modularitas dan pembongkaran.</a:t>
             </a:r>
+          </a:p>
+          <a:p>
+            <a:pPr marL="0" indent="0">
+              <a:buNone/>
+            </a:pPr>
+            <a:r>
+              <a:rPr lang="id-ID" sz="1000" i="1" dirty="0">
+                <a:solidFill>
+                  <a:srgbClr val="5B6B68"/>
+                </a:solidFill>
+              </a:rPr>
+              <a:t>Sumber: Apple (2024a, 2024b); European Commission (2025); iFixit (2024). Skor: penilaian penulis.</a:t>
+            </a:r>
             <a:endParaRPr lang="en-US" sz="1400" dirty="0"/>
           </a:p>
         </p:txBody>
@@ -8212,7 +12262,7 @@
                 <a:ea typeface="Calibri" pitchFamily="34" charset="-122"/>
                 <a:cs typeface="Calibri" pitchFamily="34" charset="-120"/>
               </a:rPr>
-              <a:t>4</a:t>
+              <a:t>5</a:t>
             </a:r>
             <a:endParaRPr lang="en-US" sz="1000" dirty="0"/>
           </a:p>
@@ -10088,7 +14138,7 @@
                 <a:ea typeface="Calibri" pitchFamily="34" charset="-122"/>
                 <a:cs typeface="Calibri" pitchFamily="34" charset="-120"/>
               </a:rPr>
-              <a:t>5</a:t>
+              <a:t>6</a:t>
             </a:r>
             <a:endParaRPr lang="en-US" sz="1000" dirty="0"/>
           </a:p>
@@ -10196,7 +14246,7 @@
                 <a:ea typeface="Cambria" pitchFamily="34" charset="-122"/>
                 <a:cs typeface="Cambria" pitchFamily="34" charset="-120"/>
               </a:rPr>
-              <a:t>.1</a:t>
+              <a:t>.2</a:t>
             </a:r>
             <a:endParaRPr lang="en-US" sz="2000" dirty="0"/>
           </a:p>
@@ -10285,7 +14335,7 @@
                 <a:ea typeface="Calibri" pitchFamily="34" charset="-122"/>
                 <a:cs typeface="Calibri" pitchFamily="34" charset="-120"/>
               </a:rPr>
-              <a:t>Ringkasan dua usulan (detail sebelum–sesudah di slide 7 dan 8); konsep penulis, belum diuji teknis</a:t>
+              <a:t>Ringkasan dua usulan (detail sebelum–sesudah di slide 9 dan 10); konsep penulis, belum diuji teknis</a:t>
             </a:r>
             <a:endParaRPr lang="en-US" sz="1400" dirty="0"/>
           </a:p>
@@ -10439,7 +14489,7 @@
                 <a:ea typeface="Calibri" pitchFamily="34" charset="-122"/>
                 <a:cs typeface="Calibri" pitchFamily="34" charset="-120"/>
               </a:rPr>
-              <a:t>Tab tarik dan jalur akses jelas; hapus penyandingan serial untuk baterai, port, dan layar. Syarat: ketahanan air diuji ulang.</a:t>
+              <a:t>Modul baterai berdimensi tetap lintas generasi; hapus penyandingan serial untuk baterai, port, dan layar. Syarat: IP68 diuji ulang.</a:t>
             </a:r>
             <a:endParaRPr lang="en-US" sz="1600" dirty="0"/>
           </a:p>
@@ -11229,7 +15279,7 @@
                 <a:ea typeface="Calibri" pitchFamily="34" charset="-122"/>
                 <a:cs typeface="Calibri" pitchFamily="34" charset="-120"/>
               </a:rPr>
-              <a:t>6</a:t>
+              <a:t>8</a:t>
             </a:r>
             <a:endParaRPr lang="en-US" sz="1000" dirty="0"/>
           </a:p>
@@ -11279,7 +15329,7 @@
                 <a:ea typeface="Calibri" pitchFamily="34" charset="-122"/>
                 <a:cs typeface="Calibri" pitchFamily="34" charset="-120"/>
               </a:rPr>
-              <a:t>umur layanan yang lebih panjang dapat menurunkan penjualan unit baru; karena itu efek rebound tukar tambah tetap diawasi (lihat slide 5).</a:t>
+              <a:t>umur layanan yang lebih panjang dapat menurunkan penjualan unit baru; karena itu efek rebound tukar tambah tetap diawasi (lihat slide 6 dan 7).</a:t>
             </a:r>
           </a:p>
         </p:txBody>
@@ -11804,7 +15854,7 @@
                 <a:ea typeface="Calibri" pitchFamily="34" charset="-122"/>
                 <a:cs typeface="Calibri" pitchFamily="34" charset="-120"/>
               </a:rPr>
-              <a:t>Baseline: tidak dipublikasikan</a:t>
+              <a:t>Baseline: total belum dipublikasikan</a:t>
             </a:r>
             <a:r>
               <a:rPr lang="en-US" sz="1400" b="1" dirty="0">
@@ -12267,7 +16317,7 @@
                 <a:ea typeface="Calibri" pitchFamily="34" charset="-122"/>
                 <a:cs typeface="Calibri" pitchFamily="34" charset="-120"/>
               </a:rPr>
-              <a:t>9</a:t>
+              <a:t>11</a:t>
             </a:r>
             <a:endParaRPr lang="en-US" sz="1000" dirty="0"/>
           </a:p>
@@ -12368,12 +16418,12 @@
           <a:p>
             <a:pPr marL="0" indent="0" algn="l">
               <a:spcAft>
-                <a:spcPts val="1000"/>
+                <a:spcPts val="450"/>
               </a:spcAft>
               <a:buNone/>
             </a:pPr>
             <a:r>
-              <a:rPr lang="en-US" sz="1400" dirty="0">
+              <a:rPr lang="en-US" sz="1200" dirty="0">
                 <a:solidFill>
                   <a:srgbClr val="1B2B2A"/>
                 </a:solidFill>
@@ -12381,19 +16431,19 @@
                 <a:ea typeface="Calibri" pitchFamily="34" charset="-122"/>
                 <a:cs typeface="Calibri" pitchFamily="34" charset="-120"/>
               </a:rPr>
-              <a:t>Apple Inc. (2024). Product Environmental Report: iPhone 16 and iPhone 16 Plus.</a:t>
-            </a:r>
-            <a:endParaRPr lang="en-US" sz="1400" dirty="0"/>
+              <a:t>Apple Inc. (2017). Raising the bar: 11th annual Supplier Responsibility Progress Report. Apple Newsroom.</a:t>
+            </a:r>
+            <a:endParaRPr lang="en-US" sz="1200" dirty="0"/>
           </a:p>
           <a:p>
             <a:pPr marL="0" indent="0" algn="l">
               <a:spcAft>
-                <a:spcPts val="1000"/>
+                <a:spcPts val="450"/>
               </a:spcAft>
               <a:buNone/>
             </a:pPr>
             <a:r>
-              <a:rPr lang="en-US" sz="1400" dirty="0">
+              <a:rPr lang="en-US" sz="1200" dirty="0">
                 <a:solidFill>
                   <a:srgbClr val="1B2B2A"/>
                 </a:solidFill>
@@ -12401,19 +16451,19 @@
                 <a:ea typeface="Calibri" pitchFamily="34" charset="-122"/>
                 <a:cs typeface="Calibri" pitchFamily="34" charset="-120"/>
               </a:rPr>
-              <a:t>Apple Inc. (2017). Raising the bar: 11th annual Supplier Responsibility Progress Report. Apple Newsroom.</a:t>
-            </a:r>
-            <a:endParaRPr lang="en-US" sz="1400" dirty="0"/>
+              <a:t>Apple Inc. (2024a). Product Environmental Report: iPhone 16 and iPhone 16 Plus. Cupertino: Apple.</a:t>
+            </a:r>
+            <a:endParaRPr lang="en-US" sz="1200" dirty="0"/>
           </a:p>
           <a:p>
             <a:pPr marL="0" indent="0" algn="l">
               <a:spcAft>
-                <a:spcPts val="1000"/>
+                <a:spcPts val="450"/>
               </a:spcAft>
               <a:buNone/>
             </a:pPr>
             <a:r>
-              <a:rPr lang="en-US" sz="1400" dirty="0">
+              <a:rPr lang="en-US" sz="1200" dirty="0">
                 <a:solidFill>
                   <a:srgbClr val="1B2B2A"/>
                 </a:solidFill>
@@ -12421,19 +16471,19 @@
                 <a:ea typeface="Calibri" pitchFamily="34" charset="-122"/>
                 <a:cs typeface="Calibri" pitchFamily="34" charset="-120"/>
               </a:rPr>
-              <a:t>Bocken, N. M. P., de Pauw, I., Bakker, C., &amp; van der Grinten, B. (2016). Product design and business model strategies for a circular economy. J. Ind. Prod. Eng., 33(5), 308-320.</a:t>
-            </a:r>
-            <a:endParaRPr lang="en-US" sz="1400" dirty="0"/>
+              <a:t>Apple Inc. (2024b). iPhone defined support period statement under the UK PSTI regulations. Apple.</a:t>
+            </a:r>
+            <a:endParaRPr lang="en-US" sz="1200" dirty="0"/>
           </a:p>
           <a:p>
             <a:pPr marL="0" indent="0" algn="l">
               <a:spcAft>
-                <a:spcPts val="1000"/>
+                <a:spcPts val="450"/>
               </a:spcAft>
               <a:buNone/>
             </a:pPr>
             <a:r>
-              <a:rPr lang="en-US" sz="1400" dirty="0">
+              <a:rPr lang="en-US" sz="1200" dirty="0">
                 <a:solidFill>
                   <a:srgbClr val="1B2B2A"/>
                 </a:solidFill>
@@ -12441,19 +16491,19 @@
                 <a:ea typeface="Calibri" pitchFamily="34" charset="-122"/>
                 <a:cs typeface="Calibri" pitchFamily="34" charset="-120"/>
               </a:rPr>
-              <a:t>den Hollander, M. C., Bakker, C. A., &amp; Hultink, E. J. (2017). Product design in a circular economy. J. Ind. Ecol., 21(3), 517-525.</a:t>
-            </a:r>
-            <a:endParaRPr lang="en-US" sz="1400" dirty="0"/>
+              <a:t>Apple Inc. (2026). Environmental Progress Report (covering fiscal year 2025). Cupertino: Apple.</a:t>
+            </a:r>
+            <a:endParaRPr lang="en-US" sz="1200" dirty="0"/>
           </a:p>
           <a:p>
             <a:pPr marL="0" indent="0" algn="l">
               <a:spcAft>
-                <a:spcPts val="1000"/>
+                <a:spcPts val="450"/>
               </a:spcAft>
               <a:buNone/>
             </a:pPr>
             <a:r>
-              <a:rPr lang="en-US" sz="1400" dirty="0">
+              <a:rPr lang="en-US" sz="1200" dirty="0">
                 <a:solidFill>
                   <a:srgbClr val="1B2B2A"/>
                 </a:solidFill>
@@ -12461,19 +16511,19 @@
                 <a:ea typeface="Calibri" pitchFamily="34" charset="-122"/>
                 <a:cs typeface="Calibri" pitchFamily="34" charset="-120"/>
               </a:rPr>
-              <a:t>European Commission. (2025). New EU rules for durable, energy-efficient and repairable smartphones and tablets start applying.</a:t>
-            </a:r>
-            <a:endParaRPr lang="en-US" sz="1400" dirty="0"/>
+              <a:t>Bocken, N. M. P., de Pauw, I., Bakker, C., &amp; van der Grinten, B. (2016). Product design and business model strategies for a circular economy. J. Ind. Prod. Eng., 33(5), 308-320.</a:t>
+            </a:r>
+            <a:endParaRPr lang="en-US" sz="1200" dirty="0"/>
           </a:p>
           <a:p>
             <a:pPr marL="0" indent="0" algn="l">
               <a:spcAft>
-                <a:spcPts val="1000"/>
+                <a:spcPts val="450"/>
               </a:spcAft>
               <a:buNone/>
             </a:pPr>
             <a:r>
-              <a:rPr lang="en-US" sz="1400" dirty="0">
+              <a:rPr lang="en-US" sz="1200" dirty="0">
                 <a:solidFill>
                   <a:srgbClr val="1B2B2A"/>
                 </a:solidFill>
@@ -12481,136 +16531,249 @@
                 <a:ea typeface="Calibri" pitchFamily="34" charset="-122"/>
                 <a:cs typeface="Calibri" pitchFamily="34" charset="-120"/>
               </a:rPr>
-              <a:t>Geissdoerfer, M., Savaget, P., Bocken, N. M. P., &amp; Hultink, E. J. (2017). The circular economy: A new sustainability paradigm? J. Clean. Prod., 143, 757-768.</a:t>
-            </a:r>
-            <a:endParaRPr lang="id-ID" sz="1400" dirty="0">
-              <a:solidFill>
-                <a:srgbClr val="1B2B2A"/>
-              </a:solidFill>
-              <a:latin typeface="Calibri" pitchFamily="34" charset="0"/>
-              <a:ea typeface="Calibri" pitchFamily="34" charset="-122"/>
-              <a:cs typeface="Calibri" pitchFamily="34" charset="-120"/>
-            </a:endParaRPr>
-          </a:p>
-          <a:p>
-            <a:pPr algn="l">
-              <a:spcAft>
-                <a:spcPts val="1000"/>
-              </a:spcAft>
-            </a:pPr>
-            <a:r>
-              <a:rPr lang="en-US" sz="1400" dirty="0">
-                <a:solidFill>
-                  <a:srgbClr val="1B2B2A"/>
-                </a:solidFill>
-                <a:latin typeface="Calibri" pitchFamily="34" charset="0"/>
-                <a:ea typeface="Calibri" pitchFamily="34" charset="-122"/>
-                <a:cs typeface="Calibri" pitchFamily="34" charset="-120"/>
-              </a:rPr>
-              <a:t>ITU &amp; UNITAR. (2024). The Global E-waste Monitor 2024.</a:t>
-            </a:r>
-            <a:endParaRPr lang="en-US" sz="1400" dirty="0"/>
-          </a:p>
-          <a:p>
-            <a:pPr algn="l">
-              <a:spcAft>
-                <a:spcPts val="1000"/>
-              </a:spcAft>
-            </a:pPr>
-            <a:r>
-              <a:rPr lang="en-US" sz="1400" dirty="0">
-                <a:solidFill>
-                  <a:srgbClr val="1B2B2A"/>
-                </a:solidFill>
-                <a:latin typeface="Calibri" pitchFamily="34" charset="0"/>
-                <a:ea typeface="Calibri" pitchFamily="34" charset="-122"/>
-                <a:cs typeface="Calibri" pitchFamily="34" charset="-120"/>
-              </a:rPr>
-              <a:t>Fortune. (2025). Indonesia iPhone ban, Apple deal and investment in AirTag plant.</a:t>
-            </a:r>
-            <a:endParaRPr lang="en-US" sz="1400" dirty="0"/>
-          </a:p>
-          <a:p>
-            <a:pPr algn="l">
-              <a:spcAft>
-                <a:spcPts val="1000"/>
-              </a:spcAft>
-            </a:pPr>
-            <a:r>
-              <a:rPr lang="en-US" sz="1400" dirty="0">
-                <a:solidFill>
-                  <a:srgbClr val="1B2B2A"/>
-                </a:solidFill>
-                <a:latin typeface="Calibri" pitchFamily="34" charset="0"/>
-                <a:ea typeface="Calibri" pitchFamily="34" charset="-122"/>
-                <a:cs typeface="Calibri" pitchFamily="34" charset="-120"/>
-              </a:rPr>
-              <a:t>ESG Dive. (2026). Apple suppliers boost green energy but stagnate on emissions cuts.</a:t>
-            </a:r>
-            <a:endParaRPr lang="en-US" sz="1400" dirty="0"/>
-          </a:p>
-          <a:p>
-            <a:pPr algn="l">
-              <a:spcAft>
-                <a:spcPts val="1000"/>
-              </a:spcAft>
-            </a:pPr>
-            <a:r>
-              <a:rPr lang="en-US" sz="1400" dirty="0">
-                <a:solidFill>
-                  <a:srgbClr val="1B2B2A"/>
-                </a:solidFill>
-                <a:latin typeface="Calibri" pitchFamily="34" charset="0"/>
-                <a:ea typeface="Calibri" pitchFamily="34" charset="-122"/>
-                <a:cs typeface="Calibri" pitchFamily="34" charset="-120"/>
-              </a:rPr>
-              <a:t>Tukker, A. (2004). Eight types of product-service system. Bus. Strategy Environ., 13(4), 246-260.</a:t>
-            </a:r>
-            <a:endParaRPr lang="en-US" sz="1400" dirty="0"/>
-          </a:p>
-          <a:p>
-            <a:pPr algn="l">
-              <a:spcAft>
-                <a:spcPts val="1000"/>
-              </a:spcAft>
-            </a:pPr>
-            <a:r>
-              <a:rPr lang="en-US" sz="1400" dirty="0">
-                <a:solidFill>
-                  <a:srgbClr val="1B2B2A"/>
-                </a:solidFill>
-                <a:latin typeface="Calibri" pitchFamily="34" charset="0"/>
-                <a:ea typeface="Calibri" pitchFamily="34" charset="-122"/>
-                <a:cs typeface="Calibri" pitchFamily="34" charset="-120"/>
-              </a:rPr>
-              <a:t>Zink, T., &amp; Geyer, R. (2017). Circular economy rebound. J. Ind. Ecol., 21(3), 593-602.</a:t>
-            </a:r>
-            <a:endParaRPr lang="en-US" sz="1400" dirty="0"/>
+              <a:t>Cordella, M., Alfieri, F., Clemm, C., &amp; Berwald, A. (2021). Durability of smartphones: A technical analysis of reliability and repairability aspects. J. Clean. Prod., 286, 125388.</a:t>
+            </a:r>
+            <a:endParaRPr lang="en-US" sz="1200" dirty="0"/>
           </a:p>
           <a:p>
             <a:pPr marL="0" indent="0" algn="l">
               <a:spcAft>
-                <a:spcPts val="1000"/>
+                <a:spcPts val="450"/>
               </a:spcAft>
               <a:buNone/>
             </a:pPr>
-            <a:endParaRPr lang="id-ID" sz="1400" dirty="0">
-              <a:solidFill>
-                <a:srgbClr val="1B2B2A"/>
-              </a:solidFill>
-              <a:latin typeface="Calibri" pitchFamily="34" charset="0"/>
-              <a:ea typeface="Calibri" pitchFamily="34" charset="-122"/>
-              <a:cs typeface="Calibri" pitchFamily="34" charset="-120"/>
-            </a:endParaRPr>
+            <a:r>
+              <a:rPr lang="en-US" sz="1200" dirty="0">
+                <a:solidFill>
+                  <a:srgbClr val="1B2B2A"/>
+                </a:solidFill>
+                <a:latin typeface="Calibri" pitchFamily="34" charset="0"/>
+                <a:ea typeface="Calibri" pitchFamily="34" charset="-122"/>
+                <a:cs typeface="Calibri" pitchFamily="34" charset="-120"/>
+              </a:rPr>
+              <a:t>den Hollander, M. C., Bakker, C. A., &amp; Hultink, E. J. (2017). Product design in a circular economy. J. Ind. Ecol., 21(3), 517-525.</a:t>
+            </a:r>
+            <a:endParaRPr lang="en-US" sz="1200" dirty="0"/>
           </a:p>
           <a:p>
             <a:pPr marL="0" indent="0" algn="l">
               <a:spcAft>
-                <a:spcPts val="1000"/>
+                <a:spcPts val="450"/>
               </a:spcAft>
               <a:buNone/>
             </a:pPr>
-            <a:endParaRPr lang="en-US" sz="1400" dirty="0"/>
+            <a:r>
+              <a:rPr lang="en-US" sz="1200" dirty="0">
+                <a:solidFill>
+                  <a:srgbClr val="1B2B2A"/>
+                </a:solidFill>
+                <a:latin typeface="Calibri" pitchFamily="34" charset="0"/>
+                <a:ea typeface="Calibri" pitchFamily="34" charset="-122"/>
+                <a:cs typeface="Calibri" pitchFamily="34" charset="-120"/>
+              </a:rPr>
+              <a:t>European Commission. (2023). Commission Regulation (EU) 2023/1670 laying down ecodesign requirements for smartphones and tablets. OJ L 214.</a:t>
+            </a:r>
+            <a:endParaRPr lang="en-US" sz="1200" dirty="0"/>
+          </a:p>
+          <a:p>
+            <a:pPr marL="0" indent="0" algn="l">
+              <a:spcAft>
+                <a:spcPts val="450"/>
+              </a:spcAft>
+              <a:buNone/>
+            </a:pPr>
+            <a:r>
+              <a:rPr lang="en-US" sz="1200" dirty="0">
+                <a:solidFill>
+                  <a:srgbClr val="1B2B2A"/>
+                </a:solidFill>
+                <a:latin typeface="Calibri" pitchFamily="34" charset="0"/>
+                <a:ea typeface="Calibri" pitchFamily="34" charset="-122"/>
+                <a:cs typeface="Calibri" pitchFamily="34" charset="-120"/>
+              </a:rPr>
+              <a:t>European Commission. (2025). New EU rules for durable, energy-efficient and repairable smartphones and tablets start applying.</a:t>
+            </a:r>
+            <a:endParaRPr lang="en-US" sz="1200" dirty="0"/>
+          </a:p>
+          <a:p>
+            <a:pPr marL="0" indent="0" algn="l">
+              <a:spcAft>
+                <a:spcPts val="450"/>
+              </a:spcAft>
+              <a:buNone/>
+            </a:pPr>
+            <a:r>
+              <a:rPr lang="en-US" sz="1200" dirty="0">
+                <a:solidFill>
+                  <a:srgbClr val="1B2B2A"/>
+                </a:solidFill>
+                <a:latin typeface="Calibri" pitchFamily="34" charset="0"/>
+                <a:ea typeface="Calibri" pitchFamily="34" charset="-122"/>
+                <a:cs typeface="Calibri" pitchFamily="34" charset="-120"/>
+              </a:rPr>
+              <a:t>Fortune. (2025). Indonesia iPhone ban, Apple deal and investment in AirTag plant.</a:t>
+            </a:r>
+            <a:endParaRPr lang="en-US" sz="1200" dirty="0"/>
+          </a:p>
+          <a:p>
+            <a:pPr marL="0" indent="0" algn="l">
+              <a:spcAft>
+                <a:spcPts val="450"/>
+              </a:spcAft>
+              <a:buNone/>
+            </a:pPr>
+            <a:r>
+              <a:rPr lang="en-US" sz="1200" dirty="0">
+                <a:solidFill>
+                  <a:srgbClr val="1B2B2A"/>
+                </a:solidFill>
+                <a:latin typeface="Calibri" pitchFamily="34" charset="0"/>
+                <a:ea typeface="Calibri" pitchFamily="34" charset="-122"/>
+                <a:cs typeface="Calibri" pitchFamily="34" charset="-120"/>
+              </a:rPr>
+              <a:t>Geissdoerfer, M., Savaget, P., Bocken, N. M. P., &amp; Hultink, E. J. (2017). The circular economy: A new sustainability paradigm? J. Clean. Prod., 143, 757-768.</a:t>
+            </a:r>
+            <a:endParaRPr lang="en-US" sz="1200" dirty="0"/>
+          </a:p>
+          <a:p>
+            <a:pPr marL="0" indent="0" algn="l">
+              <a:spcAft>
+                <a:spcPts val="450"/>
+              </a:spcAft>
+              <a:buNone/>
+            </a:pPr>
+            <a:r>
+              <a:rPr lang="en-US" sz="1200" dirty="0">
+                <a:solidFill>
+                  <a:srgbClr val="1B2B2A"/>
+                </a:solidFill>
+                <a:latin typeface="Calibri" pitchFamily="34" charset="0"/>
+                <a:ea typeface="Calibri" pitchFamily="34" charset="-122"/>
+                <a:cs typeface="Calibri" pitchFamily="34" charset="-120"/>
+              </a:rPr>
+              <a:t>iFixit. (2024). iPhone 16 teardown and repairability score. iFixit News.</a:t>
+            </a:r>
+            <a:endParaRPr lang="en-US" sz="1200" dirty="0"/>
+          </a:p>
+          <a:p>
+            <a:pPr marL="0" indent="0" algn="l">
+              <a:spcAft>
+                <a:spcPts val="450"/>
+              </a:spcAft>
+              <a:buNone/>
+            </a:pPr>
+            <a:r>
+              <a:rPr lang="en-US" sz="1200" dirty="0">
+                <a:solidFill>
+                  <a:srgbClr val="1B2B2A"/>
+                </a:solidFill>
+                <a:latin typeface="Calibri" pitchFamily="34" charset="0"/>
+                <a:ea typeface="Calibri" pitchFamily="34" charset="-122"/>
+                <a:cs typeface="Calibri" pitchFamily="34" charset="-120"/>
+              </a:rPr>
+              <a:t>ITU &amp; UNITAR. (2024). The Global E-waste Monitor 2024. Geneva/Bonn: ITU &amp; UNITAR.</a:t>
+            </a:r>
+            <a:endParaRPr lang="en-US" sz="1200" dirty="0"/>
+          </a:p>
+          <a:p>
+            <a:pPr marL="0" indent="0" algn="l">
+              <a:spcAft>
+                <a:spcPts val="450"/>
+              </a:spcAft>
+              <a:buNone/>
+            </a:pPr>
+            <a:r>
+              <a:rPr lang="en-US" sz="1200" dirty="0">
+                <a:solidFill>
+                  <a:srgbClr val="1B2B2A"/>
+                </a:solidFill>
+                <a:latin typeface="Calibri" pitchFamily="34" charset="0"/>
+                <a:ea typeface="Calibri" pitchFamily="34" charset="-122"/>
+                <a:cs typeface="Calibri" pitchFamily="34" charset="-120"/>
+              </a:rPr>
+              <a:t>Makov, T., &amp; Fitzpatrick, C. (2021). Is repairability enough? Big data insights into smartphone obsolescence and consumer interest in repair. J. Clean. Prod., 313, 127561.</a:t>
+            </a:r>
+            <a:endParaRPr lang="en-US" sz="1200" dirty="0"/>
+          </a:p>
+          <a:p>
+            <a:pPr marL="0" indent="0" algn="l">
+              <a:spcAft>
+                <a:spcPts val="450"/>
+              </a:spcAft>
+              <a:buNone/>
+            </a:pPr>
+            <a:r>
+              <a:rPr lang="en-US" sz="1200" dirty="0">
+                <a:solidFill>
+                  <a:srgbClr val="1B2B2A"/>
+                </a:solidFill>
+                <a:latin typeface="Calibri" pitchFamily="34" charset="0"/>
+                <a:ea typeface="Calibri" pitchFamily="34" charset="-122"/>
+                <a:cs typeface="Calibri" pitchFamily="34" charset="-120"/>
+              </a:rPr>
+              <a:t>Oregon Legislative Assembly. (2024). Senate Bill 1596 (right to repair).</a:t>
+            </a:r>
+            <a:endParaRPr lang="en-US" sz="1200" dirty="0"/>
+          </a:p>
+          <a:p>
+            <a:pPr marL="0" indent="0" algn="l">
+              <a:spcAft>
+                <a:spcPts val="450"/>
+              </a:spcAft>
+              <a:buNone/>
+            </a:pPr>
+            <a:r>
+              <a:rPr lang="en-US" sz="1200" dirty="0">
+                <a:solidFill>
+                  <a:srgbClr val="1B2B2A"/>
+                </a:solidFill>
+                <a:latin typeface="Calibri" pitchFamily="34" charset="0"/>
+                <a:ea typeface="Calibri" pitchFamily="34" charset="-122"/>
+                <a:cs typeface="Calibri" pitchFamily="34" charset="-120"/>
+              </a:rPr>
+              <a:t>Proske, M., &amp; Jaeger-Erben, M. (2019). Decreasing obsolescence with modular smartphones? An interdisciplinary perspective on lifecycles. J. Clean. Prod. https://doi.org/10.1016/j.jclepro.2019.03.116</a:t>
+            </a:r>
+            <a:endParaRPr lang="en-US" sz="1200" dirty="0"/>
+          </a:p>
+          <a:p>
+            <a:pPr marL="0" indent="0" algn="l">
+              <a:spcAft>
+                <a:spcPts val="450"/>
+              </a:spcAft>
+              <a:buNone/>
+            </a:pPr>
+            <a:r>
+              <a:rPr lang="en-US" sz="1200" dirty="0">
+                <a:solidFill>
+                  <a:srgbClr val="1B2B2A"/>
+                </a:solidFill>
+                <a:latin typeface="Calibri" pitchFamily="34" charset="0"/>
+                <a:ea typeface="Calibri" pitchFamily="34" charset="-122"/>
+                <a:cs typeface="Calibri" pitchFamily="34" charset="-120"/>
+              </a:rPr>
+              <a:t>Tukker, A. (2004). Eight types of product-service system. Bus. Strategy Environ., 13(4), 246-260.</a:t>
+            </a:r>
+            <a:endParaRPr lang="en-US" sz="1200" dirty="0"/>
+          </a:p>
+          <a:p>
+            <a:pPr marL="0" indent="0" algn="l">
+              <a:spcAft>
+                <a:spcPts val="450"/>
+              </a:spcAft>
+              <a:buNone/>
+            </a:pPr>
+            <a:r>
+              <a:rPr lang="en-US" sz="1200" dirty="0">
+                <a:solidFill>
+                  <a:srgbClr val="1B2B2A"/>
+                </a:solidFill>
+                <a:latin typeface="Calibri" pitchFamily="34" charset="0"/>
+                <a:ea typeface="Calibri" pitchFamily="34" charset="-122"/>
+                <a:cs typeface="Calibri" pitchFamily="34" charset="-120"/>
+              </a:rPr>
+              <a:t>Zink, T., &amp; Geyer, R. (2017). Circular economy rebound. J. Ind. Ecol., 21(3), 593-602.</a:t>
+            </a:r>
+            <a:endParaRPr lang="en-US" sz="1200" dirty="0"/>
           </a:p>
         </p:txBody>
       </p:sp>
@@ -12647,7 +16810,7 @@
                 <a:ea typeface="Calibri" pitchFamily="34" charset="-122"/>
                 <a:cs typeface="Calibri" pitchFamily="34" charset="-120"/>
               </a:rPr>
-              <a:t>10</a:t>
+              <a:t>12</a:t>
             </a:r>
             <a:endParaRPr lang="en-US" sz="1000" dirty="0"/>
           </a:p>
